--- a/lectures/theory/Lecture10.2_Feature_Stores_Hopsworks.pptx
+++ b/lectures/theory/Lecture10.2_Feature_Stores_Hopsworks.pptx
@@ -5,24 +5,23 @@
     <p:sldMasterId id="2147483648" r:id="rId1"/>
   </p:sldMasterIdLst>
   <p:sldIdLst>
-    <p:sldId id="256" r:id="rId7"/>
-    <p:sldId id="257" r:id="rId8"/>
-    <p:sldId id="258" r:id="rId9"/>
-    <p:sldId id="259" r:id="rId10"/>
-    <p:sldId id="260" r:id="rId11"/>
-    <p:sldId id="261" r:id="rId12"/>
-    <p:sldId id="262" r:id="rId13"/>
-    <p:sldId id="263" r:id="rId14"/>
-    <p:sldId id="264" r:id="rId15"/>
-    <p:sldId id="265" r:id="rId16"/>
-    <p:sldId id="266" r:id="rId17"/>
-    <p:sldId id="267" r:id="rId18"/>
-    <p:sldId id="268" r:id="rId19"/>
-    <p:sldId id="269" r:id="rId20"/>
-    <p:sldId id="270" r:id="rId21"/>
-    <p:sldId id="271" r:id="rId22"/>
+    <p:sldId id="256" r:id="rId2"/>
+    <p:sldId id="257" r:id="rId3"/>
+    <p:sldId id="258" r:id="rId4"/>
+    <p:sldId id="259" r:id="rId5"/>
+    <p:sldId id="260" r:id="rId6"/>
+    <p:sldId id="261" r:id="rId7"/>
+    <p:sldId id="262" r:id="rId8"/>
+    <p:sldId id="263" r:id="rId9"/>
+    <p:sldId id="264" r:id="rId10"/>
+    <p:sldId id="265" r:id="rId11"/>
+    <p:sldId id="266" r:id="rId12"/>
+    <p:sldId id="267" r:id="rId13"/>
+    <p:sldId id="268" r:id="rId14"/>
+    <p:sldId id="269" r:id="rId15"/>
+    <p:sldId id="270" r:id="rId16"/>
   </p:sldIdLst>
-  <p:sldSz cx="12192000" cy="6858000" type="screen4x3"/>
+  <p:sldSz cx="12192000" cy="6858000"/>
   <p:notesSz cx="6858000" cy="9144000"/>
   <p:defaultTextStyle>
     <a:defPPr>
@@ -119,6 +118,22 @@
       </a:defRPr>
     </a:lvl9pPr>
   </p:defaultTextStyle>
+  <p:extLst>
+    <p:ext uri="{EFAFB233-063F-42B5-8137-9DF3F51BA10A}">
+      <p15:sldGuideLst xmlns:p15="http://schemas.microsoft.com/office/powerpoint/2012/main">
+        <p15:guide id="1" orient="horz" pos="2160">
+          <p15:clr>
+            <a:srgbClr val="A4A3A4"/>
+          </p15:clr>
+        </p15:guide>
+        <p15:guide id="2" pos="2880">
+          <p15:clr>
+            <a:srgbClr val="A4A3A4"/>
+          </p15:clr>
+        </p15:guide>
+      </p15:sldGuideLst>
+    </p:ext>
+  </p:extLst>
 </p:presentation>
 </file>
 
@@ -160,10 +175,9 @@
           <a:lstStyle/>
           <a:p>
             <a:r>
-              <a:rPr lang="en-US" smtClean="0"/>
+              <a:rPr lang="en-US"/>
               <a:t>Click to edit Master title style</a:t>
             </a:r>
-            <a:endParaRPr lang="en-US"/>
           </a:p>
         </p:txBody>
       </p:sp>
@@ -279,10 +293,9 @@
           </a:lstStyle>
           <a:p>
             <a:r>
-              <a:rPr lang="en-US" smtClean="0"/>
+              <a:rPr lang="en-US"/>
               <a:t>Click to edit Master subtitle style</a:t>
             </a:r>
-            <a:endParaRPr lang="en-US"/>
           </a:p>
         </p:txBody>
       </p:sp>
@@ -303,7 +316,7 @@
           <a:p>
             <a:fld id="{5BCAD085-E8A6-8845-BD4E-CB4CCA059FC4}" type="datetimeFigureOut">
               <a:rPr lang="en-US" smtClean="0"/>
-              <a:t>1/27/13</a:t>
+              <a:t>9/13/26</a:t>
             </a:fld>
             <a:endParaRPr lang="en-US"/>
           </a:p>
@@ -397,10 +410,9 @@
           <a:lstStyle/>
           <a:p>
             <a:r>
-              <a:rPr lang="en-US" smtClean="0"/>
+              <a:rPr lang="en-US"/>
               <a:t>Click to edit Master title style</a:t>
             </a:r>
-            <a:endParaRPr lang="en-US"/>
           </a:p>
         </p:txBody>
       </p:sp>
@@ -421,38 +433,37 @@
           <a:p>
             <a:pPr lvl="0"/>
             <a:r>
-              <a:rPr lang="en-US" smtClean="0"/>
+              <a:rPr lang="en-US"/>
               <a:t>Click to edit Master text styles</a:t>
             </a:r>
           </a:p>
           <a:p>
             <a:pPr lvl="1"/>
             <a:r>
-              <a:rPr lang="en-US" smtClean="0"/>
+              <a:rPr lang="en-US"/>
               <a:t>Second level</a:t>
             </a:r>
           </a:p>
           <a:p>
             <a:pPr lvl="2"/>
             <a:r>
-              <a:rPr lang="en-US" smtClean="0"/>
+              <a:rPr lang="en-US"/>
               <a:t>Third level</a:t>
             </a:r>
           </a:p>
           <a:p>
             <a:pPr lvl="3"/>
             <a:r>
-              <a:rPr lang="en-US" smtClean="0"/>
+              <a:rPr lang="en-US"/>
               <a:t>Fourth level</a:t>
             </a:r>
           </a:p>
           <a:p>
             <a:pPr lvl="4"/>
             <a:r>
-              <a:rPr lang="en-US" smtClean="0"/>
+              <a:rPr lang="en-US"/>
               <a:t>Fifth level</a:t>
             </a:r>
-            <a:endParaRPr lang="en-US"/>
           </a:p>
         </p:txBody>
       </p:sp>
@@ -473,7 +484,7 @@
           <a:p>
             <a:fld id="{5BCAD085-E8A6-8845-BD4E-CB4CCA059FC4}" type="datetimeFigureOut">
               <a:rPr lang="en-US" smtClean="0"/>
-              <a:t>1/27/13</a:t>
+              <a:t>9/13/26</a:t>
             </a:fld>
             <a:endParaRPr lang="en-US"/>
           </a:p>
@@ -572,10 +583,9 @@
           <a:lstStyle/>
           <a:p>
             <a:r>
-              <a:rPr lang="en-US" smtClean="0"/>
+              <a:rPr lang="en-US"/>
               <a:t>Click to edit Master title style</a:t>
             </a:r>
-            <a:endParaRPr lang="en-US"/>
           </a:p>
         </p:txBody>
       </p:sp>
@@ -601,38 +611,37 @@
           <a:p>
             <a:pPr lvl="0"/>
             <a:r>
-              <a:rPr lang="en-US" smtClean="0"/>
+              <a:rPr lang="en-US"/>
               <a:t>Click to edit Master text styles</a:t>
             </a:r>
           </a:p>
           <a:p>
             <a:pPr lvl="1"/>
             <a:r>
-              <a:rPr lang="en-US" smtClean="0"/>
+              <a:rPr lang="en-US"/>
               <a:t>Second level</a:t>
             </a:r>
           </a:p>
           <a:p>
             <a:pPr lvl="2"/>
             <a:r>
-              <a:rPr lang="en-US" smtClean="0"/>
+              <a:rPr lang="en-US"/>
               <a:t>Third level</a:t>
             </a:r>
           </a:p>
           <a:p>
             <a:pPr lvl="3"/>
             <a:r>
-              <a:rPr lang="en-US" smtClean="0"/>
+              <a:rPr lang="en-US"/>
               <a:t>Fourth level</a:t>
             </a:r>
           </a:p>
           <a:p>
             <a:pPr lvl="4"/>
             <a:r>
-              <a:rPr lang="en-US" smtClean="0"/>
+              <a:rPr lang="en-US"/>
               <a:t>Fifth level</a:t>
             </a:r>
-            <a:endParaRPr lang="en-US"/>
           </a:p>
         </p:txBody>
       </p:sp>
@@ -653,7 +662,7 @@
           <a:p>
             <a:fld id="{5BCAD085-E8A6-8845-BD4E-CB4CCA059FC4}" type="datetimeFigureOut">
               <a:rPr lang="en-US" smtClean="0"/>
-              <a:t>1/27/13</a:t>
+              <a:t>9/13/26</a:t>
             </a:fld>
             <a:endParaRPr lang="en-US"/>
           </a:p>
@@ -747,10 +756,9 @@
           <a:lstStyle/>
           <a:p>
             <a:r>
-              <a:rPr lang="en-US" smtClean="0"/>
+              <a:rPr lang="en-US"/>
               <a:t>Click to edit Master title style</a:t>
             </a:r>
-            <a:endParaRPr lang="en-US"/>
           </a:p>
         </p:txBody>
       </p:sp>
@@ -771,38 +779,37 @@
           <a:p>
             <a:pPr lvl="0"/>
             <a:r>
-              <a:rPr lang="en-US" smtClean="0"/>
+              <a:rPr lang="en-US"/>
               <a:t>Click to edit Master text styles</a:t>
             </a:r>
           </a:p>
           <a:p>
             <a:pPr lvl="1"/>
             <a:r>
-              <a:rPr lang="en-US" smtClean="0"/>
+              <a:rPr lang="en-US"/>
               <a:t>Second level</a:t>
             </a:r>
           </a:p>
           <a:p>
             <a:pPr lvl="2"/>
             <a:r>
-              <a:rPr lang="en-US" smtClean="0"/>
+              <a:rPr lang="en-US"/>
               <a:t>Third level</a:t>
             </a:r>
           </a:p>
           <a:p>
             <a:pPr lvl="3"/>
             <a:r>
-              <a:rPr lang="en-US" smtClean="0"/>
+              <a:rPr lang="en-US"/>
               <a:t>Fourth level</a:t>
             </a:r>
           </a:p>
           <a:p>
             <a:pPr lvl="4"/>
             <a:r>
-              <a:rPr lang="en-US" smtClean="0"/>
+              <a:rPr lang="en-US"/>
               <a:t>Fifth level</a:t>
             </a:r>
-            <a:endParaRPr lang="en-US"/>
           </a:p>
         </p:txBody>
       </p:sp>
@@ -823,7 +830,7 @@
           <a:p>
             <a:fld id="{5BCAD085-E8A6-8845-BD4E-CB4CCA059FC4}" type="datetimeFigureOut">
               <a:rPr lang="en-US" smtClean="0"/>
-              <a:t>1/27/13</a:t>
+              <a:t>9/13/26</a:t>
             </a:fld>
             <a:endParaRPr lang="en-US"/>
           </a:p>
@@ -926,10 +933,9 @@
           </a:lstStyle>
           <a:p>
             <a:r>
-              <a:rPr lang="en-US" smtClean="0"/>
+              <a:rPr lang="en-US"/>
               <a:t>Click to edit Master title style</a:t>
             </a:r>
-            <a:endParaRPr lang="en-US"/>
           </a:p>
         </p:txBody>
       </p:sp>
@@ -1046,7 +1052,7 @@
           <a:p>
             <a:pPr lvl="0"/>
             <a:r>
-              <a:rPr lang="en-US" smtClean="0"/>
+              <a:rPr lang="en-US"/>
               <a:t>Click to edit Master text styles</a:t>
             </a:r>
           </a:p>
@@ -1069,7 +1075,7 @@
           <a:p>
             <a:fld id="{5BCAD085-E8A6-8845-BD4E-CB4CCA059FC4}" type="datetimeFigureOut">
               <a:rPr lang="en-US" smtClean="0"/>
-              <a:t>1/27/13</a:t>
+              <a:t>9/13/26</a:t>
             </a:fld>
             <a:endParaRPr lang="en-US"/>
           </a:p>
@@ -1163,10 +1169,9 @@
           <a:lstStyle/>
           <a:p>
             <a:r>
-              <a:rPr lang="en-US" smtClean="0"/>
+              <a:rPr lang="en-US"/>
               <a:t>Click to edit Master title style</a:t>
             </a:r>
-            <a:endParaRPr lang="en-US"/>
           </a:p>
         </p:txBody>
       </p:sp>
@@ -1220,38 +1225,37 @@
           <a:p>
             <a:pPr lvl="0"/>
             <a:r>
-              <a:rPr lang="en-US" smtClean="0"/>
+              <a:rPr lang="en-US"/>
               <a:t>Click to edit Master text styles</a:t>
             </a:r>
           </a:p>
           <a:p>
             <a:pPr lvl="1"/>
             <a:r>
-              <a:rPr lang="en-US" smtClean="0"/>
+              <a:rPr lang="en-US"/>
               <a:t>Second level</a:t>
             </a:r>
           </a:p>
           <a:p>
             <a:pPr lvl="2"/>
             <a:r>
-              <a:rPr lang="en-US" smtClean="0"/>
+              <a:rPr lang="en-US"/>
               <a:t>Third level</a:t>
             </a:r>
           </a:p>
           <a:p>
             <a:pPr lvl="3"/>
             <a:r>
-              <a:rPr lang="en-US" smtClean="0"/>
+              <a:rPr lang="en-US"/>
               <a:t>Fourth level</a:t>
             </a:r>
           </a:p>
           <a:p>
             <a:pPr lvl="4"/>
             <a:r>
-              <a:rPr lang="en-US" smtClean="0"/>
+              <a:rPr lang="en-US"/>
               <a:t>Fifth level</a:t>
             </a:r>
-            <a:endParaRPr lang="en-US"/>
           </a:p>
         </p:txBody>
       </p:sp>
@@ -1305,38 +1309,37 @@
           <a:p>
             <a:pPr lvl="0"/>
             <a:r>
-              <a:rPr lang="en-US" smtClean="0"/>
+              <a:rPr lang="en-US"/>
               <a:t>Click to edit Master text styles</a:t>
             </a:r>
           </a:p>
           <a:p>
             <a:pPr lvl="1"/>
             <a:r>
-              <a:rPr lang="en-US" smtClean="0"/>
+              <a:rPr lang="en-US"/>
               <a:t>Second level</a:t>
             </a:r>
           </a:p>
           <a:p>
             <a:pPr lvl="2"/>
             <a:r>
-              <a:rPr lang="en-US" smtClean="0"/>
+              <a:rPr lang="en-US"/>
               <a:t>Third level</a:t>
             </a:r>
           </a:p>
           <a:p>
             <a:pPr lvl="3"/>
             <a:r>
-              <a:rPr lang="en-US" smtClean="0"/>
+              <a:rPr lang="en-US"/>
               <a:t>Fourth level</a:t>
             </a:r>
           </a:p>
           <a:p>
             <a:pPr lvl="4"/>
             <a:r>
-              <a:rPr lang="en-US" smtClean="0"/>
+              <a:rPr lang="en-US"/>
               <a:t>Fifth level</a:t>
             </a:r>
-            <a:endParaRPr lang="en-US"/>
           </a:p>
         </p:txBody>
       </p:sp>
@@ -1357,7 +1360,7 @@
           <a:p>
             <a:fld id="{5BCAD085-E8A6-8845-BD4E-CB4CCA059FC4}" type="datetimeFigureOut">
               <a:rPr lang="en-US" smtClean="0"/>
-              <a:t>1/27/13</a:t>
+              <a:t>9/13/26</a:t>
             </a:fld>
             <a:endParaRPr lang="en-US"/>
           </a:p>
@@ -1455,10 +1458,9 @@
           </a:lstStyle>
           <a:p>
             <a:r>
-              <a:rPr lang="en-US" smtClean="0"/>
+              <a:rPr lang="en-US"/>
               <a:t>Click to edit Master title style</a:t>
             </a:r>
-            <a:endParaRPr lang="en-US"/>
           </a:p>
         </p:txBody>
       </p:sp>
@@ -1521,7 +1523,7 @@
           <a:p>
             <a:pPr lvl="0"/>
             <a:r>
-              <a:rPr lang="en-US" smtClean="0"/>
+              <a:rPr lang="en-US"/>
               <a:t>Click to edit Master text styles</a:t>
             </a:r>
           </a:p>
@@ -1577,38 +1579,37 @@
           <a:p>
             <a:pPr lvl="0"/>
             <a:r>
-              <a:rPr lang="en-US" smtClean="0"/>
+              <a:rPr lang="en-US"/>
               <a:t>Click to edit Master text styles</a:t>
             </a:r>
           </a:p>
           <a:p>
             <a:pPr lvl="1"/>
             <a:r>
-              <a:rPr lang="en-US" smtClean="0"/>
+              <a:rPr lang="en-US"/>
               <a:t>Second level</a:t>
             </a:r>
           </a:p>
           <a:p>
             <a:pPr lvl="2"/>
             <a:r>
-              <a:rPr lang="en-US" smtClean="0"/>
+              <a:rPr lang="en-US"/>
               <a:t>Third level</a:t>
             </a:r>
           </a:p>
           <a:p>
             <a:pPr lvl="3"/>
             <a:r>
-              <a:rPr lang="en-US" smtClean="0"/>
+              <a:rPr lang="en-US"/>
               <a:t>Fourth level</a:t>
             </a:r>
           </a:p>
           <a:p>
             <a:pPr lvl="4"/>
             <a:r>
-              <a:rPr lang="en-US" smtClean="0"/>
+              <a:rPr lang="en-US"/>
               <a:t>Fifth level</a:t>
             </a:r>
-            <a:endParaRPr lang="en-US"/>
           </a:p>
         </p:txBody>
       </p:sp>
@@ -1671,7 +1672,7 @@
           <a:p>
             <a:pPr lvl="0"/>
             <a:r>
-              <a:rPr lang="en-US" smtClean="0"/>
+              <a:rPr lang="en-US"/>
               <a:t>Click to edit Master text styles</a:t>
             </a:r>
           </a:p>
@@ -1727,38 +1728,37 @@
           <a:p>
             <a:pPr lvl="0"/>
             <a:r>
-              <a:rPr lang="en-US" smtClean="0"/>
+              <a:rPr lang="en-US"/>
               <a:t>Click to edit Master text styles</a:t>
             </a:r>
           </a:p>
           <a:p>
             <a:pPr lvl="1"/>
             <a:r>
-              <a:rPr lang="en-US" smtClean="0"/>
+              <a:rPr lang="en-US"/>
               <a:t>Second level</a:t>
             </a:r>
           </a:p>
           <a:p>
             <a:pPr lvl="2"/>
             <a:r>
-              <a:rPr lang="en-US" smtClean="0"/>
+              <a:rPr lang="en-US"/>
               <a:t>Third level</a:t>
             </a:r>
           </a:p>
           <a:p>
             <a:pPr lvl="3"/>
             <a:r>
-              <a:rPr lang="en-US" smtClean="0"/>
+              <a:rPr lang="en-US"/>
               <a:t>Fourth level</a:t>
             </a:r>
           </a:p>
           <a:p>
             <a:pPr lvl="4"/>
             <a:r>
-              <a:rPr lang="en-US" smtClean="0"/>
+              <a:rPr lang="en-US"/>
               <a:t>Fifth level</a:t>
             </a:r>
-            <a:endParaRPr lang="en-US"/>
           </a:p>
         </p:txBody>
       </p:sp>
@@ -1779,7 +1779,7 @@
           <a:p>
             <a:fld id="{5BCAD085-E8A6-8845-BD4E-CB4CCA059FC4}" type="datetimeFigureOut">
               <a:rPr lang="en-US" smtClean="0"/>
-              <a:t>1/27/13</a:t>
+              <a:t>9/13/26</a:t>
             </a:fld>
             <a:endParaRPr lang="en-US"/>
           </a:p>
@@ -1873,10 +1873,9 @@
           <a:lstStyle/>
           <a:p>
             <a:r>
-              <a:rPr lang="en-US" smtClean="0"/>
+              <a:rPr lang="en-US"/>
               <a:t>Click to edit Master title style</a:t>
             </a:r>
-            <a:endParaRPr lang="en-US"/>
           </a:p>
         </p:txBody>
       </p:sp>
@@ -1897,7 +1896,7 @@
           <a:p>
             <a:fld id="{5BCAD085-E8A6-8845-BD4E-CB4CCA059FC4}" type="datetimeFigureOut">
               <a:rPr lang="en-US" smtClean="0"/>
-              <a:t>1/27/13</a:t>
+              <a:t>9/13/26</a:t>
             </a:fld>
             <a:endParaRPr lang="en-US"/>
           </a:p>
@@ -1992,7 +1991,7 @@
           <a:p>
             <a:fld id="{5BCAD085-E8A6-8845-BD4E-CB4CCA059FC4}" type="datetimeFigureOut">
               <a:rPr lang="en-US" smtClean="0"/>
-              <a:t>1/27/13</a:t>
+              <a:t>9/13/26</a:t>
             </a:fld>
             <a:endParaRPr lang="en-US"/>
           </a:p>
@@ -2095,10 +2094,9 @@
           </a:lstStyle>
           <a:p>
             <a:r>
-              <a:rPr lang="en-US" smtClean="0"/>
+              <a:rPr lang="en-US"/>
               <a:t>Click to edit Master title style</a:t>
             </a:r>
-            <a:endParaRPr lang="en-US"/>
           </a:p>
         </p:txBody>
       </p:sp>
@@ -2152,38 +2150,37 @@
           <a:p>
             <a:pPr lvl="0"/>
             <a:r>
-              <a:rPr lang="en-US" smtClean="0"/>
+              <a:rPr lang="en-US"/>
               <a:t>Click to edit Master text styles</a:t>
             </a:r>
           </a:p>
           <a:p>
             <a:pPr lvl="1"/>
             <a:r>
-              <a:rPr lang="en-US" smtClean="0"/>
+              <a:rPr lang="en-US"/>
               <a:t>Second level</a:t>
             </a:r>
           </a:p>
           <a:p>
             <a:pPr lvl="2"/>
             <a:r>
-              <a:rPr lang="en-US" smtClean="0"/>
+              <a:rPr lang="en-US"/>
               <a:t>Third level</a:t>
             </a:r>
           </a:p>
           <a:p>
             <a:pPr lvl="3"/>
             <a:r>
-              <a:rPr lang="en-US" smtClean="0"/>
+              <a:rPr lang="en-US"/>
               <a:t>Fourth level</a:t>
             </a:r>
           </a:p>
           <a:p>
             <a:pPr lvl="4"/>
             <a:r>
-              <a:rPr lang="en-US" smtClean="0"/>
+              <a:rPr lang="en-US"/>
               <a:t>Fifth level</a:t>
             </a:r>
-            <a:endParaRPr lang="en-US"/>
           </a:p>
         </p:txBody>
       </p:sp>
@@ -2246,7 +2243,7 @@
           <a:p>
             <a:pPr lvl="0"/>
             <a:r>
-              <a:rPr lang="en-US" smtClean="0"/>
+              <a:rPr lang="en-US"/>
               <a:t>Click to edit Master text styles</a:t>
             </a:r>
           </a:p>
@@ -2269,7 +2266,7 @@
           <a:p>
             <a:fld id="{5BCAD085-E8A6-8845-BD4E-CB4CCA059FC4}" type="datetimeFigureOut">
               <a:rPr lang="en-US" smtClean="0"/>
-              <a:t>1/27/13</a:t>
+              <a:t>9/13/26</a:t>
             </a:fld>
             <a:endParaRPr lang="en-US"/>
           </a:p>
@@ -2372,10 +2369,9 @@
           </a:lstStyle>
           <a:p>
             <a:r>
-              <a:rPr lang="en-US" smtClean="0"/>
+              <a:rPr lang="en-US"/>
               <a:t>Click to edit Master title style</a:t>
             </a:r>
-            <a:endParaRPr lang="en-US"/>
           </a:p>
         </p:txBody>
       </p:sp>
@@ -2499,7 +2495,7 @@
           <a:p>
             <a:pPr lvl="0"/>
             <a:r>
-              <a:rPr lang="en-US" smtClean="0"/>
+              <a:rPr lang="en-US"/>
               <a:t>Click to edit Master text styles</a:t>
             </a:r>
           </a:p>
@@ -2522,7 +2518,7 @@
           <a:p>
             <a:fld id="{5BCAD085-E8A6-8845-BD4E-CB4CCA059FC4}" type="datetimeFigureOut">
               <a:rPr lang="en-US" smtClean="0"/>
-              <a:t>1/27/13</a:t>
+              <a:t>9/13/26</a:t>
             </a:fld>
             <a:endParaRPr lang="en-US"/>
           </a:p>
@@ -2631,10 +2627,9 @@
           <a:lstStyle/>
           <a:p>
             <a:r>
-              <a:rPr lang="en-US" smtClean="0"/>
+              <a:rPr lang="en-US"/>
               <a:t>Click to edit Master title style</a:t>
             </a:r>
-            <a:endParaRPr lang="en-US"/>
           </a:p>
         </p:txBody>
       </p:sp>
@@ -2665,38 +2660,37 @@
           <a:p>
             <a:pPr lvl="0"/>
             <a:r>
-              <a:rPr lang="en-US" smtClean="0"/>
+              <a:rPr lang="en-US"/>
               <a:t>Click to edit Master text styles</a:t>
             </a:r>
           </a:p>
           <a:p>
             <a:pPr lvl="1"/>
             <a:r>
-              <a:rPr lang="en-US" smtClean="0"/>
+              <a:rPr lang="en-US"/>
               <a:t>Second level</a:t>
             </a:r>
           </a:p>
           <a:p>
             <a:pPr lvl="2"/>
             <a:r>
-              <a:rPr lang="en-US" smtClean="0"/>
+              <a:rPr lang="en-US"/>
               <a:t>Third level</a:t>
             </a:r>
           </a:p>
           <a:p>
             <a:pPr lvl="3"/>
             <a:r>
-              <a:rPr lang="en-US" smtClean="0"/>
+              <a:rPr lang="en-US"/>
               <a:t>Fourth level</a:t>
             </a:r>
           </a:p>
           <a:p>
             <a:pPr lvl="4"/>
             <a:r>
-              <a:rPr lang="en-US" smtClean="0"/>
+              <a:rPr lang="en-US"/>
               <a:t>Fifth level</a:t>
             </a:r>
-            <a:endParaRPr lang="en-US"/>
           </a:p>
         </p:txBody>
       </p:sp>
@@ -2735,7 +2729,7 @@
           <a:p>
             <a:fld id="{5BCAD085-E8A6-8845-BD4E-CB4CCA059FC4}" type="datetimeFigureOut">
               <a:rPr lang="en-US" smtClean="0"/>
-              <a:t>1/27/13</a:t>
+              <a:t>9/13/26</a:t>
             </a:fld>
             <a:endParaRPr lang="en-US"/>
           </a:p>
@@ -3094,7 +3088,7 @@
 </file>
 
 <file path=ppt/slides/slide1.xml><?xml version="1.0" encoding="utf-8"?>
-<p:sld xmlns:a="http://schemas.openxmlformats.org/drawingml/2006/main" xmlns:p="http://schemas.openxmlformats.org/presentationml/2006/main" xmlns:r="http://schemas.openxmlformats.org/officeDocument/2006/relationships">
+<p:sld xmlns:a="http://schemas.openxmlformats.org/drawingml/2006/main" xmlns:r="http://schemas.openxmlformats.org/officeDocument/2006/relationships" xmlns:p="http://schemas.openxmlformats.org/presentationml/2006/main">
   <p:cSld>
     <p:bg>
       <p:bgPr>
@@ -3110,7 +3104,14 @@
         <p:cNvGrpSpPr/>
         <p:nvPr/>
       </p:nvGrpSpPr>
-      <p:grpSpPr/>
+      <p:grpSpPr>
+        <a:xfrm>
+          <a:off x="0" y="0"/>
+          <a:ext cx="0" cy="0"/>
+          <a:chOff x="0" y="0"/>
+          <a:chExt cx="0" cy="0"/>
+        </a:xfrm>
+      </p:grpSpPr>
       <p:sp>
         <p:nvSpPr>
           <p:cNvPr id="2" name="Oval 1"/>
@@ -3152,6 +3153,7 @@
           <a:lstStyle/>
           <a:p>
             <a:pPr algn="ctr"/>
+            <a:endParaRPr/>
           </a:p>
         </p:txBody>
       </p:sp>
@@ -3196,6 +3198,7 @@
           <a:lstStyle/>
           <a:p>
             <a:pPr algn="ctr"/>
+            <a:endParaRPr/>
           </a:p>
         </p:txBody>
       </p:sp>
@@ -3240,6 +3243,7 @@
           <a:lstStyle/>
           <a:p>
             <a:pPr algn="ctr"/>
+            <a:endParaRPr/>
           </a:p>
         </p:txBody>
       </p:sp>
@@ -3284,6 +3288,7 @@
           <a:lstStyle/>
           <a:p>
             <a:pPr algn="ctr"/>
+            <a:endParaRPr/>
           </a:p>
         </p:txBody>
       </p:sp>
@@ -3328,6 +3333,7 @@
           <a:lstStyle/>
           <a:p>
             <a:pPr algn="ctr"/>
+            <a:endParaRPr/>
           </a:p>
         </p:txBody>
       </p:sp>
@@ -3372,6 +3378,7 @@
           <a:lstStyle/>
           <a:p>
             <a:pPr algn="ctr"/>
+            <a:endParaRPr/>
           </a:p>
         </p:txBody>
       </p:sp>
@@ -3416,6 +3423,7 @@
           <a:lstStyle/>
           <a:p>
             <a:pPr algn="ctr"/>
+            <a:endParaRPr/>
           </a:p>
         </p:txBody>
       </p:sp>
@@ -3460,6 +3468,7 @@
           <a:lstStyle/>
           <a:p>
             <a:pPr algn="ctr"/>
+            <a:endParaRPr/>
           </a:p>
         </p:txBody>
       </p:sp>
@@ -3504,6 +3513,7 @@
           <a:lstStyle/>
           <a:p>
             <a:pPr algn="ctr"/>
+            <a:endParaRPr/>
           </a:p>
         </p:txBody>
       </p:sp>
@@ -3548,6 +3558,7 @@
           <a:lstStyle/>
           <a:p>
             <a:pPr algn="ctr"/>
+            <a:endParaRPr/>
           </a:p>
         </p:txBody>
       </p:sp>
@@ -3592,6 +3603,7 @@
           <a:lstStyle/>
           <a:p>
             <a:pPr algn="ctr"/>
+            <a:endParaRPr/>
           </a:p>
         </p:txBody>
       </p:sp>
@@ -3636,6 +3648,7 @@
           <a:lstStyle/>
           <a:p>
             <a:pPr algn="ctr"/>
+            <a:endParaRPr/>
           </a:p>
         </p:txBody>
       </p:sp>
@@ -3680,6 +3693,7 @@
           <a:lstStyle/>
           <a:p>
             <a:pPr algn="ctr"/>
+            <a:endParaRPr/>
           </a:p>
         </p:txBody>
       </p:sp>
@@ -3724,6 +3738,7 @@
           <a:lstStyle/>
           <a:p>
             <a:pPr algn="ctr"/>
+            <a:endParaRPr/>
           </a:p>
         </p:txBody>
       </p:sp>
@@ -3768,6 +3783,7 @@
           <a:lstStyle/>
           <a:p>
             <a:pPr algn="ctr"/>
+            <a:endParaRPr/>
           </a:p>
         </p:txBody>
       </p:sp>
@@ -3812,6 +3828,7 @@
           <a:lstStyle/>
           <a:p>
             <a:pPr algn="ctr"/>
+            <a:endParaRPr/>
           </a:p>
         </p:txBody>
       </p:sp>
@@ -3856,6 +3873,7 @@
           <a:lstStyle/>
           <a:p>
             <a:pPr algn="ctr"/>
+            <a:endParaRPr/>
           </a:p>
         </p:txBody>
       </p:sp>
@@ -3900,6 +3918,7 @@
           <a:lstStyle/>
           <a:p>
             <a:pPr algn="ctr"/>
+            <a:endParaRPr/>
           </a:p>
         </p:txBody>
       </p:sp>
@@ -3944,6 +3963,7 @@
           <a:lstStyle/>
           <a:p>
             <a:pPr algn="ctr"/>
+            <a:endParaRPr/>
           </a:p>
         </p:txBody>
       </p:sp>
@@ -3988,6 +4008,7 @@
           <a:lstStyle/>
           <a:p>
             <a:pPr algn="ctr"/>
+            <a:endParaRPr/>
           </a:p>
         </p:txBody>
       </p:sp>
@@ -4032,6 +4053,7 @@
           <a:lstStyle/>
           <a:p>
             <a:pPr algn="ctr"/>
+            <a:endParaRPr/>
           </a:p>
         </p:txBody>
       </p:sp>
@@ -4076,6 +4098,7 @@
           <a:lstStyle/>
           <a:p>
             <a:pPr algn="ctr"/>
+            <a:endParaRPr/>
           </a:p>
         </p:txBody>
       </p:sp>
@@ -4120,6 +4143,7 @@
           <a:lstStyle/>
           <a:p>
             <a:pPr algn="ctr"/>
+            <a:endParaRPr/>
           </a:p>
         </p:txBody>
       </p:sp>
@@ -4164,6 +4188,7 @@
           <a:lstStyle/>
           <a:p>
             <a:pPr algn="ctr"/>
+            <a:endParaRPr/>
           </a:p>
         </p:txBody>
       </p:sp>
@@ -4208,6 +4233,7 @@
           <a:lstStyle/>
           <a:p>
             <a:pPr algn="ctr"/>
+            <a:endParaRPr/>
           </a:p>
         </p:txBody>
       </p:sp>
@@ -4252,6 +4278,7 @@
           <a:lstStyle/>
           <a:p>
             <a:pPr algn="ctr"/>
+            <a:endParaRPr/>
           </a:p>
         </p:txBody>
       </p:sp>
@@ -4296,6 +4323,7 @@
           <a:lstStyle/>
           <a:p>
             <a:pPr algn="ctr"/>
+            <a:endParaRPr/>
           </a:p>
         </p:txBody>
       </p:sp>
@@ -4338,7 +4366,7 @@
           </a:fontRef>
         </p:style>
         <p:txBody>
-          <a:bodyPr rtlCol="0" anchor="ctr" wrap="square"/>
+          <a:bodyPr wrap="square" rtlCol="0" anchor="ctr"/>
           <a:lstStyle/>
           <a:p>
             <a:pPr algn="ctr"/>
@@ -4558,7 +4586,7 @@
 </file>
 
 <file path=ppt/slides/slide10.xml><?xml version="1.0" encoding="utf-8"?>
-<p:sld xmlns:a="http://schemas.openxmlformats.org/drawingml/2006/main" xmlns:p="http://schemas.openxmlformats.org/presentationml/2006/main" xmlns:r="http://schemas.openxmlformats.org/officeDocument/2006/relationships">
+<p:sld xmlns:a="http://schemas.openxmlformats.org/drawingml/2006/main" xmlns:r="http://schemas.openxmlformats.org/officeDocument/2006/relationships" xmlns:p="http://schemas.openxmlformats.org/presentationml/2006/main">
   <p:cSld>
     <p:bg>
       <p:bgPr>
@@ -4574,7 +4602,14 @@
         <p:cNvGrpSpPr/>
         <p:nvPr/>
       </p:nvGrpSpPr>
-      <p:grpSpPr/>
+      <p:grpSpPr>
+        <a:xfrm>
+          <a:off x="0" y="0"/>
+          <a:ext cx="0" cy="0"/>
+          <a:chOff x="0" y="0"/>
+          <a:chExt cx="0" cy="0"/>
+        </a:xfrm>
+      </p:grpSpPr>
       <p:sp>
         <p:nvSpPr>
           <p:cNvPr id="2" name="TextBox 1"/>
@@ -4694,7 +4729,9 @@
         <p:txBody>
           <a:bodyPr rtlCol="0" anchor="ctr"/>
           <a:lstStyle/>
-          <a:p/>
+          <a:p>
+            <a:endParaRPr/>
+          </a:p>
         </p:txBody>
       </p:sp>
       <p:sp>
@@ -4827,15 +4864,12 @@
                 <a:spcPts val="200"/>
               </a:spcAft>
             </a:pPr>
-            <a:r>
-              <a:rPr sz="1300" b="0">
-                <a:solidFill>
-                  <a:srgbClr val="44506B"/>
-                </a:solidFill>
-                <a:latin typeface="Consolas"/>
-              </a:rPr>
-              <a:t/>
-            </a:r>
+            <a:endParaRPr sz="1300" b="0">
+              <a:solidFill>
+                <a:srgbClr val="44506B"/>
+              </a:solidFill>
+              <a:latin typeface="Consolas"/>
+            </a:endParaRPr>
           </a:p>
           <a:p>
             <a:pPr algn="l">
@@ -5061,7 +5095,7 @@
 </file>
 
 <file path=ppt/slides/slide11.xml><?xml version="1.0" encoding="utf-8"?>
-<p:sld xmlns:a="http://schemas.openxmlformats.org/drawingml/2006/main" xmlns:p="http://schemas.openxmlformats.org/presentationml/2006/main" xmlns:r="http://schemas.openxmlformats.org/officeDocument/2006/relationships">
+<p:sld xmlns:a="http://schemas.openxmlformats.org/drawingml/2006/main" xmlns:r="http://schemas.openxmlformats.org/officeDocument/2006/relationships" xmlns:p="http://schemas.openxmlformats.org/presentationml/2006/main">
   <p:cSld>
     <p:bg>
       <p:bgPr>
@@ -5077,7 +5111,14 @@
         <p:cNvGrpSpPr/>
         <p:nvPr/>
       </p:nvGrpSpPr>
-      <p:grpSpPr/>
+      <p:grpSpPr>
+        <a:xfrm>
+          <a:off x="0" y="0"/>
+          <a:ext cx="0" cy="0"/>
+          <a:chOff x="0" y="0"/>
+          <a:chExt cx="0" cy="0"/>
+        </a:xfrm>
+      </p:grpSpPr>
       <p:sp>
         <p:nvSpPr>
           <p:cNvPr id="2" name="TextBox 1"/>
@@ -5215,15 +5256,12 @@
                 <a:spcPts val="200"/>
               </a:spcAft>
             </a:pPr>
-            <a:r>
-              <a:rPr sz="1500" b="0">
-                <a:solidFill>
-                  <a:srgbClr val="44506B"/>
-                </a:solidFill>
-                <a:latin typeface="Calibri"/>
-              </a:rPr>
-              <a:t/>
-            </a:r>
+            <a:endParaRPr sz="1500" b="0">
+              <a:solidFill>
+                <a:srgbClr val="44506B"/>
+              </a:solidFill>
+              <a:latin typeface="Calibri"/>
+            </a:endParaRPr>
           </a:p>
           <a:p>
             <a:pPr algn="l">
@@ -5263,15 +5301,12 @@
                 <a:spcPts val="200"/>
               </a:spcAft>
             </a:pPr>
-            <a:r>
-              <a:rPr sz="1500" b="0">
-                <a:solidFill>
-                  <a:srgbClr val="44506B"/>
-                </a:solidFill>
-                <a:latin typeface="Calibri"/>
-              </a:rPr>
-              <a:t/>
-            </a:r>
+            <a:endParaRPr sz="1500" b="0">
+              <a:solidFill>
+                <a:srgbClr val="44506B"/>
+              </a:solidFill>
+              <a:latin typeface="Calibri"/>
+            </a:endParaRPr>
           </a:p>
           <a:p>
             <a:pPr algn="l">
@@ -5311,15 +5346,12 @@
                 <a:spcPts val="200"/>
               </a:spcAft>
             </a:pPr>
-            <a:r>
-              <a:rPr sz="1500" b="0">
-                <a:solidFill>
-                  <a:srgbClr val="44506B"/>
-                </a:solidFill>
-                <a:latin typeface="Calibri"/>
-              </a:rPr>
-              <a:t/>
-            </a:r>
+            <a:endParaRPr sz="1500" b="0">
+              <a:solidFill>
+                <a:srgbClr val="44506B"/>
+              </a:solidFill>
+              <a:latin typeface="Calibri"/>
+            </a:endParaRPr>
           </a:p>
         </p:txBody>
       </p:sp>
@@ -5449,7 +5481,7 @@
 </file>
 
 <file path=ppt/slides/slide12.xml><?xml version="1.0" encoding="utf-8"?>
-<p:sld xmlns:a="http://schemas.openxmlformats.org/drawingml/2006/main" xmlns:p="http://schemas.openxmlformats.org/presentationml/2006/main" xmlns:r="http://schemas.openxmlformats.org/officeDocument/2006/relationships">
+<p:sld xmlns:a="http://schemas.openxmlformats.org/drawingml/2006/main" xmlns:r="http://schemas.openxmlformats.org/officeDocument/2006/relationships" xmlns:p="http://schemas.openxmlformats.org/presentationml/2006/main">
   <p:cSld>
     <p:bg>
       <p:bgPr>
@@ -5465,7 +5497,14 @@
         <p:cNvGrpSpPr/>
         <p:nvPr/>
       </p:nvGrpSpPr>
-      <p:grpSpPr/>
+      <p:grpSpPr>
+        <a:xfrm>
+          <a:off x="0" y="0"/>
+          <a:ext cx="0" cy="0"/>
+          <a:chOff x="0" y="0"/>
+          <a:chExt cx="0" cy="0"/>
+        </a:xfrm>
+      </p:grpSpPr>
       <p:sp>
         <p:nvSpPr>
           <p:cNvPr id="2" name="Oval 1"/>
@@ -5507,6 +5546,7 @@
           <a:lstStyle/>
           <a:p>
             <a:pPr algn="ctr"/>
+            <a:endParaRPr/>
           </a:p>
         </p:txBody>
       </p:sp>
@@ -5551,6 +5591,7 @@
           <a:lstStyle/>
           <a:p>
             <a:pPr algn="ctr"/>
+            <a:endParaRPr/>
           </a:p>
         </p:txBody>
       </p:sp>
@@ -5595,6 +5636,7 @@
           <a:lstStyle/>
           <a:p>
             <a:pPr algn="ctr"/>
+            <a:endParaRPr/>
           </a:p>
         </p:txBody>
       </p:sp>
@@ -5639,6 +5681,7 @@
           <a:lstStyle/>
           <a:p>
             <a:pPr algn="ctr"/>
+            <a:endParaRPr/>
           </a:p>
         </p:txBody>
       </p:sp>
@@ -5683,6 +5726,7 @@
           <a:lstStyle/>
           <a:p>
             <a:pPr algn="ctr"/>
+            <a:endParaRPr/>
           </a:p>
         </p:txBody>
       </p:sp>
@@ -5727,6 +5771,7 @@
           <a:lstStyle/>
           <a:p>
             <a:pPr algn="ctr"/>
+            <a:endParaRPr/>
           </a:p>
         </p:txBody>
       </p:sp>
@@ -5771,6 +5816,7 @@
           <a:lstStyle/>
           <a:p>
             <a:pPr algn="ctr"/>
+            <a:endParaRPr/>
           </a:p>
         </p:txBody>
       </p:sp>
@@ -5815,6 +5861,7 @@
           <a:lstStyle/>
           <a:p>
             <a:pPr algn="ctr"/>
+            <a:endParaRPr/>
           </a:p>
         </p:txBody>
       </p:sp>
@@ -5859,6 +5906,7 @@
           <a:lstStyle/>
           <a:p>
             <a:pPr algn="ctr"/>
+            <a:endParaRPr/>
           </a:p>
         </p:txBody>
       </p:sp>
@@ -5903,6 +5951,7 @@
           <a:lstStyle/>
           <a:p>
             <a:pPr algn="ctr"/>
+            <a:endParaRPr/>
           </a:p>
         </p:txBody>
       </p:sp>
@@ -5947,6 +5996,7 @@
           <a:lstStyle/>
           <a:p>
             <a:pPr algn="ctr"/>
+            <a:endParaRPr/>
           </a:p>
         </p:txBody>
       </p:sp>
@@ -5991,6 +6041,7 @@
           <a:lstStyle/>
           <a:p>
             <a:pPr algn="ctr"/>
+            <a:endParaRPr/>
           </a:p>
         </p:txBody>
       </p:sp>
@@ -6035,6 +6086,7 @@
           <a:lstStyle/>
           <a:p>
             <a:pPr algn="ctr"/>
+            <a:endParaRPr/>
           </a:p>
         </p:txBody>
       </p:sp>
@@ -6079,6 +6131,7 @@
           <a:lstStyle/>
           <a:p>
             <a:pPr algn="ctr"/>
+            <a:endParaRPr/>
           </a:p>
         </p:txBody>
       </p:sp>
@@ -6123,6 +6176,7 @@
           <a:lstStyle/>
           <a:p>
             <a:pPr algn="ctr"/>
+            <a:endParaRPr/>
           </a:p>
         </p:txBody>
       </p:sp>
@@ -6167,6 +6221,7 @@
           <a:lstStyle/>
           <a:p>
             <a:pPr algn="ctr"/>
+            <a:endParaRPr/>
           </a:p>
         </p:txBody>
       </p:sp>
@@ -6211,6 +6266,7 @@
           <a:lstStyle/>
           <a:p>
             <a:pPr algn="ctr"/>
+            <a:endParaRPr/>
           </a:p>
         </p:txBody>
       </p:sp>
@@ -6255,6 +6311,7 @@
           <a:lstStyle/>
           <a:p>
             <a:pPr algn="ctr"/>
+            <a:endParaRPr/>
           </a:p>
         </p:txBody>
       </p:sp>
@@ -6299,6 +6356,7 @@
           <a:lstStyle/>
           <a:p>
             <a:pPr algn="ctr"/>
+            <a:endParaRPr/>
           </a:p>
         </p:txBody>
       </p:sp>
@@ -6343,6 +6401,7 @@
           <a:lstStyle/>
           <a:p>
             <a:pPr algn="ctr"/>
+            <a:endParaRPr/>
           </a:p>
         </p:txBody>
       </p:sp>
@@ -6387,6 +6446,7 @@
           <a:lstStyle/>
           <a:p>
             <a:pPr algn="ctr"/>
+            <a:endParaRPr/>
           </a:p>
         </p:txBody>
       </p:sp>
@@ -6431,6 +6491,7 @@
           <a:lstStyle/>
           <a:p>
             <a:pPr algn="ctr"/>
+            <a:endParaRPr/>
           </a:p>
         </p:txBody>
       </p:sp>
@@ -6475,6 +6536,7 @@
           <a:lstStyle/>
           <a:p>
             <a:pPr algn="ctr"/>
+            <a:endParaRPr/>
           </a:p>
         </p:txBody>
       </p:sp>
@@ -6519,6 +6581,7 @@
           <a:lstStyle/>
           <a:p>
             <a:pPr algn="ctr"/>
+            <a:endParaRPr/>
           </a:p>
         </p:txBody>
       </p:sp>
@@ -6563,6 +6626,7 @@
           <a:lstStyle/>
           <a:p>
             <a:pPr algn="ctr"/>
+            <a:endParaRPr/>
           </a:p>
         </p:txBody>
       </p:sp>
@@ -6607,6 +6671,7 @@
           <a:lstStyle/>
           <a:p>
             <a:pPr algn="ctr"/>
+            <a:endParaRPr/>
           </a:p>
         </p:txBody>
       </p:sp>
@@ -6651,6 +6716,7 @@
           <a:lstStyle/>
           <a:p>
             <a:pPr algn="ctr"/>
+            <a:endParaRPr/>
           </a:p>
         </p:txBody>
       </p:sp>
@@ -6819,7 +6885,7 @@
 </file>
 
 <file path=ppt/slides/slide13.xml><?xml version="1.0" encoding="utf-8"?>
-<p:sld xmlns:a="http://schemas.openxmlformats.org/drawingml/2006/main" xmlns:p="http://schemas.openxmlformats.org/presentationml/2006/main" xmlns:r="http://schemas.openxmlformats.org/officeDocument/2006/relationships">
+<p:sld xmlns:a="http://schemas.openxmlformats.org/drawingml/2006/main" xmlns:r="http://schemas.openxmlformats.org/officeDocument/2006/relationships" xmlns:p="http://schemas.openxmlformats.org/presentationml/2006/main">
   <p:cSld>
     <p:bg>
       <p:bgPr>
@@ -6835,7 +6901,14 @@
         <p:cNvGrpSpPr/>
         <p:nvPr/>
       </p:nvGrpSpPr>
-      <p:grpSpPr/>
+      <p:grpSpPr>
+        <a:xfrm>
+          <a:off x="0" y="0"/>
+          <a:ext cx="0" cy="0"/>
+          <a:chOff x="0" y="0"/>
+          <a:chExt cx="0" cy="0"/>
+        </a:xfrm>
+      </p:grpSpPr>
       <p:sp>
         <p:nvSpPr>
           <p:cNvPr id="2" name="TextBox 1"/>
@@ -7469,7 +7542,7 @@
 </file>
 
 <file path=ppt/slides/slide14.xml><?xml version="1.0" encoding="utf-8"?>
-<p:sld xmlns:a="http://schemas.openxmlformats.org/drawingml/2006/main" xmlns:p="http://schemas.openxmlformats.org/presentationml/2006/main" xmlns:r="http://schemas.openxmlformats.org/officeDocument/2006/relationships">
+<p:sld xmlns:a="http://schemas.openxmlformats.org/drawingml/2006/main" xmlns:r="http://schemas.openxmlformats.org/officeDocument/2006/relationships" xmlns:p="http://schemas.openxmlformats.org/presentationml/2006/main">
   <p:cSld>
     <p:bg>
       <p:bgPr>
@@ -7485,7 +7558,14 @@
         <p:cNvGrpSpPr/>
         <p:nvPr/>
       </p:nvGrpSpPr>
-      <p:grpSpPr/>
+      <p:grpSpPr>
+        <a:xfrm>
+          <a:off x="0" y="0"/>
+          <a:ext cx="0" cy="0"/>
+          <a:chOff x="0" y="0"/>
+          <a:chExt cx="0" cy="0"/>
+        </a:xfrm>
+      </p:grpSpPr>
       <p:sp>
         <p:nvSpPr>
           <p:cNvPr id="2" name="TextBox 1"/>
@@ -7623,15 +7703,12 @@
                 <a:spcPts val="200"/>
               </a:spcAft>
             </a:pPr>
-            <a:r>
-              <a:rPr sz="1500" b="0">
-                <a:solidFill>
-                  <a:srgbClr val="44506B"/>
-                </a:solidFill>
-                <a:latin typeface="Calibri"/>
-              </a:rPr>
-              <a:t/>
-            </a:r>
+            <a:endParaRPr sz="1500" b="0">
+              <a:solidFill>
+                <a:srgbClr val="44506B"/>
+              </a:solidFill>
+              <a:latin typeface="Calibri"/>
+            </a:endParaRPr>
           </a:p>
           <a:p>
             <a:pPr algn="l">
@@ -7671,15 +7748,12 @@
                 <a:spcPts val="200"/>
               </a:spcAft>
             </a:pPr>
-            <a:r>
-              <a:rPr sz="1500" b="0">
-                <a:solidFill>
-                  <a:srgbClr val="44506B"/>
-                </a:solidFill>
-                <a:latin typeface="Calibri"/>
-              </a:rPr>
-              <a:t/>
-            </a:r>
+            <a:endParaRPr sz="1500" b="0">
+              <a:solidFill>
+                <a:srgbClr val="44506B"/>
+              </a:solidFill>
+              <a:latin typeface="Calibri"/>
+            </a:endParaRPr>
           </a:p>
           <a:p>
             <a:pPr algn="l">
@@ -7719,15 +7793,12 @@
                 <a:spcPts val="200"/>
               </a:spcAft>
             </a:pPr>
-            <a:r>
-              <a:rPr sz="1500" b="0">
-                <a:solidFill>
-                  <a:srgbClr val="44506B"/>
-                </a:solidFill>
-                <a:latin typeface="Calibri"/>
-              </a:rPr>
-              <a:t/>
-            </a:r>
+            <a:endParaRPr sz="1500" b="0">
+              <a:solidFill>
+                <a:srgbClr val="44506B"/>
+              </a:solidFill>
+              <a:latin typeface="Calibri"/>
+            </a:endParaRPr>
           </a:p>
           <a:p>
             <a:pPr algn="l">
@@ -7767,15 +7838,12 @@
                 <a:spcPts val="200"/>
               </a:spcAft>
             </a:pPr>
-            <a:r>
-              <a:rPr sz="1500" b="0">
-                <a:solidFill>
-                  <a:srgbClr val="44506B"/>
-                </a:solidFill>
-                <a:latin typeface="Calibri"/>
-              </a:rPr>
-              <a:t/>
-            </a:r>
+            <a:endParaRPr sz="1500" b="0">
+              <a:solidFill>
+                <a:srgbClr val="44506B"/>
+              </a:solidFill>
+              <a:latin typeface="Calibri"/>
+            </a:endParaRPr>
           </a:p>
         </p:txBody>
       </p:sp>
@@ -7866,7 +7934,7 @@
 </file>
 
 <file path=ppt/slides/slide15.xml><?xml version="1.0" encoding="utf-8"?>
-<p:sld xmlns:a="http://schemas.openxmlformats.org/drawingml/2006/main" xmlns:p="http://schemas.openxmlformats.org/presentationml/2006/main" xmlns:r="http://schemas.openxmlformats.org/officeDocument/2006/relationships">
+<p:sld xmlns:a="http://schemas.openxmlformats.org/drawingml/2006/main" xmlns:r="http://schemas.openxmlformats.org/officeDocument/2006/relationships" xmlns:p="http://schemas.openxmlformats.org/presentationml/2006/main">
   <p:cSld>
     <p:bg>
       <p:bgPr>
@@ -7882,7 +7950,14 @@
         <p:cNvGrpSpPr/>
         <p:nvPr/>
       </p:nvGrpSpPr>
-      <p:grpSpPr/>
+      <p:grpSpPr>
+        <a:xfrm>
+          <a:off x="0" y="0"/>
+          <a:ext cx="0" cy="0"/>
+          <a:chOff x="0" y="0"/>
+          <a:chExt cx="0" cy="0"/>
+        </a:xfrm>
+      </p:grpSpPr>
       <p:sp>
         <p:nvSpPr>
           <p:cNvPr id="2" name="TextBox 1"/>
@@ -8086,8 +8161,8 @@
 </p:sld>
 </file>
 
-<file path=ppt/slides/slide16.xml><?xml version="1.0" encoding="utf-8"?>
-<p:sld xmlns:a="http://schemas.openxmlformats.org/drawingml/2006/main" xmlns:p="http://schemas.openxmlformats.org/presentationml/2006/main" xmlns:r="http://schemas.openxmlformats.org/officeDocument/2006/relationships">
+<file path=ppt/slides/slide2.xml><?xml version="1.0" encoding="utf-8"?>
+<p:sld xmlns:a="http://schemas.openxmlformats.org/drawingml/2006/main" xmlns:r="http://schemas.openxmlformats.org/officeDocument/2006/relationships" xmlns:p="http://schemas.openxmlformats.org/presentationml/2006/main">
   <p:cSld>
     <p:bg>
       <p:bgPr>
@@ -8103,7 +8178,14 @@
         <p:cNvGrpSpPr/>
         <p:nvPr/>
       </p:nvGrpSpPr>
-      <p:grpSpPr/>
+      <p:grpSpPr>
+        <a:xfrm>
+          <a:off x="0" y="0"/>
+          <a:ext cx="0" cy="0"/>
+          <a:chOff x="0" y="0"/>
+          <a:chExt cx="0" cy="0"/>
+        </a:xfrm>
+      </p:grpSpPr>
       <p:sp>
         <p:nvSpPr>
           <p:cNvPr id="2" name="TextBox 1"/>
@@ -8138,7 +8220,7 @@
                 </a:solidFill>
                 <a:latin typeface="Calibri"/>
               </a:rPr>
-              <a:t>NEXT 30 MINUTES</a:t>
+              <a:t>THE BASIC IDEA</a:t>
             </a:r>
           </a:p>
         </p:txBody>
@@ -8151,8 +8233,8 @@
         </p:nvSpPr>
         <p:spPr>
           <a:xfrm>
-            <a:off x="502920" y="560000"/>
-            <a:ext cx="10800000" cy="700000"/>
+            <a:off x="502920" y="2300000"/>
+            <a:ext cx="11000000" cy="2000000"/>
           </a:xfrm>
           <a:prstGeom prst="rect">
             <a:avLst/>
@@ -8171,71 +8253,27 @@
               </a:spcAft>
             </a:pPr>
             <a:r>
-              <a:rPr sz="2600" b="1">
+              <a:rPr sz="2800" b="1">
                 <a:solidFill>
                   <a:srgbClr val="1E2761"/>
                 </a:solidFill>
                 <a:latin typeface="Calibri"/>
               </a:rPr>
-              <a:t>Exercise: audit the feature flow you have today</a:t>
-            </a:r>
-          </a:p>
-        </p:txBody>
-      </p:sp>
-      <p:sp>
-        <p:nvSpPr>
-          <p:cNvPr id="4" name="Rounded Rectangle 3"/>
-          <p:cNvSpPr/>
-          <p:nvPr/>
-        </p:nvSpPr>
-        <p:spPr>
-          <a:xfrm>
-            <a:off x="502920" y="1300000"/>
-            <a:ext cx="10800000" cy="1180000"/>
-          </a:xfrm>
-          <a:prstGeom prst="roundRect">
-            <a:avLst>
-              <a:gd name="adj" fmla="val 6000"/>
-            </a:avLst>
-          </a:prstGeom>
-          <a:solidFill>
-            <a:srgbClr val="FFFFFF"/>
-          </a:solidFill>
-          <a:ln>
-            <a:noFill/>
-          </a:ln>
-          <a:effectLst/>
-        </p:spPr>
-        <p:style>
-          <a:lnRef idx="1">
-            <a:schemeClr val="accent1"/>
-          </a:lnRef>
-          <a:fillRef idx="3">
-            <a:schemeClr val="accent1"/>
-          </a:fillRef>
-          <a:effectRef idx="2">
-            <a:schemeClr val="accent1"/>
-          </a:effectRef>
-          <a:fontRef idx="minor">
-            <a:schemeClr val="lt1"/>
-          </a:fontRef>
-        </p:style>
-        <p:txBody>
-          <a:bodyPr rtlCol="0" anchor="ctr"/>
-          <a:lstStyle/>
-          <a:p/>
-        </p:txBody>
-      </p:sp>
-      <p:sp>
-        <p:nvSpPr>
-          <p:cNvPr id="5" name="TextBox 4"/>
+              <a:t>feat__daily is a simple feature store.</a:t>
+            </a:r>
+          </a:p>
+        </p:txBody>
+      </p:sp>
+      <p:sp>
+        <p:nvSpPr>
+          <p:cNvPr id="4" name="TextBox 3"/>
           <p:cNvSpPr txBox="1"/>
           <p:nvPr/>
         </p:nvSpPr>
         <p:spPr>
           <a:xfrm>
-            <a:off x="700000" y="1450000"/>
-            <a:ext cx="10400000" cy="350000"/>
+            <a:off x="502920" y="4400000"/>
+            <a:ext cx="10800000" cy="1200000"/>
           </a:xfrm>
           <a:prstGeom prst="rect">
             <a:avLst/>
@@ -8254,27 +8292,27 @@
               </a:spcAft>
             </a:pPr>
             <a:r>
-              <a:rPr sz="1600" b="1">
-                <a:solidFill>
-                  <a:srgbClr val="1E2761"/>
+              <a:rPr sz="1500" b="0">
+                <a:solidFill>
+                  <a:srgbClr val="44506B"/>
                 </a:solidFill>
                 <a:latin typeface="Calibri"/>
               </a:rPr>
-              <a:t>1. Name what exists</a:t>
-            </a:r>
-          </a:p>
-        </p:txBody>
-      </p:sp>
-      <p:sp>
-        <p:nvSpPr>
-          <p:cNvPr id="6" name="TextBox 5"/>
+              <a:t>It contains calculated features, identified by area and date. A pipeline writes the rows, and the same rows can be used for training and predictions. A dedicated feature store adds versioning and tools for keeping the feature definitions consistent.</a:t>
+            </a:r>
+          </a:p>
+        </p:txBody>
+      </p:sp>
+      <p:sp>
+        <p:nvSpPr>
+          <p:cNvPr id="5" name="TextBox 4"/>
           <p:cNvSpPr txBox="1"/>
           <p:nvPr/>
         </p:nvSpPr>
         <p:spPr>
           <a:xfrm>
-            <a:off x="700000" y="1820000"/>
-            <a:ext cx="10400000" cy="420000"/>
+            <a:off x="502920" y="6510528"/>
+            <a:ext cx="4572000" cy="274320"/>
           </a:xfrm>
           <a:prstGeom prst="rect">
             <a:avLst/>
@@ -8293,71 +8331,27 @@
               </a:spcAft>
             </a:pPr>
             <a:r>
-              <a:rPr sz="1400" b="0">
-                <a:solidFill>
-                  <a:srgbClr val="44506B"/>
+              <a:rPr sz="900" b="0">
+                <a:solidFill>
+                  <a:srgbClr val="9AA6C4"/>
                 </a:solidFill>
                 <a:latin typeface="Calibri"/>
               </a:rPr>
-              <a:t>In your repository, name the feature group, feature view and training dataset. The online lookup does not exist yet for most teams: mark it as a Sprint 2 need.</a:t>
-            </a:r>
-          </a:p>
-        </p:txBody>
-      </p:sp>
-      <p:sp>
-        <p:nvSpPr>
-          <p:cNvPr id="7" name="Rounded Rectangle 6"/>
-          <p:cNvSpPr/>
-          <p:nvPr/>
-        </p:nvSpPr>
-        <p:spPr>
-          <a:xfrm>
-            <a:off x="502920" y="2560000"/>
-            <a:ext cx="10800000" cy="1180000"/>
-          </a:xfrm>
-          <a:prstGeom prst="roundRect">
-            <a:avLst>
-              <a:gd name="adj" fmla="val 6000"/>
-            </a:avLst>
-          </a:prstGeom>
-          <a:solidFill>
-            <a:srgbClr val="FFFFFF"/>
-          </a:solidFill>
-          <a:ln>
-            <a:noFill/>
-          </a:ln>
-          <a:effectLst/>
-        </p:spPr>
-        <p:style>
-          <a:lnRef idx="1">
-            <a:schemeClr val="accent1"/>
-          </a:lnRef>
-          <a:fillRef idx="3">
-            <a:schemeClr val="accent1"/>
-          </a:fillRef>
-          <a:effectRef idx="2">
-            <a:schemeClr val="accent1"/>
-          </a:effectRef>
-          <a:fontRef idx="minor">
-            <a:schemeClr val="lt1"/>
-          </a:fontRef>
-        </p:style>
-        <p:txBody>
-          <a:bodyPr rtlCol="0" anchor="ctr"/>
-          <a:lstStyle/>
-          <a:p/>
-        </p:txBody>
-      </p:sp>
-      <p:sp>
-        <p:nvSpPr>
-          <p:cNvPr id="8" name="TextBox 7"/>
+              <a:t>Data engineering och agila metoder · AIM25</a:t>
+            </a:r>
+          </a:p>
+        </p:txBody>
+      </p:sp>
+      <p:sp>
+        <p:nvSpPr>
+          <p:cNvPr id="6" name="TextBox 5"/>
           <p:cNvSpPr txBox="1"/>
           <p:nvPr/>
         </p:nvSpPr>
         <p:spPr>
           <a:xfrm>
-            <a:off x="700000" y="2710000"/>
-            <a:ext cx="10400000" cy="350000"/>
+            <a:off x="11475720" y="6510528"/>
+            <a:ext cx="548640" cy="274320"/>
           </a:xfrm>
           <a:prstGeom prst="rect">
             <a:avLst/>
@@ -8370,380 +8364,19 @@
           </a:bodyPr>
           <a:lstStyle/>
           <a:p>
-            <a:pPr algn="l">
+            <a:pPr algn="r">
               <a:spcAft>
                 <a:spcPts val="0"/>
               </a:spcAft>
             </a:pPr>
             <a:r>
-              <a:rPr sz="1600" b="1">
-                <a:solidFill>
-                  <a:srgbClr val="1E2761"/>
+              <a:rPr sz="900" b="0">
+                <a:solidFill>
+                  <a:srgbClr val="9AA6C4"/>
                 </a:solidFill>
                 <a:latin typeface="Calibri"/>
               </a:rPr>
-              <a:t>2. Follow one feature</a:t>
-            </a:r>
-          </a:p>
-        </p:txBody>
-      </p:sp>
-      <p:sp>
-        <p:nvSpPr>
-          <p:cNvPr id="9" name="TextBox 8"/>
-          <p:cNvSpPr txBox="1"/>
-          <p:nvPr/>
-        </p:nvSpPr>
-        <p:spPr>
-          <a:xfrm>
-            <a:off x="700000" y="3080000"/>
-            <a:ext cx="10400000" cy="420000"/>
-          </a:xfrm>
-          <a:prstGeom prst="rect">
-            <a:avLst/>
-          </a:prstGeom>
-          <a:noFill/>
-        </p:spPr>
-        <p:txBody>
-          <a:bodyPr wrap="square" lIns="0" tIns="0" rIns="0" bIns="0">
-            <a:spAutoFit/>
-          </a:bodyPr>
-          <a:lstStyle/>
-          <a:p>
-            <a:pPr algn="l">
-              <a:spcAft>
-                <a:spcPts val="0"/>
-              </a:spcAft>
-            </a:pPr>
-            <a:r>
-              <a:rPr sz="1400" b="0">
-                <a:solidFill>
-                  <a:srgbClr val="44506B"/>
-                </a:solidFill>
-                <a:latin typeface="Calibri"/>
-              </a:rPr>
-              <a:t>Write its real path: source → raw/staging → calculation → feat__daily → training. Is it calculated in one clear place?</a:t>
-            </a:r>
-          </a:p>
-        </p:txBody>
-      </p:sp>
-      <p:sp>
-        <p:nvSpPr>
-          <p:cNvPr id="10" name="Rounded Rectangle 9"/>
-          <p:cNvSpPr/>
-          <p:nvPr/>
-        </p:nvSpPr>
-        <p:spPr>
-          <a:xfrm>
-            <a:off x="502920" y="3820000"/>
-            <a:ext cx="10800000" cy="1180000"/>
-          </a:xfrm>
-          <a:prstGeom prst="roundRect">
-            <a:avLst>
-              <a:gd name="adj" fmla="val 6000"/>
-            </a:avLst>
-          </a:prstGeom>
-          <a:solidFill>
-            <a:srgbClr val="FFFFFF"/>
-          </a:solidFill>
-          <a:ln>
-            <a:noFill/>
-          </a:ln>
-          <a:effectLst/>
-        </p:spPr>
-        <p:style>
-          <a:lnRef idx="1">
-            <a:schemeClr val="accent1"/>
-          </a:lnRef>
-          <a:fillRef idx="3">
-            <a:schemeClr val="accent1"/>
-          </a:fillRef>
-          <a:effectRef idx="2">
-            <a:schemeClr val="accent1"/>
-          </a:effectRef>
-          <a:fontRef idx="minor">
-            <a:schemeClr val="lt1"/>
-          </a:fontRef>
-        </p:style>
-        <p:txBody>
-          <a:bodyPr rtlCol="0" anchor="ctr"/>
-          <a:lstStyle/>
-          <a:p/>
-        </p:txBody>
-      </p:sp>
-      <p:sp>
-        <p:nvSpPr>
-          <p:cNvPr id="11" name="TextBox 10"/>
-          <p:cNvSpPr txBox="1"/>
-          <p:nvPr/>
-        </p:nvSpPr>
-        <p:spPr>
-          <a:xfrm>
-            <a:off x="700000" y="3970000"/>
-            <a:ext cx="10400000" cy="350000"/>
-          </a:xfrm>
-          <a:prstGeom prst="rect">
-            <a:avLst/>
-          </a:prstGeom>
-          <a:noFill/>
-        </p:spPr>
-        <p:txBody>
-          <a:bodyPr wrap="square" lIns="0" tIns="0" rIns="0" bIns="0">
-            <a:spAutoFit/>
-          </a:bodyPr>
-          <a:lstStyle/>
-          <a:p>
-            <a:pPr algn="l">
-              <a:spcAft>
-                <a:spcPts val="0"/>
-              </a:spcAft>
-            </a:pPr>
-            <a:r>
-              <a:rPr sz="1600" b="1">
-                <a:solidFill>
-                  <a:srgbClr val="1E2761"/>
-                </a:solidFill>
-                <a:latin typeface="Calibri"/>
-              </a:rPr>
-              <a:t>3. Check one time boundary</a:t>
-            </a:r>
-          </a:p>
-        </p:txBody>
-      </p:sp>
-      <p:sp>
-        <p:nvSpPr>
-          <p:cNvPr id="12" name="TextBox 11"/>
-          <p:cNvSpPr txBox="1"/>
-          <p:nvPr/>
-        </p:nvSpPr>
-        <p:spPr>
-          <a:xfrm>
-            <a:off x="700000" y="4340000"/>
-            <a:ext cx="10400000" cy="420000"/>
-          </a:xfrm>
-          <a:prstGeom prst="rect">
-            <a:avLst/>
-          </a:prstGeom>
-          <a:noFill/>
-        </p:spPr>
-        <p:txBody>
-          <a:bodyPr wrap="square" lIns="0" tIns="0" rIns="0" bIns="0">
-            <a:spAutoFit/>
-          </a:bodyPr>
-          <a:lstStyle/>
-          <a:p>
-            <a:pPr algn="l">
-              <a:spcAft>
-                <a:spcPts val="0"/>
-              </a:spcAft>
-            </a:pPr>
-            <a:r>
-              <a:rPr sz="1400" b="0">
-                <a:solidFill>
-                  <a:srgbClr val="44506B"/>
-                </a:solidFill>
-                <a:latin typeface="Calibri"/>
-              </a:rPr>
-              <a:t>For one feature, state what was available when the prediction would have been made. Does your code respect that boundary?</a:t>
-            </a:r>
-          </a:p>
-        </p:txBody>
-      </p:sp>
-      <p:sp>
-        <p:nvSpPr>
-          <p:cNvPr id="13" name="Rounded Rectangle 12"/>
-          <p:cNvSpPr/>
-          <p:nvPr/>
-        </p:nvSpPr>
-        <p:spPr>
-          <a:xfrm>
-            <a:off x="502920" y="5080000"/>
-            <a:ext cx="10800000" cy="1180000"/>
-          </a:xfrm>
-          <a:prstGeom prst="roundRect">
-            <a:avLst>
-              <a:gd name="adj" fmla="val 6000"/>
-            </a:avLst>
-          </a:prstGeom>
-          <a:solidFill>
-            <a:srgbClr val="FFFFFF"/>
-          </a:solidFill>
-          <a:ln>
-            <a:noFill/>
-          </a:ln>
-          <a:effectLst/>
-        </p:spPr>
-        <p:style>
-          <a:lnRef idx="1">
-            <a:schemeClr val="accent1"/>
-          </a:lnRef>
-          <a:fillRef idx="3">
-            <a:schemeClr val="accent1"/>
-          </a:fillRef>
-          <a:effectRef idx="2">
-            <a:schemeClr val="accent1"/>
-          </a:effectRef>
-          <a:fontRef idx="minor">
-            <a:schemeClr val="lt1"/>
-          </a:fontRef>
-        </p:style>
-        <p:txBody>
-          <a:bodyPr rtlCol="0" anchor="ctr"/>
-          <a:lstStyle/>
-          <a:p/>
-        </p:txBody>
-      </p:sp>
-      <p:sp>
-        <p:nvSpPr>
-          <p:cNvPr id="14" name="TextBox 13"/>
-          <p:cNvSpPr txBox="1"/>
-          <p:nvPr/>
-        </p:nvSpPr>
-        <p:spPr>
-          <a:xfrm>
-            <a:off x="700000" y="5230000"/>
-            <a:ext cx="10400000" cy="350000"/>
-          </a:xfrm>
-          <a:prstGeom prst="rect">
-            <a:avLst/>
-          </a:prstGeom>
-          <a:noFill/>
-        </p:spPr>
-        <p:txBody>
-          <a:bodyPr wrap="square" lIns="0" tIns="0" rIns="0" bIns="0">
-            <a:spAutoFit/>
-          </a:bodyPr>
-          <a:lstStyle/>
-          <a:p>
-            <a:pPr algn="l">
-              <a:spcAft>
-                <a:spcPts val="0"/>
-              </a:spcAft>
-            </a:pPr>
-            <a:r>
-              <a:rPr sz="1600" b="1">
-                <a:solidFill>
-                  <a:srgbClr val="1E2761"/>
-                </a:solidFill>
-                <a:latin typeface="Calibri"/>
-              </a:rPr>
-              <a:t>4. Save the audit</a:t>
-            </a:r>
-          </a:p>
-        </p:txBody>
-      </p:sp>
-      <p:sp>
-        <p:nvSpPr>
-          <p:cNvPr id="15" name="TextBox 14"/>
-          <p:cNvSpPr txBox="1"/>
-          <p:nvPr/>
-        </p:nvSpPr>
-        <p:spPr>
-          <a:xfrm>
-            <a:off x="700000" y="5600000"/>
-            <a:ext cx="10400000" cy="420000"/>
-          </a:xfrm>
-          <a:prstGeom prst="rect">
-            <a:avLst/>
-          </a:prstGeom>
-          <a:noFill/>
-        </p:spPr>
-        <p:txBody>
-          <a:bodyPr wrap="square" lIns="0" tIns="0" rIns="0" bIns="0">
-            <a:spAutoFit/>
-          </a:bodyPr>
-          <a:lstStyle/>
-          <a:p>
-            <a:pPr algn="l">
-              <a:spcAft>
-                <a:spcPts val="0"/>
-              </a:spcAft>
-            </a:pPr>
-            <a:r>
-              <a:rPr sz="1400" b="0">
-                <a:solidFill>
-                  <a:srgbClr val="44506B"/>
-                </a:solidFill>
-                <a:latin typeface="Calibri"/>
-              </a:rPr>
-              <a:t>Write docs/featureaudit.md, commit it, and add one Sprint 2 ticket if the audit found a gap. End with one sentence on whether a managed feature store is useful for your system.</a:t>
-            </a:r>
-          </a:p>
-        </p:txBody>
-      </p:sp>
-      <p:sp>
-        <p:nvSpPr>
-          <p:cNvPr id="16" name="TextBox 15"/>
-          <p:cNvSpPr txBox="1"/>
-          <p:nvPr/>
-        </p:nvSpPr>
-        <p:spPr>
-          <a:xfrm>
-            <a:off x="502920" y="6510528"/>
-            <a:ext cx="4572000" cy="274320"/>
-          </a:xfrm>
-          <a:prstGeom prst="rect">
-            <a:avLst/>
-          </a:prstGeom>
-          <a:noFill/>
-        </p:spPr>
-        <p:txBody>
-          <a:bodyPr wrap="square" lIns="0" tIns="0" rIns="0" bIns="0">
-            <a:spAutoFit/>
-          </a:bodyPr>
-          <a:lstStyle/>
-          <a:p>
-            <a:pPr algn="l">
-              <a:spcAft>
-                <a:spcPts val="0"/>
-              </a:spcAft>
-            </a:pPr>
-            <a:r>
-              <a:rPr sz="900" b="0">
-                <a:solidFill>
-                  <a:srgbClr val="9AA6C4"/>
-                </a:solidFill>
-                <a:latin typeface="Calibri"/>
-              </a:rPr>
-              <a:t>Data engineering och agila metoder · AIM25</a:t>
-            </a:r>
-          </a:p>
-        </p:txBody>
-      </p:sp>
-      <p:sp>
-        <p:nvSpPr>
-          <p:cNvPr id="17" name="TextBox 16"/>
-          <p:cNvSpPr txBox="1"/>
-          <p:nvPr/>
-        </p:nvSpPr>
-        <p:spPr>
-          <a:xfrm>
-            <a:off x="11475720" y="6510528"/>
-            <a:ext cx="548640" cy="274320"/>
-          </a:xfrm>
-          <a:prstGeom prst="rect">
-            <a:avLst/>
-          </a:prstGeom>
-          <a:noFill/>
-        </p:spPr>
-        <p:txBody>
-          <a:bodyPr wrap="square" lIns="0" tIns="0" rIns="0" bIns="0">
-            <a:spAutoFit/>
-          </a:bodyPr>
-          <a:lstStyle/>
-          <a:p>
-            <a:pPr algn="r">
-              <a:spcAft>
-                <a:spcPts val="0"/>
-              </a:spcAft>
-            </a:pPr>
-            <a:r>
-              <a:rPr sz="900" b="0">
-                <a:solidFill>
-                  <a:srgbClr val="9AA6C4"/>
-                </a:solidFill>
-                <a:latin typeface="Calibri"/>
-              </a:rPr>
-              <a:t>16</a:t>
+              <a:t>2</a:t>
             </a:r>
           </a:p>
         </p:txBody>
@@ -8756,8 +8389,8 @@
 </p:sld>
 </file>
 
-<file path=ppt/slides/slide2.xml><?xml version="1.0" encoding="utf-8"?>
-<p:sld xmlns:a="http://schemas.openxmlformats.org/drawingml/2006/main" xmlns:p="http://schemas.openxmlformats.org/presentationml/2006/main" xmlns:r="http://schemas.openxmlformats.org/officeDocument/2006/relationships">
+<file path=ppt/slides/slide3.xml><?xml version="1.0" encoding="utf-8"?>
+<p:sld xmlns:a="http://schemas.openxmlformats.org/drawingml/2006/main" xmlns:r="http://schemas.openxmlformats.org/officeDocument/2006/relationships" xmlns:p="http://schemas.openxmlformats.org/presentationml/2006/main">
   <p:cSld>
     <p:bg>
       <p:bgPr>
@@ -8773,7 +8406,14 @@
         <p:cNvGrpSpPr/>
         <p:nvPr/>
       </p:nvGrpSpPr>
-      <p:grpSpPr/>
+      <p:grpSpPr>
+        <a:xfrm>
+          <a:off x="0" y="0"/>
+          <a:ext cx="0" cy="0"/>
+          <a:chOff x="0" y="0"/>
+          <a:chExt cx="0" cy="0"/>
+        </a:xfrm>
+      </p:grpSpPr>
       <p:sp>
         <p:nvSpPr>
           <p:cNvPr id="2" name="TextBox 1"/>
@@ -8808,7 +8448,7 @@
                 </a:solidFill>
                 <a:latin typeface="Calibri"/>
               </a:rPr>
-              <a:t>THE BASIC IDEA</a:t>
+              <a:t>THE PROBLEMS IT ADDRESSES</a:t>
             </a:r>
           </a:p>
         </p:txBody>
@@ -8821,8 +8461,8 @@
         </p:nvSpPr>
         <p:spPr>
           <a:xfrm>
-            <a:off x="502920" y="2300000"/>
-            <a:ext cx="11000000" cy="2000000"/>
+            <a:off x="502920" y="560000"/>
+            <a:ext cx="10800000" cy="700000"/>
           </a:xfrm>
           <a:prstGeom prst="rect">
             <a:avLst/>
@@ -8841,13 +8481,13 @@
               </a:spcAft>
             </a:pPr>
             <a:r>
-              <a:rPr sz="2800" b="1">
+              <a:rPr sz="2600" b="1">
                 <a:solidFill>
                   <a:srgbClr val="1E2761"/>
                 </a:solidFill>
                 <a:latin typeface="Calibri"/>
               </a:rPr>
-              <a:t>feat__daily is a simple feature store.</a:t>
+              <a:t>These problems become more likely when several models use the same features</a:t>
             </a:r>
           </a:p>
         </p:txBody>
@@ -8860,8 +8500,8 @@
         </p:nvSpPr>
         <p:spPr>
           <a:xfrm>
-            <a:off x="502920" y="4400000"/>
-            <a:ext cx="10800000" cy="1200000"/>
+            <a:off x="1000000" y="1450000"/>
+            <a:ext cx="2600000" cy="700000"/>
           </a:xfrm>
           <a:prstGeom prst="rect">
             <a:avLst/>
@@ -8880,13 +8520,13 @@
               </a:spcAft>
             </a:pPr>
             <a:r>
-              <a:rPr sz="1500" b="0">
-                <a:solidFill>
-                  <a:srgbClr val="44506B"/>
+              <a:rPr sz="1400" b="1">
+                <a:solidFill>
+                  <a:srgbClr val="1E2761"/>
                 </a:solidFill>
                 <a:latin typeface="Calibri"/>
               </a:rPr>
-              <a:t>It contains calculated features, identified by area and date. A pipeline writes the rows, and the same rows can be used for training and predictions. A dedicated feature store adds versioning and tools for keeping the feature definitions consistent.</a:t>
+              <a:t>Duplication</a:t>
             </a:r>
           </a:p>
         </p:txBody>
@@ -8899,8 +8539,8 @@
         </p:nvSpPr>
         <p:spPr>
           <a:xfrm>
-            <a:off x="502920" y="6510528"/>
-            <a:ext cx="4572000" cy="274320"/>
+            <a:off x="4350000" y="1450000"/>
+            <a:ext cx="6950000" cy="700000"/>
           </a:xfrm>
           <a:prstGeom prst="rect">
             <a:avLst/>
@@ -8919,6 +8559,364 @@
               </a:spcAft>
             </a:pPr>
             <a:r>
+              <a:rPr sz="1400" b="0">
+                <a:solidFill>
+                  <a:srgbClr val="44506B"/>
+                </a:solidFill>
+                <a:latin typeface="Calibri"/>
+              </a:rPr>
+              <a:t>The same feature is calculated in two places, with slightly different rules.</a:t>
+            </a:r>
+          </a:p>
+        </p:txBody>
+      </p:sp>
+      <p:sp>
+        <p:nvSpPr>
+          <p:cNvPr id="6" name="TextBox 5"/>
+          <p:cNvSpPr txBox="1"/>
+          <p:nvPr/>
+        </p:nvSpPr>
+        <p:spPr>
+          <a:xfrm>
+            <a:off x="1000000" y="2250000"/>
+            <a:ext cx="2600000" cy="700000"/>
+          </a:xfrm>
+          <a:prstGeom prst="rect">
+            <a:avLst/>
+          </a:prstGeom>
+          <a:noFill/>
+        </p:spPr>
+        <p:txBody>
+          <a:bodyPr wrap="square" lIns="0" tIns="0" rIns="0" bIns="0">
+            <a:spAutoFit/>
+          </a:bodyPr>
+          <a:lstStyle/>
+          <a:p>
+            <a:pPr algn="l">
+              <a:spcAft>
+                <a:spcPts val="0"/>
+              </a:spcAft>
+            </a:pPr>
+            <a:r>
+              <a:rPr sz="1400" b="1">
+                <a:solidFill>
+                  <a:srgbClr val="1E2761"/>
+                </a:solidFill>
+                <a:latin typeface="Calibri"/>
+              </a:rPr>
+              <a:t>Skew</a:t>
+            </a:r>
+          </a:p>
+        </p:txBody>
+      </p:sp>
+      <p:sp>
+        <p:nvSpPr>
+          <p:cNvPr id="7" name="TextBox 6"/>
+          <p:cNvSpPr txBox="1"/>
+          <p:nvPr/>
+        </p:nvSpPr>
+        <p:spPr>
+          <a:xfrm>
+            <a:off x="4350000" y="2250000"/>
+            <a:ext cx="6950000" cy="700000"/>
+          </a:xfrm>
+          <a:prstGeom prst="rect">
+            <a:avLst/>
+          </a:prstGeom>
+          <a:noFill/>
+        </p:spPr>
+        <p:txBody>
+          <a:bodyPr wrap="square" lIns="0" tIns="0" rIns="0" bIns="0">
+            <a:spAutoFit/>
+          </a:bodyPr>
+          <a:lstStyle/>
+          <a:p>
+            <a:pPr algn="l">
+              <a:spcAft>
+                <a:spcPts val="0"/>
+              </a:spcAft>
+            </a:pPr>
+            <a:r>
+              <a:rPr sz="1400" b="0">
+                <a:solidFill>
+                  <a:srgbClr val="44506B"/>
+                </a:solidFill>
+                <a:latin typeface="Calibri"/>
+              </a:rPr>
+              <a:t>The model trains on one calculation, but the API uses another. Nothing fails, but predictions can get worse.</a:t>
+            </a:r>
+          </a:p>
+        </p:txBody>
+      </p:sp>
+      <p:sp>
+        <p:nvSpPr>
+          <p:cNvPr id="8" name="TextBox 7"/>
+          <p:cNvSpPr txBox="1"/>
+          <p:nvPr/>
+        </p:nvSpPr>
+        <p:spPr>
+          <a:xfrm>
+            <a:off x="1000000" y="3050000"/>
+            <a:ext cx="2600000" cy="700000"/>
+          </a:xfrm>
+          <a:prstGeom prst="rect">
+            <a:avLst/>
+          </a:prstGeom>
+          <a:noFill/>
+        </p:spPr>
+        <p:txBody>
+          <a:bodyPr wrap="square" lIns="0" tIns="0" rIns="0" bIns="0">
+            <a:spAutoFit/>
+          </a:bodyPr>
+          <a:lstStyle/>
+          <a:p>
+            <a:pPr algn="l">
+              <a:spcAft>
+                <a:spcPts val="0"/>
+              </a:spcAft>
+            </a:pPr>
+            <a:r>
+              <a:rPr sz="1400" b="1">
+                <a:solidFill>
+                  <a:srgbClr val="1E2761"/>
+                </a:solidFill>
+                <a:latin typeface="Calibri"/>
+              </a:rPr>
+              <a:t>Leakage</a:t>
+            </a:r>
+          </a:p>
+        </p:txBody>
+      </p:sp>
+      <p:sp>
+        <p:nvSpPr>
+          <p:cNvPr id="9" name="TextBox 8"/>
+          <p:cNvSpPr txBox="1"/>
+          <p:nvPr/>
+        </p:nvSpPr>
+        <p:spPr>
+          <a:xfrm>
+            <a:off x="4350000" y="3050000"/>
+            <a:ext cx="6950000" cy="700000"/>
+          </a:xfrm>
+          <a:prstGeom prst="rect">
+            <a:avLst/>
+          </a:prstGeom>
+          <a:noFill/>
+        </p:spPr>
+        <p:txBody>
+          <a:bodyPr wrap="square" lIns="0" tIns="0" rIns="0" bIns="0">
+            <a:spAutoFit/>
+          </a:bodyPr>
+          <a:lstStyle/>
+          <a:p>
+            <a:pPr algn="l">
+              <a:spcAft>
+                <a:spcPts val="0"/>
+              </a:spcAft>
+            </a:pPr>
+            <a:r>
+              <a:rPr sz="1400" b="0">
+                <a:solidFill>
+                  <a:srgbClr val="44506B"/>
+                </a:solidFill>
+                <a:latin typeface="Calibri"/>
+              </a:rPr>
+              <a:t>The model is trained with information that was not available when the prediction would have been made.</a:t>
+            </a:r>
+          </a:p>
+        </p:txBody>
+      </p:sp>
+      <p:sp>
+        <p:nvSpPr>
+          <p:cNvPr id="10" name="TextBox 9"/>
+          <p:cNvSpPr txBox="1"/>
+          <p:nvPr/>
+        </p:nvSpPr>
+        <p:spPr>
+          <a:xfrm>
+            <a:off x="1000000" y="3850000"/>
+            <a:ext cx="2600000" cy="700000"/>
+          </a:xfrm>
+          <a:prstGeom prst="rect">
+            <a:avLst/>
+          </a:prstGeom>
+          <a:noFill/>
+        </p:spPr>
+        <p:txBody>
+          <a:bodyPr wrap="square" lIns="0" tIns="0" rIns="0" bIns="0">
+            <a:spAutoFit/>
+          </a:bodyPr>
+          <a:lstStyle/>
+          <a:p>
+            <a:pPr algn="l">
+              <a:spcAft>
+                <a:spcPts val="0"/>
+              </a:spcAft>
+            </a:pPr>
+            <a:r>
+              <a:rPr sz="1400" b="1">
+                <a:solidFill>
+                  <a:srgbClr val="1E2761"/>
+                </a:solidFill>
+                <a:latin typeface="Calibri"/>
+              </a:rPr>
+              <a:t>No reuse</a:t>
+            </a:r>
+          </a:p>
+        </p:txBody>
+      </p:sp>
+      <p:sp>
+        <p:nvSpPr>
+          <p:cNvPr id="11" name="TextBox 10"/>
+          <p:cNvSpPr txBox="1"/>
+          <p:nvPr/>
+        </p:nvSpPr>
+        <p:spPr>
+          <a:xfrm>
+            <a:off x="4350000" y="3850000"/>
+            <a:ext cx="6950000" cy="700000"/>
+          </a:xfrm>
+          <a:prstGeom prst="rect">
+            <a:avLst/>
+          </a:prstGeom>
+          <a:noFill/>
+        </p:spPr>
+        <p:txBody>
+          <a:bodyPr wrap="square" lIns="0" tIns="0" rIns="0" bIns="0">
+            <a:spAutoFit/>
+          </a:bodyPr>
+          <a:lstStyle/>
+          <a:p>
+            <a:pPr algn="l">
+              <a:spcAft>
+                <a:spcPts val="0"/>
+              </a:spcAft>
+            </a:pPr>
+            <a:r>
+              <a:rPr sz="1400" b="0">
+                <a:solidFill>
+                  <a:srgbClr val="44506B"/>
+                </a:solidFill>
+                <a:latin typeface="Calibri"/>
+              </a:rPr>
+              <a:t>A new model starts from raw data because existing features are hard to find or trust.</a:t>
+            </a:r>
+          </a:p>
+        </p:txBody>
+      </p:sp>
+      <p:sp>
+        <p:nvSpPr>
+          <p:cNvPr id="12" name="Rounded Rectangle 11"/>
+          <p:cNvSpPr/>
+          <p:nvPr/>
+        </p:nvSpPr>
+        <p:spPr>
+          <a:xfrm>
+            <a:off x="502920" y="4750000"/>
+            <a:ext cx="10800000" cy="900000"/>
+          </a:xfrm>
+          <a:prstGeom prst="roundRect">
+            <a:avLst>
+              <a:gd name="adj" fmla="val 6000"/>
+            </a:avLst>
+          </a:prstGeom>
+          <a:solidFill>
+            <a:srgbClr val="FFFFFF"/>
+          </a:solidFill>
+          <a:ln>
+            <a:noFill/>
+          </a:ln>
+          <a:effectLst/>
+        </p:spPr>
+        <p:style>
+          <a:lnRef idx="1">
+            <a:schemeClr val="accent1"/>
+          </a:lnRef>
+          <a:fillRef idx="3">
+            <a:schemeClr val="accent1"/>
+          </a:fillRef>
+          <a:effectRef idx="2">
+            <a:schemeClr val="accent1"/>
+          </a:effectRef>
+          <a:fontRef idx="minor">
+            <a:schemeClr val="lt1"/>
+          </a:fontRef>
+        </p:style>
+        <p:txBody>
+          <a:bodyPr rtlCol="0" anchor="ctr"/>
+          <a:lstStyle/>
+          <a:p>
+            <a:endParaRPr/>
+          </a:p>
+        </p:txBody>
+      </p:sp>
+      <p:sp>
+        <p:nvSpPr>
+          <p:cNvPr id="13" name="TextBox 12"/>
+          <p:cNvSpPr txBox="1"/>
+          <p:nvPr/>
+        </p:nvSpPr>
+        <p:spPr>
+          <a:xfrm>
+            <a:off x="700000" y="4930000"/>
+            <a:ext cx="10400000" cy="700000"/>
+          </a:xfrm>
+          <a:prstGeom prst="rect">
+            <a:avLst/>
+          </a:prstGeom>
+          <a:noFill/>
+        </p:spPr>
+        <p:txBody>
+          <a:bodyPr wrap="square" lIns="0" tIns="0" rIns="0" bIns="0">
+            <a:spAutoFit/>
+          </a:bodyPr>
+          <a:lstStyle/>
+          <a:p>
+            <a:pPr algn="l">
+              <a:spcAft>
+                <a:spcPts val="0"/>
+              </a:spcAft>
+            </a:pPr>
+            <a:r>
+              <a:rPr sz="1400" b="0">
+                <a:solidFill>
+                  <a:srgbClr val="1E2761"/>
+                </a:solidFill>
+                <a:latin typeface="Calibri"/>
+              </a:rPr>
+              <a:t>Skew and leakage are especially important. They can make a model look good during training but perform poorly when it is used.</a:t>
+            </a:r>
+          </a:p>
+        </p:txBody>
+      </p:sp>
+      <p:sp>
+        <p:nvSpPr>
+          <p:cNvPr id="14" name="TextBox 13"/>
+          <p:cNvSpPr txBox="1"/>
+          <p:nvPr/>
+        </p:nvSpPr>
+        <p:spPr>
+          <a:xfrm>
+            <a:off x="502920" y="6510528"/>
+            <a:ext cx="4572000" cy="274320"/>
+          </a:xfrm>
+          <a:prstGeom prst="rect">
+            <a:avLst/>
+          </a:prstGeom>
+          <a:noFill/>
+        </p:spPr>
+        <p:txBody>
+          <a:bodyPr wrap="square" lIns="0" tIns="0" rIns="0" bIns="0">
+            <a:spAutoFit/>
+          </a:bodyPr>
+          <a:lstStyle/>
+          <a:p>
+            <a:pPr algn="l">
+              <a:spcAft>
+                <a:spcPts val="0"/>
+              </a:spcAft>
+            </a:pPr>
+            <a:r>
               <a:rPr sz="900" b="0">
                 <a:solidFill>
                   <a:srgbClr val="9AA6C4"/>
@@ -8932,7 +8930,7 @@
       </p:sp>
       <p:sp>
         <p:nvSpPr>
-          <p:cNvPr id="6" name="TextBox 5"/>
+          <p:cNvPr id="15" name="TextBox 14"/>
           <p:cNvSpPr txBox="1"/>
           <p:nvPr/>
         </p:nvSpPr>
@@ -8964,7 +8962,7 @@
                 </a:solidFill>
                 <a:latin typeface="Calibri"/>
               </a:rPr>
-              <a:t>2</a:t>
+              <a:t>3</a:t>
             </a:r>
           </a:p>
         </p:txBody>
@@ -8977,8 +8975,1412 @@
 </p:sld>
 </file>
 
-<file path=ppt/slides/slide3.xml><?xml version="1.0" encoding="utf-8"?>
-<p:sld xmlns:a="http://schemas.openxmlformats.org/drawingml/2006/main" xmlns:p="http://schemas.openxmlformats.org/presentationml/2006/main" xmlns:r="http://schemas.openxmlformats.org/officeDocument/2006/relationships">
+<file path=ppt/slides/slide4.xml><?xml version="1.0" encoding="utf-8"?>
+<p:sld xmlns:a="http://schemas.openxmlformats.org/drawingml/2006/main" xmlns:r="http://schemas.openxmlformats.org/officeDocument/2006/relationships" xmlns:p="http://schemas.openxmlformats.org/presentationml/2006/main">
+  <p:cSld>
+    <p:bg>
+      <p:bgPr>
+        <a:solidFill>
+          <a:srgbClr val="1E2761"/>
+        </a:solidFill>
+        <a:effectLst/>
+      </p:bgPr>
+    </p:bg>
+    <p:spTree>
+      <p:nvGrpSpPr>
+        <p:cNvPr id="1" name=""/>
+        <p:cNvGrpSpPr/>
+        <p:nvPr/>
+      </p:nvGrpSpPr>
+      <p:grpSpPr>
+        <a:xfrm>
+          <a:off x="0" y="0"/>
+          <a:ext cx="0" cy="0"/>
+          <a:chOff x="0" y="0"/>
+          <a:chExt cx="0" cy="0"/>
+        </a:xfrm>
+      </p:grpSpPr>
+      <p:sp>
+        <p:nvSpPr>
+          <p:cNvPr id="2" name="Oval 1"/>
+          <p:cNvSpPr/>
+          <p:nvPr/>
+        </p:nvSpPr>
+        <p:spPr>
+          <a:xfrm>
+            <a:off x="8808604" y="1341057"/>
+            <a:ext cx="114633" cy="114633"/>
+          </a:xfrm>
+          <a:prstGeom prst="ellipse">
+            <a:avLst/>
+          </a:prstGeom>
+          <a:solidFill>
+            <a:srgbClr val="CADCFC"/>
+          </a:solidFill>
+          <a:ln>
+            <a:noFill/>
+          </a:ln>
+          <a:effectLst/>
+        </p:spPr>
+        <p:style>
+          <a:lnRef idx="1">
+            <a:schemeClr val="accent1"/>
+          </a:lnRef>
+          <a:fillRef idx="3">
+            <a:schemeClr val="accent1"/>
+          </a:fillRef>
+          <a:effectRef idx="2">
+            <a:schemeClr val="accent1"/>
+          </a:effectRef>
+          <a:fontRef idx="minor">
+            <a:schemeClr val="lt1"/>
+          </a:fontRef>
+        </p:style>
+        <p:txBody>
+          <a:bodyPr rtlCol="0" anchor="ctr"/>
+          <a:lstStyle/>
+          <a:p>
+            <a:pPr algn="ctr"/>
+            <a:endParaRPr/>
+          </a:p>
+        </p:txBody>
+      </p:sp>
+      <p:sp>
+        <p:nvSpPr>
+          <p:cNvPr id="3" name="Oval 2"/>
+          <p:cNvSpPr/>
+          <p:nvPr/>
+        </p:nvSpPr>
+        <p:spPr>
+          <a:xfrm>
+            <a:off x="9422344" y="536579"/>
+            <a:ext cx="171745" cy="171745"/>
+          </a:xfrm>
+          <a:prstGeom prst="ellipse">
+            <a:avLst/>
+          </a:prstGeom>
+          <a:solidFill>
+            <a:srgbClr val="CADCFC"/>
+          </a:solidFill>
+          <a:ln>
+            <a:noFill/>
+          </a:ln>
+          <a:effectLst/>
+        </p:spPr>
+        <p:style>
+          <a:lnRef idx="1">
+            <a:schemeClr val="accent1"/>
+          </a:lnRef>
+          <a:fillRef idx="3">
+            <a:schemeClr val="accent1"/>
+          </a:fillRef>
+          <a:effectRef idx="2">
+            <a:schemeClr val="accent1"/>
+          </a:effectRef>
+          <a:fontRef idx="minor">
+            <a:schemeClr val="lt1"/>
+          </a:fontRef>
+        </p:style>
+        <p:txBody>
+          <a:bodyPr rtlCol="0" anchor="ctr"/>
+          <a:lstStyle/>
+          <a:p>
+            <a:pPr algn="ctr"/>
+            <a:endParaRPr/>
+          </a:p>
+        </p:txBody>
+      </p:sp>
+      <p:sp>
+        <p:nvSpPr>
+          <p:cNvPr id="4" name="Oval 3"/>
+          <p:cNvSpPr/>
+          <p:nvPr/>
+        </p:nvSpPr>
+        <p:spPr>
+          <a:xfrm>
+            <a:off x="9516013" y="690057"/>
+            <a:ext cx="135532" cy="135532"/>
+          </a:xfrm>
+          <a:prstGeom prst="ellipse">
+            <a:avLst/>
+          </a:prstGeom>
+          <a:solidFill>
+            <a:srgbClr val="CADCFC"/>
+          </a:solidFill>
+          <a:ln>
+            <a:noFill/>
+          </a:ln>
+          <a:effectLst/>
+        </p:spPr>
+        <p:style>
+          <a:lnRef idx="1">
+            <a:schemeClr val="accent1"/>
+          </a:lnRef>
+          <a:fillRef idx="3">
+            <a:schemeClr val="accent1"/>
+          </a:fillRef>
+          <a:effectRef idx="2">
+            <a:schemeClr val="accent1"/>
+          </a:effectRef>
+          <a:fontRef idx="minor">
+            <a:schemeClr val="lt1"/>
+          </a:fontRef>
+        </p:style>
+        <p:txBody>
+          <a:bodyPr rtlCol="0" anchor="ctr"/>
+          <a:lstStyle/>
+          <a:p>
+            <a:pPr algn="ctr"/>
+            <a:endParaRPr/>
+          </a:p>
+        </p:txBody>
+      </p:sp>
+      <p:sp>
+        <p:nvSpPr>
+          <p:cNvPr id="5" name="Oval 4"/>
+          <p:cNvSpPr/>
+          <p:nvPr/>
+        </p:nvSpPr>
+        <p:spPr>
+          <a:xfrm>
+            <a:off x="10153531" y="1723602"/>
+            <a:ext cx="155689" cy="155689"/>
+          </a:xfrm>
+          <a:prstGeom prst="ellipse">
+            <a:avLst/>
+          </a:prstGeom>
+          <a:solidFill>
+            <a:srgbClr val="CADCFC"/>
+          </a:solidFill>
+          <a:ln>
+            <a:noFill/>
+          </a:ln>
+          <a:effectLst/>
+        </p:spPr>
+        <p:style>
+          <a:lnRef idx="1">
+            <a:schemeClr val="accent1"/>
+          </a:lnRef>
+          <a:fillRef idx="3">
+            <a:schemeClr val="accent1"/>
+          </a:fillRef>
+          <a:effectRef idx="2">
+            <a:schemeClr val="accent1"/>
+          </a:effectRef>
+          <a:fontRef idx="minor">
+            <a:schemeClr val="lt1"/>
+          </a:fontRef>
+        </p:style>
+        <p:txBody>
+          <a:bodyPr rtlCol="0" anchor="ctr"/>
+          <a:lstStyle/>
+          <a:p>
+            <a:pPr algn="ctr"/>
+            <a:endParaRPr/>
+          </a:p>
+        </p:txBody>
+      </p:sp>
+      <p:sp>
+        <p:nvSpPr>
+          <p:cNvPr id="6" name="Oval 5"/>
+          <p:cNvSpPr/>
+          <p:nvPr/>
+        </p:nvSpPr>
+        <p:spPr>
+          <a:xfrm>
+            <a:off x="9708672" y="1291119"/>
+            <a:ext cx="128181" cy="128181"/>
+          </a:xfrm>
+          <a:prstGeom prst="ellipse">
+            <a:avLst/>
+          </a:prstGeom>
+          <a:solidFill>
+            <a:srgbClr val="CADCFC"/>
+          </a:solidFill>
+          <a:ln>
+            <a:noFill/>
+          </a:ln>
+          <a:effectLst/>
+        </p:spPr>
+        <p:style>
+          <a:lnRef idx="1">
+            <a:schemeClr val="accent1"/>
+          </a:lnRef>
+          <a:fillRef idx="3">
+            <a:schemeClr val="accent1"/>
+          </a:fillRef>
+          <a:effectRef idx="2">
+            <a:schemeClr val="accent1"/>
+          </a:effectRef>
+          <a:fontRef idx="minor">
+            <a:schemeClr val="lt1"/>
+          </a:fontRef>
+        </p:style>
+        <p:txBody>
+          <a:bodyPr rtlCol="0" anchor="ctr"/>
+          <a:lstStyle/>
+          <a:p>
+            <a:pPr algn="ctr"/>
+            <a:endParaRPr/>
+          </a:p>
+        </p:txBody>
+      </p:sp>
+      <p:sp>
+        <p:nvSpPr>
+          <p:cNvPr id="7" name="Oval 6"/>
+          <p:cNvSpPr/>
+          <p:nvPr/>
+        </p:nvSpPr>
+        <p:spPr>
+          <a:xfrm>
+            <a:off x="11305821" y="1844207"/>
+            <a:ext cx="87847" cy="87847"/>
+          </a:xfrm>
+          <a:prstGeom prst="ellipse">
+            <a:avLst/>
+          </a:prstGeom>
+          <a:solidFill>
+            <a:srgbClr val="CADCFC"/>
+          </a:solidFill>
+          <a:ln>
+            <a:noFill/>
+          </a:ln>
+          <a:effectLst/>
+        </p:spPr>
+        <p:style>
+          <a:lnRef idx="1">
+            <a:schemeClr val="accent1"/>
+          </a:lnRef>
+          <a:fillRef idx="3">
+            <a:schemeClr val="accent1"/>
+          </a:fillRef>
+          <a:effectRef idx="2">
+            <a:schemeClr val="accent1"/>
+          </a:effectRef>
+          <a:fontRef idx="minor">
+            <a:schemeClr val="lt1"/>
+          </a:fontRef>
+        </p:style>
+        <p:txBody>
+          <a:bodyPr rtlCol="0" anchor="ctr"/>
+          <a:lstStyle/>
+          <a:p>
+            <a:pPr algn="ctr"/>
+            <a:endParaRPr/>
+          </a:p>
+        </p:txBody>
+      </p:sp>
+      <p:sp>
+        <p:nvSpPr>
+          <p:cNvPr id="8" name="Oval 7"/>
+          <p:cNvSpPr/>
+          <p:nvPr/>
+        </p:nvSpPr>
+        <p:spPr>
+          <a:xfrm>
+            <a:off x="11025017" y="1982291"/>
+            <a:ext cx="146110" cy="146110"/>
+          </a:xfrm>
+          <a:prstGeom prst="ellipse">
+            <a:avLst/>
+          </a:prstGeom>
+          <a:solidFill>
+            <a:srgbClr val="CADCFC"/>
+          </a:solidFill>
+          <a:ln>
+            <a:noFill/>
+          </a:ln>
+          <a:effectLst/>
+        </p:spPr>
+        <p:style>
+          <a:lnRef idx="1">
+            <a:schemeClr val="accent1"/>
+          </a:lnRef>
+          <a:fillRef idx="3">
+            <a:schemeClr val="accent1"/>
+          </a:fillRef>
+          <a:effectRef idx="2">
+            <a:schemeClr val="accent1"/>
+          </a:effectRef>
+          <a:fontRef idx="minor">
+            <a:schemeClr val="lt1"/>
+          </a:fontRef>
+        </p:style>
+        <p:txBody>
+          <a:bodyPr rtlCol="0" anchor="ctr"/>
+          <a:lstStyle/>
+          <a:p>
+            <a:pPr algn="ctr"/>
+            <a:endParaRPr/>
+          </a:p>
+        </p:txBody>
+      </p:sp>
+      <p:sp>
+        <p:nvSpPr>
+          <p:cNvPr id="9" name="Oval 8"/>
+          <p:cNvSpPr/>
+          <p:nvPr/>
+        </p:nvSpPr>
+        <p:spPr>
+          <a:xfrm>
+            <a:off x="9903211" y="704183"/>
+            <a:ext cx="163812" cy="163812"/>
+          </a:xfrm>
+          <a:prstGeom prst="ellipse">
+            <a:avLst/>
+          </a:prstGeom>
+          <a:solidFill>
+            <a:srgbClr val="CADCFC"/>
+          </a:solidFill>
+          <a:ln>
+            <a:noFill/>
+          </a:ln>
+          <a:effectLst/>
+        </p:spPr>
+        <p:style>
+          <a:lnRef idx="1">
+            <a:schemeClr val="accent1"/>
+          </a:lnRef>
+          <a:fillRef idx="3">
+            <a:schemeClr val="accent1"/>
+          </a:fillRef>
+          <a:effectRef idx="2">
+            <a:schemeClr val="accent1"/>
+          </a:effectRef>
+          <a:fontRef idx="minor">
+            <a:schemeClr val="lt1"/>
+          </a:fontRef>
+        </p:style>
+        <p:txBody>
+          <a:bodyPr rtlCol="0" anchor="ctr"/>
+          <a:lstStyle/>
+          <a:p>
+            <a:pPr algn="ctr"/>
+            <a:endParaRPr/>
+          </a:p>
+        </p:txBody>
+      </p:sp>
+      <p:sp>
+        <p:nvSpPr>
+          <p:cNvPr id="10" name="Oval 9"/>
+          <p:cNvSpPr/>
+          <p:nvPr/>
+        </p:nvSpPr>
+        <p:spPr>
+          <a:xfrm>
+            <a:off x="10507516" y="1518591"/>
+            <a:ext cx="172463" cy="172463"/>
+          </a:xfrm>
+          <a:prstGeom prst="ellipse">
+            <a:avLst/>
+          </a:prstGeom>
+          <a:solidFill>
+            <a:srgbClr val="CADCFC"/>
+          </a:solidFill>
+          <a:ln>
+            <a:noFill/>
+          </a:ln>
+          <a:effectLst/>
+        </p:spPr>
+        <p:style>
+          <a:lnRef idx="1">
+            <a:schemeClr val="accent1"/>
+          </a:lnRef>
+          <a:fillRef idx="3">
+            <a:schemeClr val="accent1"/>
+          </a:fillRef>
+          <a:effectRef idx="2">
+            <a:schemeClr val="accent1"/>
+          </a:effectRef>
+          <a:fontRef idx="minor">
+            <a:schemeClr val="lt1"/>
+          </a:fontRef>
+        </p:style>
+        <p:txBody>
+          <a:bodyPr rtlCol="0" anchor="ctr"/>
+          <a:lstStyle/>
+          <a:p>
+            <a:pPr algn="ctr"/>
+            <a:endParaRPr/>
+          </a:p>
+        </p:txBody>
+      </p:sp>
+      <p:sp>
+        <p:nvSpPr>
+          <p:cNvPr id="11" name="Oval 10"/>
+          <p:cNvSpPr/>
+          <p:nvPr/>
+        </p:nvSpPr>
+        <p:spPr>
+          <a:xfrm>
+            <a:off x="9512884" y="519628"/>
+            <a:ext cx="89400" cy="89400"/>
+          </a:xfrm>
+          <a:prstGeom prst="ellipse">
+            <a:avLst/>
+          </a:prstGeom>
+          <a:solidFill>
+            <a:srgbClr val="CADCFC"/>
+          </a:solidFill>
+          <a:ln>
+            <a:noFill/>
+          </a:ln>
+          <a:effectLst/>
+        </p:spPr>
+        <p:style>
+          <a:lnRef idx="1">
+            <a:schemeClr val="accent1"/>
+          </a:lnRef>
+          <a:fillRef idx="3">
+            <a:schemeClr val="accent1"/>
+          </a:fillRef>
+          <a:effectRef idx="2">
+            <a:schemeClr val="accent1"/>
+          </a:effectRef>
+          <a:fontRef idx="minor">
+            <a:schemeClr val="lt1"/>
+          </a:fontRef>
+        </p:style>
+        <p:txBody>
+          <a:bodyPr rtlCol="0" anchor="ctr"/>
+          <a:lstStyle/>
+          <a:p>
+            <a:pPr algn="ctr"/>
+            <a:endParaRPr/>
+          </a:p>
+        </p:txBody>
+      </p:sp>
+      <p:sp>
+        <p:nvSpPr>
+          <p:cNvPr id="12" name="Oval 11"/>
+          <p:cNvSpPr/>
+          <p:nvPr/>
+        </p:nvSpPr>
+        <p:spPr>
+          <a:xfrm>
+            <a:off x="8747085" y="1071458"/>
+            <a:ext cx="88639" cy="88639"/>
+          </a:xfrm>
+          <a:prstGeom prst="ellipse">
+            <a:avLst/>
+          </a:prstGeom>
+          <a:solidFill>
+            <a:srgbClr val="CADCFC"/>
+          </a:solidFill>
+          <a:ln>
+            <a:noFill/>
+          </a:ln>
+          <a:effectLst/>
+        </p:spPr>
+        <p:style>
+          <a:lnRef idx="1">
+            <a:schemeClr val="accent1"/>
+          </a:lnRef>
+          <a:fillRef idx="3">
+            <a:schemeClr val="accent1"/>
+          </a:fillRef>
+          <a:effectRef idx="2">
+            <a:schemeClr val="accent1"/>
+          </a:effectRef>
+          <a:fontRef idx="minor">
+            <a:schemeClr val="lt1"/>
+          </a:fontRef>
+        </p:style>
+        <p:txBody>
+          <a:bodyPr rtlCol="0" anchor="ctr"/>
+          <a:lstStyle/>
+          <a:p>
+            <a:pPr algn="ctr"/>
+            <a:endParaRPr/>
+          </a:p>
+        </p:txBody>
+      </p:sp>
+      <p:sp>
+        <p:nvSpPr>
+          <p:cNvPr id="13" name="Oval 12"/>
+          <p:cNvSpPr/>
+          <p:nvPr/>
+        </p:nvSpPr>
+        <p:spPr>
+          <a:xfrm>
+            <a:off x="10880888" y="1022708"/>
+            <a:ext cx="128173" cy="128173"/>
+          </a:xfrm>
+          <a:prstGeom prst="ellipse">
+            <a:avLst/>
+          </a:prstGeom>
+          <a:solidFill>
+            <a:srgbClr val="CADCFC"/>
+          </a:solidFill>
+          <a:ln>
+            <a:noFill/>
+          </a:ln>
+          <a:effectLst/>
+        </p:spPr>
+        <p:style>
+          <a:lnRef idx="1">
+            <a:schemeClr val="accent1"/>
+          </a:lnRef>
+          <a:fillRef idx="3">
+            <a:schemeClr val="accent1"/>
+          </a:fillRef>
+          <a:effectRef idx="2">
+            <a:schemeClr val="accent1"/>
+          </a:effectRef>
+          <a:fontRef idx="minor">
+            <a:schemeClr val="lt1"/>
+          </a:fontRef>
+        </p:style>
+        <p:txBody>
+          <a:bodyPr rtlCol="0" anchor="ctr"/>
+          <a:lstStyle/>
+          <a:p>
+            <a:pPr algn="ctr"/>
+            <a:endParaRPr/>
+          </a:p>
+        </p:txBody>
+      </p:sp>
+      <p:sp>
+        <p:nvSpPr>
+          <p:cNvPr id="14" name="Oval 13"/>
+          <p:cNvSpPr/>
+          <p:nvPr/>
+        </p:nvSpPr>
+        <p:spPr>
+          <a:xfrm>
+            <a:off x="11027890" y="2016540"/>
+            <a:ext cx="84950" cy="84950"/>
+          </a:xfrm>
+          <a:prstGeom prst="ellipse">
+            <a:avLst/>
+          </a:prstGeom>
+          <a:solidFill>
+            <a:srgbClr val="CADCFC"/>
+          </a:solidFill>
+          <a:ln>
+            <a:noFill/>
+          </a:ln>
+          <a:effectLst/>
+        </p:spPr>
+        <p:style>
+          <a:lnRef idx="1">
+            <a:schemeClr val="accent1"/>
+          </a:lnRef>
+          <a:fillRef idx="3">
+            <a:schemeClr val="accent1"/>
+          </a:fillRef>
+          <a:effectRef idx="2">
+            <a:schemeClr val="accent1"/>
+          </a:effectRef>
+          <a:fontRef idx="minor">
+            <a:schemeClr val="lt1"/>
+          </a:fontRef>
+        </p:style>
+        <p:txBody>
+          <a:bodyPr rtlCol="0" anchor="ctr"/>
+          <a:lstStyle/>
+          <a:p>
+            <a:pPr algn="ctr"/>
+            <a:endParaRPr/>
+          </a:p>
+        </p:txBody>
+      </p:sp>
+      <p:sp>
+        <p:nvSpPr>
+          <p:cNvPr id="15" name="Oval 14"/>
+          <p:cNvSpPr/>
+          <p:nvPr/>
+        </p:nvSpPr>
+        <p:spPr>
+          <a:xfrm>
+            <a:off x="11110742" y="1805183"/>
+            <a:ext cx="151624" cy="151624"/>
+          </a:xfrm>
+          <a:prstGeom prst="ellipse">
+            <a:avLst/>
+          </a:prstGeom>
+          <a:solidFill>
+            <a:srgbClr val="CADCFC"/>
+          </a:solidFill>
+          <a:ln>
+            <a:noFill/>
+          </a:ln>
+          <a:effectLst/>
+        </p:spPr>
+        <p:style>
+          <a:lnRef idx="1">
+            <a:schemeClr val="accent1"/>
+          </a:lnRef>
+          <a:fillRef idx="3">
+            <a:schemeClr val="accent1"/>
+          </a:fillRef>
+          <a:effectRef idx="2">
+            <a:schemeClr val="accent1"/>
+          </a:effectRef>
+          <a:fontRef idx="minor">
+            <a:schemeClr val="lt1"/>
+          </a:fontRef>
+        </p:style>
+        <p:txBody>
+          <a:bodyPr rtlCol="0" anchor="ctr"/>
+          <a:lstStyle/>
+          <a:p>
+            <a:pPr algn="ctr"/>
+            <a:endParaRPr/>
+          </a:p>
+        </p:txBody>
+      </p:sp>
+      <p:sp>
+        <p:nvSpPr>
+          <p:cNvPr id="16" name="Oval 15"/>
+          <p:cNvSpPr/>
+          <p:nvPr/>
+        </p:nvSpPr>
+        <p:spPr>
+          <a:xfrm>
+            <a:off x="10978228" y="879065"/>
+            <a:ext cx="75219" cy="75219"/>
+          </a:xfrm>
+          <a:prstGeom prst="ellipse">
+            <a:avLst/>
+          </a:prstGeom>
+          <a:solidFill>
+            <a:srgbClr val="CADCFC"/>
+          </a:solidFill>
+          <a:ln>
+            <a:noFill/>
+          </a:ln>
+          <a:effectLst/>
+        </p:spPr>
+        <p:style>
+          <a:lnRef idx="1">
+            <a:schemeClr val="accent1"/>
+          </a:lnRef>
+          <a:fillRef idx="3">
+            <a:schemeClr val="accent1"/>
+          </a:fillRef>
+          <a:effectRef idx="2">
+            <a:schemeClr val="accent1"/>
+          </a:effectRef>
+          <a:fontRef idx="minor">
+            <a:schemeClr val="lt1"/>
+          </a:fontRef>
+        </p:style>
+        <p:txBody>
+          <a:bodyPr rtlCol="0" anchor="ctr"/>
+          <a:lstStyle/>
+          <a:p>
+            <a:pPr algn="ctr"/>
+            <a:endParaRPr/>
+          </a:p>
+        </p:txBody>
+      </p:sp>
+      <p:sp>
+        <p:nvSpPr>
+          <p:cNvPr id="17" name="Oval 16"/>
+          <p:cNvSpPr/>
+          <p:nvPr/>
+        </p:nvSpPr>
+        <p:spPr>
+          <a:xfrm>
+            <a:off x="9100179" y="1586134"/>
+            <a:ext cx="121054" cy="121054"/>
+          </a:xfrm>
+          <a:prstGeom prst="ellipse">
+            <a:avLst/>
+          </a:prstGeom>
+          <a:solidFill>
+            <a:srgbClr val="CADCFC"/>
+          </a:solidFill>
+          <a:ln>
+            <a:noFill/>
+          </a:ln>
+          <a:effectLst/>
+        </p:spPr>
+        <p:style>
+          <a:lnRef idx="1">
+            <a:schemeClr val="accent1"/>
+          </a:lnRef>
+          <a:fillRef idx="3">
+            <a:schemeClr val="accent1"/>
+          </a:fillRef>
+          <a:effectRef idx="2">
+            <a:schemeClr val="accent1"/>
+          </a:effectRef>
+          <a:fontRef idx="minor">
+            <a:schemeClr val="lt1"/>
+          </a:fontRef>
+        </p:style>
+        <p:txBody>
+          <a:bodyPr rtlCol="0" anchor="ctr"/>
+          <a:lstStyle/>
+          <a:p>
+            <a:pPr algn="ctr"/>
+            <a:endParaRPr/>
+          </a:p>
+        </p:txBody>
+      </p:sp>
+      <p:sp>
+        <p:nvSpPr>
+          <p:cNvPr id="18" name="Oval 17"/>
+          <p:cNvSpPr/>
+          <p:nvPr/>
+        </p:nvSpPr>
+        <p:spPr>
+          <a:xfrm>
+            <a:off x="8892466" y="726537"/>
+            <a:ext cx="72171" cy="72171"/>
+          </a:xfrm>
+          <a:prstGeom prst="ellipse">
+            <a:avLst/>
+          </a:prstGeom>
+          <a:solidFill>
+            <a:srgbClr val="CADCFC"/>
+          </a:solidFill>
+          <a:ln>
+            <a:noFill/>
+          </a:ln>
+          <a:effectLst/>
+        </p:spPr>
+        <p:style>
+          <a:lnRef idx="1">
+            <a:schemeClr val="accent1"/>
+          </a:lnRef>
+          <a:fillRef idx="3">
+            <a:schemeClr val="accent1"/>
+          </a:fillRef>
+          <a:effectRef idx="2">
+            <a:schemeClr val="accent1"/>
+          </a:effectRef>
+          <a:fontRef idx="minor">
+            <a:schemeClr val="lt1"/>
+          </a:fontRef>
+        </p:style>
+        <p:txBody>
+          <a:bodyPr rtlCol="0" anchor="ctr"/>
+          <a:lstStyle/>
+          <a:p>
+            <a:pPr algn="ctr"/>
+            <a:endParaRPr/>
+          </a:p>
+        </p:txBody>
+      </p:sp>
+      <p:sp>
+        <p:nvSpPr>
+          <p:cNvPr id="19" name="Oval 18"/>
+          <p:cNvSpPr/>
+          <p:nvPr/>
+        </p:nvSpPr>
+        <p:spPr>
+          <a:xfrm>
+            <a:off x="11078381" y="1223792"/>
+            <a:ext cx="130310" cy="130310"/>
+          </a:xfrm>
+          <a:prstGeom prst="ellipse">
+            <a:avLst/>
+          </a:prstGeom>
+          <a:solidFill>
+            <a:srgbClr val="CADCFC"/>
+          </a:solidFill>
+          <a:ln>
+            <a:noFill/>
+          </a:ln>
+          <a:effectLst/>
+        </p:spPr>
+        <p:style>
+          <a:lnRef idx="1">
+            <a:schemeClr val="accent1"/>
+          </a:lnRef>
+          <a:fillRef idx="3">
+            <a:schemeClr val="accent1"/>
+          </a:fillRef>
+          <a:effectRef idx="2">
+            <a:schemeClr val="accent1"/>
+          </a:effectRef>
+          <a:fontRef idx="minor">
+            <a:schemeClr val="lt1"/>
+          </a:fontRef>
+        </p:style>
+        <p:txBody>
+          <a:bodyPr rtlCol="0" anchor="ctr"/>
+          <a:lstStyle/>
+          <a:p>
+            <a:pPr algn="ctr"/>
+            <a:endParaRPr/>
+          </a:p>
+        </p:txBody>
+      </p:sp>
+      <p:sp>
+        <p:nvSpPr>
+          <p:cNvPr id="20" name="Oval 19"/>
+          <p:cNvSpPr/>
+          <p:nvPr/>
+        </p:nvSpPr>
+        <p:spPr>
+          <a:xfrm>
+            <a:off x="11494847" y="1372703"/>
+            <a:ext cx="127064" cy="127064"/>
+          </a:xfrm>
+          <a:prstGeom prst="ellipse">
+            <a:avLst/>
+          </a:prstGeom>
+          <a:solidFill>
+            <a:srgbClr val="CADCFC"/>
+          </a:solidFill>
+          <a:ln>
+            <a:noFill/>
+          </a:ln>
+          <a:effectLst/>
+        </p:spPr>
+        <p:style>
+          <a:lnRef idx="1">
+            <a:schemeClr val="accent1"/>
+          </a:lnRef>
+          <a:fillRef idx="3">
+            <a:schemeClr val="accent1"/>
+          </a:fillRef>
+          <a:effectRef idx="2">
+            <a:schemeClr val="accent1"/>
+          </a:effectRef>
+          <a:fontRef idx="minor">
+            <a:schemeClr val="lt1"/>
+          </a:fontRef>
+        </p:style>
+        <p:txBody>
+          <a:bodyPr rtlCol="0" anchor="ctr"/>
+          <a:lstStyle/>
+          <a:p>
+            <a:pPr algn="ctr"/>
+            <a:endParaRPr/>
+          </a:p>
+        </p:txBody>
+      </p:sp>
+      <p:sp>
+        <p:nvSpPr>
+          <p:cNvPr id="21" name="Oval 20"/>
+          <p:cNvSpPr/>
+          <p:nvPr/>
+        </p:nvSpPr>
+        <p:spPr>
+          <a:xfrm>
+            <a:off x="10237015" y="1345564"/>
+            <a:ext cx="158962" cy="158962"/>
+          </a:xfrm>
+          <a:prstGeom prst="ellipse">
+            <a:avLst/>
+          </a:prstGeom>
+          <a:solidFill>
+            <a:srgbClr val="CADCFC"/>
+          </a:solidFill>
+          <a:ln>
+            <a:noFill/>
+          </a:ln>
+          <a:effectLst/>
+        </p:spPr>
+        <p:style>
+          <a:lnRef idx="1">
+            <a:schemeClr val="accent1"/>
+          </a:lnRef>
+          <a:fillRef idx="3">
+            <a:schemeClr val="accent1"/>
+          </a:fillRef>
+          <a:effectRef idx="2">
+            <a:schemeClr val="accent1"/>
+          </a:effectRef>
+          <a:fontRef idx="minor">
+            <a:schemeClr val="lt1"/>
+          </a:fontRef>
+        </p:style>
+        <p:txBody>
+          <a:bodyPr rtlCol="0" anchor="ctr"/>
+          <a:lstStyle/>
+          <a:p>
+            <a:pPr algn="ctr"/>
+            <a:endParaRPr/>
+          </a:p>
+        </p:txBody>
+      </p:sp>
+      <p:sp>
+        <p:nvSpPr>
+          <p:cNvPr id="22" name="Oval 21"/>
+          <p:cNvSpPr/>
+          <p:nvPr/>
+        </p:nvSpPr>
+        <p:spPr>
+          <a:xfrm>
+            <a:off x="8804006" y="1179807"/>
+            <a:ext cx="96363" cy="96363"/>
+          </a:xfrm>
+          <a:prstGeom prst="ellipse">
+            <a:avLst/>
+          </a:prstGeom>
+          <a:solidFill>
+            <a:srgbClr val="CADCFC"/>
+          </a:solidFill>
+          <a:ln>
+            <a:noFill/>
+          </a:ln>
+          <a:effectLst/>
+        </p:spPr>
+        <p:style>
+          <a:lnRef idx="1">
+            <a:schemeClr val="accent1"/>
+          </a:lnRef>
+          <a:fillRef idx="3">
+            <a:schemeClr val="accent1"/>
+          </a:fillRef>
+          <a:effectRef idx="2">
+            <a:schemeClr val="accent1"/>
+          </a:effectRef>
+          <a:fontRef idx="minor">
+            <a:schemeClr val="lt1"/>
+          </a:fontRef>
+        </p:style>
+        <p:txBody>
+          <a:bodyPr rtlCol="0" anchor="ctr"/>
+          <a:lstStyle/>
+          <a:p>
+            <a:pPr algn="ctr"/>
+            <a:endParaRPr/>
+          </a:p>
+        </p:txBody>
+      </p:sp>
+      <p:sp>
+        <p:nvSpPr>
+          <p:cNvPr id="23" name="Oval 22"/>
+          <p:cNvSpPr/>
+          <p:nvPr/>
+        </p:nvSpPr>
+        <p:spPr>
+          <a:xfrm>
+            <a:off x="8849720" y="893700"/>
+            <a:ext cx="103149" cy="103149"/>
+          </a:xfrm>
+          <a:prstGeom prst="ellipse">
+            <a:avLst/>
+          </a:prstGeom>
+          <a:solidFill>
+            <a:srgbClr val="CADCFC"/>
+          </a:solidFill>
+          <a:ln>
+            <a:noFill/>
+          </a:ln>
+          <a:effectLst/>
+        </p:spPr>
+        <p:style>
+          <a:lnRef idx="1">
+            <a:schemeClr val="accent1"/>
+          </a:lnRef>
+          <a:fillRef idx="3">
+            <a:schemeClr val="accent1"/>
+          </a:fillRef>
+          <a:effectRef idx="2">
+            <a:schemeClr val="accent1"/>
+          </a:effectRef>
+          <a:fontRef idx="minor">
+            <a:schemeClr val="lt1"/>
+          </a:fontRef>
+        </p:style>
+        <p:txBody>
+          <a:bodyPr rtlCol="0" anchor="ctr"/>
+          <a:lstStyle/>
+          <a:p>
+            <a:pPr algn="ctr"/>
+            <a:endParaRPr/>
+          </a:p>
+        </p:txBody>
+      </p:sp>
+      <p:sp>
+        <p:nvSpPr>
+          <p:cNvPr id="24" name="Oval 23"/>
+          <p:cNvSpPr/>
+          <p:nvPr/>
+        </p:nvSpPr>
+        <p:spPr>
+          <a:xfrm>
+            <a:off x="10099364" y="1674942"/>
+            <a:ext cx="146518" cy="146518"/>
+          </a:xfrm>
+          <a:prstGeom prst="ellipse">
+            <a:avLst/>
+          </a:prstGeom>
+          <a:solidFill>
+            <a:srgbClr val="CADCFC"/>
+          </a:solidFill>
+          <a:ln>
+            <a:noFill/>
+          </a:ln>
+          <a:effectLst/>
+        </p:spPr>
+        <p:style>
+          <a:lnRef idx="1">
+            <a:schemeClr val="accent1"/>
+          </a:lnRef>
+          <a:fillRef idx="3">
+            <a:schemeClr val="accent1"/>
+          </a:fillRef>
+          <a:effectRef idx="2">
+            <a:schemeClr val="accent1"/>
+          </a:effectRef>
+          <a:fontRef idx="minor">
+            <a:schemeClr val="lt1"/>
+          </a:fontRef>
+        </p:style>
+        <p:txBody>
+          <a:bodyPr rtlCol="0" anchor="ctr"/>
+          <a:lstStyle/>
+          <a:p>
+            <a:pPr algn="ctr"/>
+            <a:endParaRPr/>
+          </a:p>
+        </p:txBody>
+      </p:sp>
+      <p:sp>
+        <p:nvSpPr>
+          <p:cNvPr id="25" name="Oval 24"/>
+          <p:cNvSpPr/>
+          <p:nvPr/>
+        </p:nvSpPr>
+        <p:spPr>
+          <a:xfrm>
+            <a:off x="9042547" y="1263509"/>
+            <a:ext cx="89841" cy="89841"/>
+          </a:xfrm>
+          <a:prstGeom prst="ellipse">
+            <a:avLst/>
+          </a:prstGeom>
+          <a:solidFill>
+            <a:srgbClr val="CADCFC"/>
+          </a:solidFill>
+          <a:ln>
+            <a:noFill/>
+          </a:ln>
+          <a:effectLst/>
+        </p:spPr>
+        <p:style>
+          <a:lnRef idx="1">
+            <a:schemeClr val="accent1"/>
+          </a:lnRef>
+          <a:fillRef idx="3">
+            <a:schemeClr val="accent1"/>
+          </a:fillRef>
+          <a:effectRef idx="2">
+            <a:schemeClr val="accent1"/>
+          </a:effectRef>
+          <a:fontRef idx="minor">
+            <a:schemeClr val="lt1"/>
+          </a:fontRef>
+        </p:style>
+        <p:txBody>
+          <a:bodyPr rtlCol="0" anchor="ctr"/>
+          <a:lstStyle/>
+          <a:p>
+            <a:pPr algn="ctr"/>
+            <a:endParaRPr/>
+          </a:p>
+        </p:txBody>
+      </p:sp>
+      <p:sp>
+        <p:nvSpPr>
+          <p:cNvPr id="26" name="Oval 25"/>
+          <p:cNvSpPr/>
+          <p:nvPr/>
+        </p:nvSpPr>
+        <p:spPr>
+          <a:xfrm>
+            <a:off x="10689213" y="818860"/>
+            <a:ext cx="98103" cy="98103"/>
+          </a:xfrm>
+          <a:prstGeom prst="ellipse">
+            <a:avLst/>
+          </a:prstGeom>
+          <a:solidFill>
+            <a:srgbClr val="CADCFC"/>
+          </a:solidFill>
+          <a:ln>
+            <a:noFill/>
+          </a:ln>
+          <a:effectLst/>
+        </p:spPr>
+        <p:style>
+          <a:lnRef idx="1">
+            <a:schemeClr val="accent1"/>
+          </a:lnRef>
+          <a:fillRef idx="3">
+            <a:schemeClr val="accent1"/>
+          </a:fillRef>
+          <a:effectRef idx="2">
+            <a:schemeClr val="accent1"/>
+          </a:effectRef>
+          <a:fontRef idx="minor">
+            <a:schemeClr val="lt1"/>
+          </a:fontRef>
+        </p:style>
+        <p:txBody>
+          <a:bodyPr rtlCol="0" anchor="ctr"/>
+          <a:lstStyle/>
+          <a:p>
+            <a:pPr algn="ctr"/>
+            <a:endParaRPr/>
+          </a:p>
+        </p:txBody>
+      </p:sp>
+      <p:sp>
+        <p:nvSpPr>
+          <p:cNvPr id="27" name="Oval 26"/>
+          <p:cNvSpPr/>
+          <p:nvPr/>
+        </p:nvSpPr>
+        <p:spPr>
+          <a:xfrm>
+            <a:off x="11008894" y="1131645"/>
+            <a:ext cx="146072" cy="146072"/>
+          </a:xfrm>
+          <a:prstGeom prst="ellipse">
+            <a:avLst/>
+          </a:prstGeom>
+          <a:solidFill>
+            <a:srgbClr val="CADCFC"/>
+          </a:solidFill>
+          <a:ln>
+            <a:noFill/>
+          </a:ln>
+          <a:effectLst/>
+        </p:spPr>
+        <p:style>
+          <a:lnRef idx="1">
+            <a:schemeClr val="accent1"/>
+          </a:lnRef>
+          <a:fillRef idx="3">
+            <a:schemeClr val="accent1"/>
+          </a:fillRef>
+          <a:effectRef idx="2">
+            <a:schemeClr val="accent1"/>
+          </a:effectRef>
+          <a:fontRef idx="minor">
+            <a:schemeClr val="lt1"/>
+          </a:fontRef>
+        </p:style>
+        <p:txBody>
+          <a:bodyPr rtlCol="0" anchor="ctr"/>
+          <a:lstStyle/>
+          <a:p>
+            <a:pPr algn="ctr"/>
+            <a:endParaRPr/>
+          </a:p>
+        </p:txBody>
+      </p:sp>
+      <p:sp>
+        <p:nvSpPr>
+          <p:cNvPr id="28" name="Oval 27"/>
+          <p:cNvSpPr/>
+          <p:nvPr/>
+        </p:nvSpPr>
+        <p:spPr>
+          <a:xfrm>
+            <a:off x="9507176" y="1020854"/>
+            <a:ext cx="119383" cy="119383"/>
+          </a:xfrm>
+          <a:prstGeom prst="ellipse">
+            <a:avLst/>
+          </a:prstGeom>
+          <a:solidFill>
+            <a:srgbClr val="CADCFC"/>
+          </a:solidFill>
+          <a:ln>
+            <a:noFill/>
+          </a:ln>
+          <a:effectLst/>
+        </p:spPr>
+        <p:style>
+          <a:lnRef idx="1">
+            <a:schemeClr val="accent1"/>
+          </a:lnRef>
+          <a:fillRef idx="3">
+            <a:schemeClr val="accent1"/>
+          </a:fillRef>
+          <a:effectRef idx="2">
+            <a:schemeClr val="accent1"/>
+          </a:effectRef>
+          <a:fontRef idx="minor">
+            <a:schemeClr val="lt1"/>
+          </a:fontRef>
+        </p:style>
+        <p:txBody>
+          <a:bodyPr rtlCol="0" anchor="ctr"/>
+          <a:lstStyle/>
+          <a:p>
+            <a:pPr algn="ctr"/>
+            <a:endParaRPr/>
+          </a:p>
+        </p:txBody>
+      </p:sp>
+      <p:sp>
+        <p:nvSpPr>
+          <p:cNvPr id="29" name="TextBox 28"/>
+          <p:cNvSpPr txBox="1"/>
+          <p:nvPr/>
+        </p:nvSpPr>
+        <p:spPr>
+          <a:xfrm>
+            <a:off x="640080" y="3200000"/>
+            <a:ext cx="10000000" cy="1000000"/>
+          </a:xfrm>
+          <a:prstGeom prst="rect">
+            <a:avLst/>
+          </a:prstGeom>
+          <a:noFill/>
+        </p:spPr>
+        <p:txBody>
+          <a:bodyPr wrap="square" lIns="0" tIns="0" rIns="0" bIns="0">
+            <a:spAutoFit/>
+          </a:bodyPr>
+          <a:lstStyle/>
+          <a:p>
+            <a:pPr algn="l">
+              <a:spcAft>
+                <a:spcPts val="0"/>
+              </a:spcAft>
+            </a:pPr>
+            <a:r>
+              <a:rPr sz="3400" b="1">
+                <a:solidFill>
+                  <a:srgbClr val="FFFFFF"/>
+                </a:solidFill>
+                <a:latin typeface="Calibri"/>
+              </a:rPr>
+              <a:t>The four pieces</a:t>
+            </a:r>
+          </a:p>
+        </p:txBody>
+      </p:sp>
+      <p:sp>
+        <p:nvSpPr>
+          <p:cNvPr id="30" name="TextBox 29"/>
+          <p:cNvSpPr txBox="1"/>
+          <p:nvPr/>
+        </p:nvSpPr>
+        <p:spPr>
+          <a:xfrm>
+            <a:off x="640080" y="4250000"/>
+            <a:ext cx="9500000" cy="900000"/>
+          </a:xfrm>
+          <a:prstGeom prst="rect">
+            <a:avLst/>
+          </a:prstGeom>
+          <a:noFill/>
+        </p:spPr>
+        <p:txBody>
+          <a:bodyPr wrap="square" lIns="0" tIns="0" rIns="0" bIns="0">
+            <a:spAutoFit/>
+          </a:bodyPr>
+          <a:lstStyle/>
+          <a:p>
+            <a:pPr algn="l">
+              <a:spcAft>
+                <a:spcPts val="0"/>
+              </a:spcAft>
+            </a:pPr>
+            <a:r>
+              <a:rPr sz="1500" b="0">
+                <a:solidFill>
+                  <a:srgbClr val="CADCFC"/>
+                </a:solidFill>
+                <a:latin typeface="Calibri"/>
+              </a:rPr>
+              <a:t>Different tools use different names. The underlying ideas are the same.</a:t>
+            </a:r>
+          </a:p>
+        </p:txBody>
+      </p:sp>
+      <p:sp>
+        <p:nvSpPr>
+          <p:cNvPr id="31" name="TextBox 30"/>
+          <p:cNvSpPr txBox="1"/>
+          <p:nvPr/>
+        </p:nvSpPr>
+        <p:spPr>
+          <a:xfrm>
+            <a:off x="502920" y="6510528"/>
+            <a:ext cx="4572000" cy="274320"/>
+          </a:xfrm>
+          <a:prstGeom prst="rect">
+            <a:avLst/>
+          </a:prstGeom>
+          <a:noFill/>
+        </p:spPr>
+        <p:txBody>
+          <a:bodyPr wrap="square" lIns="0" tIns="0" rIns="0" bIns="0">
+            <a:spAutoFit/>
+          </a:bodyPr>
+          <a:lstStyle/>
+          <a:p>
+            <a:pPr algn="l">
+              <a:spcAft>
+                <a:spcPts val="0"/>
+              </a:spcAft>
+            </a:pPr>
+            <a:r>
+              <a:rPr sz="900" b="0">
+                <a:solidFill>
+                  <a:srgbClr val="CADCFC"/>
+                </a:solidFill>
+                <a:latin typeface="Calibri"/>
+              </a:rPr>
+              <a:t>Data engineering och agila metoder · AIM25</a:t>
+            </a:r>
+          </a:p>
+        </p:txBody>
+      </p:sp>
+      <p:sp>
+        <p:nvSpPr>
+          <p:cNvPr id="32" name="TextBox 31"/>
+          <p:cNvSpPr txBox="1"/>
+          <p:nvPr/>
+        </p:nvSpPr>
+        <p:spPr>
+          <a:xfrm>
+            <a:off x="11475720" y="6510528"/>
+            <a:ext cx="548640" cy="274320"/>
+          </a:xfrm>
+          <a:prstGeom prst="rect">
+            <a:avLst/>
+          </a:prstGeom>
+          <a:noFill/>
+        </p:spPr>
+        <p:txBody>
+          <a:bodyPr wrap="square" lIns="0" tIns="0" rIns="0" bIns="0">
+            <a:spAutoFit/>
+          </a:bodyPr>
+          <a:lstStyle/>
+          <a:p>
+            <a:pPr algn="r">
+              <a:spcAft>
+                <a:spcPts val="0"/>
+              </a:spcAft>
+            </a:pPr>
+            <a:r>
+              <a:rPr sz="900" b="0">
+                <a:solidFill>
+                  <a:srgbClr val="CADCFC"/>
+                </a:solidFill>
+                <a:latin typeface="Calibri"/>
+              </a:rPr>
+              <a:t>4</a:t>
+            </a:r>
+          </a:p>
+        </p:txBody>
+      </p:sp>
+    </p:spTree>
+  </p:cSld>
+  <p:clrMapOvr>
+    <a:masterClrMapping/>
+  </p:clrMapOvr>
+</p:sld>
+</file>
+
+<file path=ppt/slides/slide5.xml><?xml version="1.0" encoding="utf-8"?>
+<p:sld xmlns:a="http://schemas.openxmlformats.org/drawingml/2006/main" xmlns:r="http://schemas.openxmlformats.org/officeDocument/2006/relationships" xmlns:p="http://schemas.openxmlformats.org/presentationml/2006/main">
   <p:cSld>
     <p:bg>
       <p:bgPr>
@@ -8994,7 +10396,14 @@
         <p:cNvGrpSpPr/>
         <p:nvPr/>
       </p:nvGrpSpPr>
-      <p:grpSpPr/>
+      <p:grpSpPr>
+        <a:xfrm>
+          <a:off x="0" y="0"/>
+          <a:ext cx="0" cy="0"/>
+          <a:chOff x="0" y="0"/>
+          <a:chExt cx="0" cy="0"/>
+        </a:xfrm>
+      </p:grpSpPr>
       <p:sp>
         <p:nvSpPr>
           <p:cNvPr id="2" name="TextBox 1"/>
@@ -9029,7 +10438,7 @@
                 </a:solidFill>
                 <a:latin typeface="Calibri"/>
               </a:rPr>
-              <a:t>THE PROBLEMS IT ADDRESSES</a:t>
+              <a:t>VOCABULARY</a:t>
             </a:r>
           </a:p>
         </p:txBody>
@@ -9068,333 +10477,21 @@
                 </a:solidFill>
                 <a:latin typeface="Calibri"/>
               </a:rPr>
-              <a:t>These problems become more likely when several models use the same features</a:t>
-            </a:r>
-          </a:p>
-        </p:txBody>
-      </p:sp>
-      <p:sp>
-        <p:nvSpPr>
-          <p:cNvPr id="4" name="TextBox 3"/>
-          <p:cNvSpPr txBox="1"/>
-          <p:nvPr/>
-        </p:nvSpPr>
-        <p:spPr>
-          <a:xfrm>
-            <a:off x="1000000" y="1450000"/>
-            <a:ext cx="2600000" cy="700000"/>
-          </a:xfrm>
-          <a:prstGeom prst="rect">
-            <a:avLst/>
-          </a:prstGeom>
-          <a:noFill/>
-        </p:spPr>
-        <p:txBody>
-          <a:bodyPr wrap="square" lIns="0" tIns="0" rIns="0" bIns="0">
-            <a:spAutoFit/>
-          </a:bodyPr>
-          <a:lstStyle/>
-          <a:p>
-            <a:pPr algn="l">
-              <a:spcAft>
-                <a:spcPts val="0"/>
-              </a:spcAft>
-            </a:pPr>
-            <a:r>
-              <a:rPr sz="1400" b="1">
-                <a:solidFill>
-                  <a:srgbClr val="1E2761"/>
-                </a:solidFill>
-                <a:latin typeface="Calibri"/>
-              </a:rPr>
-              <a:t>Duplication</a:t>
-            </a:r>
-          </a:p>
-        </p:txBody>
-      </p:sp>
-      <p:sp>
-        <p:nvSpPr>
-          <p:cNvPr id="5" name="TextBox 4"/>
-          <p:cNvSpPr txBox="1"/>
-          <p:nvPr/>
-        </p:nvSpPr>
-        <p:spPr>
-          <a:xfrm>
-            <a:off x="4350000" y="1450000"/>
-            <a:ext cx="6950000" cy="700000"/>
-          </a:xfrm>
-          <a:prstGeom prst="rect">
-            <a:avLst/>
-          </a:prstGeom>
-          <a:noFill/>
-        </p:spPr>
-        <p:txBody>
-          <a:bodyPr wrap="square" lIns="0" tIns="0" rIns="0" bIns="0">
-            <a:spAutoFit/>
-          </a:bodyPr>
-          <a:lstStyle/>
-          <a:p>
-            <a:pPr algn="l">
-              <a:spcAft>
-                <a:spcPts val="0"/>
-              </a:spcAft>
-            </a:pPr>
-            <a:r>
-              <a:rPr sz="1400" b="0">
-                <a:solidFill>
-                  <a:srgbClr val="44506B"/>
-                </a:solidFill>
-                <a:latin typeface="Calibri"/>
-              </a:rPr>
-              <a:t>The same feature is calculated in two places, with slightly different rules.</a:t>
-            </a:r>
-          </a:p>
-        </p:txBody>
-      </p:sp>
-      <p:sp>
-        <p:nvSpPr>
-          <p:cNvPr id="6" name="TextBox 5"/>
-          <p:cNvSpPr txBox="1"/>
-          <p:nvPr/>
-        </p:nvSpPr>
-        <p:spPr>
-          <a:xfrm>
-            <a:off x="1000000" y="2250000"/>
-            <a:ext cx="2600000" cy="700000"/>
-          </a:xfrm>
-          <a:prstGeom prst="rect">
-            <a:avLst/>
-          </a:prstGeom>
-          <a:noFill/>
-        </p:spPr>
-        <p:txBody>
-          <a:bodyPr wrap="square" lIns="0" tIns="0" rIns="0" bIns="0">
-            <a:spAutoFit/>
-          </a:bodyPr>
-          <a:lstStyle/>
-          <a:p>
-            <a:pPr algn="l">
-              <a:spcAft>
-                <a:spcPts val="0"/>
-              </a:spcAft>
-            </a:pPr>
-            <a:r>
-              <a:rPr sz="1400" b="1">
-                <a:solidFill>
-                  <a:srgbClr val="1E2761"/>
-                </a:solidFill>
-                <a:latin typeface="Calibri"/>
-              </a:rPr>
-              <a:t>Skew</a:t>
-            </a:r>
-          </a:p>
-        </p:txBody>
-      </p:sp>
-      <p:sp>
-        <p:nvSpPr>
-          <p:cNvPr id="7" name="TextBox 6"/>
-          <p:cNvSpPr txBox="1"/>
-          <p:nvPr/>
-        </p:nvSpPr>
-        <p:spPr>
-          <a:xfrm>
-            <a:off x="4350000" y="2250000"/>
-            <a:ext cx="6950000" cy="700000"/>
-          </a:xfrm>
-          <a:prstGeom prst="rect">
-            <a:avLst/>
-          </a:prstGeom>
-          <a:noFill/>
-        </p:spPr>
-        <p:txBody>
-          <a:bodyPr wrap="square" lIns="0" tIns="0" rIns="0" bIns="0">
-            <a:spAutoFit/>
-          </a:bodyPr>
-          <a:lstStyle/>
-          <a:p>
-            <a:pPr algn="l">
-              <a:spcAft>
-                <a:spcPts val="0"/>
-              </a:spcAft>
-            </a:pPr>
-            <a:r>
-              <a:rPr sz="1400" b="0">
-                <a:solidFill>
-                  <a:srgbClr val="44506B"/>
-                </a:solidFill>
-                <a:latin typeface="Calibri"/>
-              </a:rPr>
-              <a:t>The model trains on one calculation, but the API uses another. Nothing fails, but predictions can get worse.</a:t>
-            </a:r>
-          </a:p>
-        </p:txBody>
-      </p:sp>
-      <p:sp>
-        <p:nvSpPr>
-          <p:cNvPr id="8" name="TextBox 7"/>
-          <p:cNvSpPr txBox="1"/>
-          <p:nvPr/>
-        </p:nvSpPr>
-        <p:spPr>
-          <a:xfrm>
-            <a:off x="1000000" y="3050000"/>
-            <a:ext cx="2600000" cy="700000"/>
-          </a:xfrm>
-          <a:prstGeom prst="rect">
-            <a:avLst/>
-          </a:prstGeom>
-          <a:noFill/>
-        </p:spPr>
-        <p:txBody>
-          <a:bodyPr wrap="square" lIns="0" tIns="0" rIns="0" bIns="0">
-            <a:spAutoFit/>
-          </a:bodyPr>
-          <a:lstStyle/>
-          <a:p>
-            <a:pPr algn="l">
-              <a:spcAft>
-                <a:spcPts val="0"/>
-              </a:spcAft>
-            </a:pPr>
-            <a:r>
-              <a:rPr sz="1400" b="1">
-                <a:solidFill>
-                  <a:srgbClr val="1E2761"/>
-                </a:solidFill>
-                <a:latin typeface="Calibri"/>
-              </a:rPr>
-              <a:t>Leakage</a:t>
-            </a:r>
-          </a:p>
-        </p:txBody>
-      </p:sp>
-      <p:sp>
-        <p:nvSpPr>
-          <p:cNvPr id="9" name="TextBox 8"/>
-          <p:cNvSpPr txBox="1"/>
-          <p:nvPr/>
-        </p:nvSpPr>
-        <p:spPr>
-          <a:xfrm>
-            <a:off x="4350000" y="3050000"/>
-            <a:ext cx="6950000" cy="700000"/>
-          </a:xfrm>
-          <a:prstGeom prst="rect">
-            <a:avLst/>
-          </a:prstGeom>
-          <a:noFill/>
-        </p:spPr>
-        <p:txBody>
-          <a:bodyPr wrap="square" lIns="0" tIns="0" rIns="0" bIns="0">
-            <a:spAutoFit/>
-          </a:bodyPr>
-          <a:lstStyle/>
-          <a:p>
-            <a:pPr algn="l">
-              <a:spcAft>
-                <a:spcPts val="0"/>
-              </a:spcAft>
-            </a:pPr>
-            <a:r>
-              <a:rPr sz="1400" b="0">
-                <a:solidFill>
-                  <a:srgbClr val="44506B"/>
-                </a:solidFill>
-                <a:latin typeface="Calibri"/>
-              </a:rPr>
-              <a:t>The model is trained with information that was not available when the prediction would have been made.</a:t>
-            </a:r>
-          </a:p>
-        </p:txBody>
-      </p:sp>
-      <p:sp>
-        <p:nvSpPr>
-          <p:cNvPr id="10" name="TextBox 9"/>
-          <p:cNvSpPr txBox="1"/>
-          <p:nvPr/>
-        </p:nvSpPr>
-        <p:spPr>
-          <a:xfrm>
-            <a:off x="1000000" y="3850000"/>
-            <a:ext cx="2600000" cy="700000"/>
-          </a:xfrm>
-          <a:prstGeom prst="rect">
-            <a:avLst/>
-          </a:prstGeom>
-          <a:noFill/>
-        </p:spPr>
-        <p:txBody>
-          <a:bodyPr wrap="square" lIns="0" tIns="0" rIns="0" bIns="0">
-            <a:spAutoFit/>
-          </a:bodyPr>
-          <a:lstStyle/>
-          <a:p>
-            <a:pPr algn="l">
-              <a:spcAft>
-                <a:spcPts val="0"/>
-              </a:spcAft>
-            </a:pPr>
-            <a:r>
-              <a:rPr sz="1400" b="1">
-                <a:solidFill>
-                  <a:srgbClr val="1E2761"/>
-                </a:solidFill>
-                <a:latin typeface="Calibri"/>
-              </a:rPr>
-              <a:t>No reuse</a:t>
-            </a:r>
-          </a:p>
-        </p:txBody>
-      </p:sp>
-      <p:sp>
-        <p:nvSpPr>
-          <p:cNvPr id="11" name="TextBox 10"/>
-          <p:cNvSpPr txBox="1"/>
-          <p:nvPr/>
-        </p:nvSpPr>
-        <p:spPr>
-          <a:xfrm>
-            <a:off x="4350000" y="3850000"/>
-            <a:ext cx="6950000" cy="700000"/>
-          </a:xfrm>
-          <a:prstGeom prst="rect">
-            <a:avLst/>
-          </a:prstGeom>
-          <a:noFill/>
-        </p:spPr>
-        <p:txBody>
-          <a:bodyPr wrap="square" lIns="0" tIns="0" rIns="0" bIns="0">
-            <a:spAutoFit/>
-          </a:bodyPr>
-          <a:lstStyle/>
-          <a:p>
-            <a:pPr algn="l">
-              <a:spcAft>
-                <a:spcPts val="0"/>
-              </a:spcAft>
-            </a:pPr>
-            <a:r>
-              <a:rPr sz="1400" b="0">
-                <a:solidFill>
-                  <a:srgbClr val="44506B"/>
-                </a:solidFill>
-                <a:latin typeface="Calibri"/>
-              </a:rPr>
-              <a:t>A new model starts from raw data because existing features are hard to find or trust.</a:t>
-            </a:r>
-          </a:p>
-        </p:txBody>
-      </p:sp>
-      <p:sp>
-        <p:nvSpPr>
-          <p:cNvPr id="12" name="Rounded Rectangle 11"/>
+              <a:t>Four common terms</a:t>
+            </a:r>
+          </a:p>
+        </p:txBody>
+      </p:sp>
+      <p:sp>
+        <p:nvSpPr>
+          <p:cNvPr id="4" name="Rounded Rectangle 3"/>
           <p:cNvSpPr/>
           <p:nvPr/>
         </p:nvSpPr>
         <p:spPr>
           <a:xfrm>
-            <a:off x="502920" y="4750000"/>
-            <a:ext cx="10800000" cy="900000"/>
+            <a:off x="502920" y="1300000"/>
+            <a:ext cx="10800000" cy="1180000"/>
           </a:xfrm>
           <a:prstGeom prst="roundRect">
             <a:avLst>
@@ -9426,19 +10523,21 @@
         <p:txBody>
           <a:bodyPr rtlCol="0" anchor="ctr"/>
           <a:lstStyle/>
-          <a:p/>
-        </p:txBody>
-      </p:sp>
-      <p:sp>
-        <p:nvSpPr>
-          <p:cNvPr id="13" name="TextBox 12"/>
+          <a:p>
+            <a:endParaRPr/>
+          </a:p>
+        </p:txBody>
+      </p:sp>
+      <p:sp>
+        <p:nvSpPr>
+          <p:cNvPr id="5" name="TextBox 4"/>
           <p:cNvSpPr txBox="1"/>
           <p:nvPr/>
         </p:nvSpPr>
         <p:spPr>
           <a:xfrm>
-            <a:off x="700000" y="4930000"/>
-            <a:ext cx="10400000" cy="700000"/>
+            <a:off x="700000" y="1450000"/>
+            <a:ext cx="10400000" cy="350000"/>
           </a:xfrm>
           <a:prstGeom prst="rect">
             <a:avLst/>
@@ -9457,27 +10556,27 @@
               </a:spcAft>
             </a:pPr>
             <a:r>
-              <a:rPr sz="1400" b="0">
+              <a:rPr sz="1600" b="1">
                 <a:solidFill>
                   <a:srgbClr val="1E2761"/>
                 </a:solidFill>
                 <a:latin typeface="Calibri"/>
               </a:rPr>
-              <a:t>Skew and leakage are especially important. They can make a model look good during training but perform poorly when it is used.</a:t>
-            </a:r>
-          </a:p>
-        </p:txBody>
-      </p:sp>
-      <p:sp>
-        <p:nvSpPr>
-          <p:cNvPr id="14" name="TextBox 13"/>
+              <a:t>Feature group</a:t>
+            </a:r>
+          </a:p>
+        </p:txBody>
+      </p:sp>
+      <p:sp>
+        <p:nvSpPr>
+          <p:cNvPr id="6" name="TextBox 5"/>
           <p:cNvSpPr txBox="1"/>
           <p:nvPr/>
         </p:nvSpPr>
         <p:spPr>
           <a:xfrm>
-            <a:off x="502920" y="6510528"/>
-            <a:ext cx="4572000" cy="274320"/>
+            <a:off x="700000" y="1820000"/>
+            <a:ext cx="10400000" cy="420000"/>
           </a:xfrm>
           <a:prstGeom prst="rect">
             <a:avLst/>
@@ -9496,6 +10595,417 @@
               </a:spcAft>
             </a:pPr>
             <a:r>
+              <a:rPr sz="1400" b="0">
+                <a:solidFill>
+                  <a:srgbClr val="44506B"/>
+                </a:solidFill>
+                <a:latin typeface="Calibri"/>
+              </a:rPr>
+              <a:t>Related features from one source. It has a schema, a primary key and an event-time column. In your project: feat__daily.</a:t>
+            </a:r>
+          </a:p>
+        </p:txBody>
+      </p:sp>
+      <p:sp>
+        <p:nvSpPr>
+          <p:cNvPr id="7" name="Rounded Rectangle 6"/>
+          <p:cNvSpPr/>
+          <p:nvPr/>
+        </p:nvSpPr>
+        <p:spPr>
+          <a:xfrm>
+            <a:off x="502920" y="2560000"/>
+            <a:ext cx="10800000" cy="1180000"/>
+          </a:xfrm>
+          <a:prstGeom prst="roundRect">
+            <a:avLst>
+              <a:gd name="adj" fmla="val 6000"/>
+            </a:avLst>
+          </a:prstGeom>
+          <a:solidFill>
+            <a:srgbClr val="FFFFFF"/>
+          </a:solidFill>
+          <a:ln>
+            <a:noFill/>
+          </a:ln>
+          <a:effectLst/>
+        </p:spPr>
+        <p:style>
+          <a:lnRef idx="1">
+            <a:schemeClr val="accent1"/>
+          </a:lnRef>
+          <a:fillRef idx="3">
+            <a:schemeClr val="accent1"/>
+          </a:fillRef>
+          <a:effectRef idx="2">
+            <a:schemeClr val="accent1"/>
+          </a:effectRef>
+          <a:fontRef idx="minor">
+            <a:schemeClr val="lt1"/>
+          </a:fontRef>
+        </p:style>
+        <p:txBody>
+          <a:bodyPr rtlCol="0" anchor="ctr"/>
+          <a:lstStyle/>
+          <a:p>
+            <a:endParaRPr/>
+          </a:p>
+        </p:txBody>
+      </p:sp>
+      <p:sp>
+        <p:nvSpPr>
+          <p:cNvPr id="8" name="TextBox 7"/>
+          <p:cNvSpPr txBox="1"/>
+          <p:nvPr/>
+        </p:nvSpPr>
+        <p:spPr>
+          <a:xfrm>
+            <a:off x="700000" y="2710000"/>
+            <a:ext cx="10400000" cy="350000"/>
+          </a:xfrm>
+          <a:prstGeom prst="rect">
+            <a:avLst/>
+          </a:prstGeom>
+          <a:noFill/>
+        </p:spPr>
+        <p:txBody>
+          <a:bodyPr wrap="square" lIns="0" tIns="0" rIns="0" bIns="0">
+            <a:spAutoFit/>
+          </a:bodyPr>
+          <a:lstStyle/>
+          <a:p>
+            <a:pPr algn="l">
+              <a:spcAft>
+                <a:spcPts val="0"/>
+              </a:spcAft>
+            </a:pPr>
+            <a:r>
+              <a:rPr sz="1600" b="1">
+                <a:solidFill>
+                  <a:srgbClr val="1E2761"/>
+                </a:solidFill>
+                <a:latin typeface="Calibri"/>
+              </a:rPr>
+              <a:t>Feature view</a:t>
+            </a:r>
+          </a:p>
+        </p:txBody>
+      </p:sp>
+      <p:sp>
+        <p:nvSpPr>
+          <p:cNvPr id="9" name="TextBox 8"/>
+          <p:cNvSpPr txBox="1"/>
+          <p:nvPr/>
+        </p:nvSpPr>
+        <p:spPr>
+          <a:xfrm>
+            <a:off x="700000" y="3080000"/>
+            <a:ext cx="10400000" cy="420000"/>
+          </a:xfrm>
+          <a:prstGeom prst="rect">
+            <a:avLst/>
+          </a:prstGeom>
+          <a:noFill/>
+        </p:spPr>
+        <p:txBody>
+          <a:bodyPr wrap="square" lIns="0" tIns="0" rIns="0" bIns="0">
+            <a:spAutoFit/>
+          </a:bodyPr>
+          <a:lstStyle/>
+          <a:p>
+            <a:pPr algn="l">
+              <a:spcAft>
+                <a:spcPts val="0"/>
+              </a:spcAft>
+            </a:pPr>
+            <a:r>
+              <a:rPr sz="1400" b="0">
+                <a:solidFill>
+                  <a:srgbClr val="44506B"/>
+                </a:solidFill>
+                <a:latin typeface="Calibri"/>
+              </a:rPr>
+              <a:t>A named selection of features for one model. In your project: the query that selects the columns used for training.</a:t>
+            </a:r>
+          </a:p>
+        </p:txBody>
+      </p:sp>
+      <p:sp>
+        <p:nvSpPr>
+          <p:cNvPr id="10" name="Rounded Rectangle 9"/>
+          <p:cNvSpPr/>
+          <p:nvPr/>
+        </p:nvSpPr>
+        <p:spPr>
+          <a:xfrm>
+            <a:off x="502920" y="3820000"/>
+            <a:ext cx="10800000" cy="1180000"/>
+          </a:xfrm>
+          <a:prstGeom prst="roundRect">
+            <a:avLst>
+              <a:gd name="adj" fmla="val 6000"/>
+            </a:avLst>
+          </a:prstGeom>
+          <a:solidFill>
+            <a:srgbClr val="FFFFFF"/>
+          </a:solidFill>
+          <a:ln>
+            <a:noFill/>
+          </a:ln>
+          <a:effectLst/>
+        </p:spPr>
+        <p:style>
+          <a:lnRef idx="1">
+            <a:schemeClr val="accent1"/>
+          </a:lnRef>
+          <a:fillRef idx="3">
+            <a:schemeClr val="accent1"/>
+          </a:fillRef>
+          <a:effectRef idx="2">
+            <a:schemeClr val="accent1"/>
+          </a:effectRef>
+          <a:fontRef idx="minor">
+            <a:schemeClr val="lt1"/>
+          </a:fontRef>
+        </p:style>
+        <p:txBody>
+          <a:bodyPr rtlCol="0" anchor="ctr"/>
+          <a:lstStyle/>
+          <a:p>
+            <a:endParaRPr/>
+          </a:p>
+        </p:txBody>
+      </p:sp>
+      <p:sp>
+        <p:nvSpPr>
+          <p:cNvPr id="11" name="TextBox 10"/>
+          <p:cNvSpPr txBox="1"/>
+          <p:nvPr/>
+        </p:nvSpPr>
+        <p:spPr>
+          <a:xfrm>
+            <a:off x="700000" y="3970000"/>
+            <a:ext cx="10400000" cy="350000"/>
+          </a:xfrm>
+          <a:prstGeom prst="rect">
+            <a:avLst/>
+          </a:prstGeom>
+          <a:noFill/>
+        </p:spPr>
+        <p:txBody>
+          <a:bodyPr wrap="square" lIns="0" tIns="0" rIns="0" bIns="0">
+            <a:spAutoFit/>
+          </a:bodyPr>
+          <a:lstStyle/>
+          <a:p>
+            <a:pPr algn="l">
+              <a:spcAft>
+                <a:spcPts val="0"/>
+              </a:spcAft>
+            </a:pPr>
+            <a:r>
+              <a:rPr sz="1600" b="1">
+                <a:solidFill>
+                  <a:srgbClr val="1E2761"/>
+                </a:solidFill>
+                <a:latin typeface="Calibri"/>
+              </a:rPr>
+              <a:t>Training dataset</a:t>
+            </a:r>
+          </a:p>
+        </p:txBody>
+      </p:sp>
+      <p:sp>
+        <p:nvSpPr>
+          <p:cNvPr id="12" name="TextBox 11"/>
+          <p:cNvSpPr txBox="1"/>
+          <p:nvPr/>
+        </p:nvSpPr>
+        <p:spPr>
+          <a:xfrm>
+            <a:off x="700000" y="4340000"/>
+            <a:ext cx="10400000" cy="420000"/>
+          </a:xfrm>
+          <a:prstGeom prst="rect">
+            <a:avLst/>
+          </a:prstGeom>
+          <a:noFill/>
+        </p:spPr>
+        <p:txBody>
+          <a:bodyPr wrap="square" lIns="0" tIns="0" rIns="0" bIns="0">
+            <a:spAutoFit/>
+          </a:bodyPr>
+          <a:lstStyle/>
+          <a:p>
+            <a:pPr algn="l">
+              <a:spcAft>
+                <a:spcPts val="0"/>
+              </a:spcAft>
+            </a:pPr>
+            <a:r>
+              <a:rPr sz="1400" b="0">
+                <a:solidFill>
+                  <a:srgbClr val="44506B"/>
+                </a:solidFill>
+                <a:latin typeface="Calibri"/>
+              </a:rPr>
+              <a:t>A saved version of the selected data, so a training run can be repeated. In your project: the DataFrame used in one run.</a:t>
+            </a:r>
+          </a:p>
+        </p:txBody>
+      </p:sp>
+      <p:sp>
+        <p:nvSpPr>
+          <p:cNvPr id="13" name="Rounded Rectangle 12"/>
+          <p:cNvSpPr/>
+          <p:nvPr/>
+        </p:nvSpPr>
+        <p:spPr>
+          <a:xfrm>
+            <a:off x="502920" y="5080000"/>
+            <a:ext cx="10800000" cy="1180000"/>
+          </a:xfrm>
+          <a:prstGeom prst="roundRect">
+            <a:avLst>
+              <a:gd name="adj" fmla="val 6000"/>
+            </a:avLst>
+          </a:prstGeom>
+          <a:solidFill>
+            <a:srgbClr val="FFFFFF"/>
+          </a:solidFill>
+          <a:ln>
+            <a:noFill/>
+          </a:ln>
+          <a:effectLst/>
+        </p:spPr>
+        <p:style>
+          <a:lnRef idx="1">
+            <a:schemeClr val="accent1"/>
+          </a:lnRef>
+          <a:fillRef idx="3">
+            <a:schemeClr val="accent1"/>
+          </a:fillRef>
+          <a:effectRef idx="2">
+            <a:schemeClr val="accent1"/>
+          </a:effectRef>
+          <a:fontRef idx="minor">
+            <a:schemeClr val="lt1"/>
+          </a:fontRef>
+        </p:style>
+        <p:txBody>
+          <a:bodyPr rtlCol="0" anchor="ctr"/>
+          <a:lstStyle/>
+          <a:p>
+            <a:endParaRPr/>
+          </a:p>
+        </p:txBody>
+      </p:sp>
+      <p:sp>
+        <p:nvSpPr>
+          <p:cNvPr id="14" name="TextBox 13"/>
+          <p:cNvSpPr txBox="1"/>
+          <p:nvPr/>
+        </p:nvSpPr>
+        <p:spPr>
+          <a:xfrm>
+            <a:off x="700000" y="5230000"/>
+            <a:ext cx="10400000" cy="350000"/>
+          </a:xfrm>
+          <a:prstGeom prst="rect">
+            <a:avLst/>
+          </a:prstGeom>
+          <a:noFill/>
+        </p:spPr>
+        <p:txBody>
+          <a:bodyPr wrap="square" lIns="0" tIns="0" rIns="0" bIns="0">
+            <a:spAutoFit/>
+          </a:bodyPr>
+          <a:lstStyle/>
+          <a:p>
+            <a:pPr algn="l">
+              <a:spcAft>
+                <a:spcPts val="0"/>
+              </a:spcAft>
+            </a:pPr>
+            <a:r>
+              <a:rPr sz="1600" b="1">
+                <a:solidFill>
+                  <a:srgbClr val="1E2761"/>
+                </a:solidFill>
+                <a:latin typeface="Calibri"/>
+              </a:rPr>
+              <a:t>Online store</a:t>
+            </a:r>
+          </a:p>
+        </p:txBody>
+      </p:sp>
+      <p:sp>
+        <p:nvSpPr>
+          <p:cNvPr id="15" name="TextBox 14"/>
+          <p:cNvSpPr txBox="1"/>
+          <p:nvPr/>
+        </p:nvSpPr>
+        <p:spPr>
+          <a:xfrm>
+            <a:off x="700000" y="5600000"/>
+            <a:ext cx="10400000" cy="420000"/>
+          </a:xfrm>
+          <a:prstGeom prst="rect">
+            <a:avLst/>
+          </a:prstGeom>
+          <a:noFill/>
+        </p:spPr>
+        <p:txBody>
+          <a:bodyPr wrap="square" lIns="0" tIns="0" rIns="0" bIns="0">
+            <a:spAutoFit/>
+          </a:bodyPr>
+          <a:lstStyle/>
+          <a:p>
+            <a:pPr algn="l">
+              <a:spcAft>
+                <a:spcPts val="0"/>
+              </a:spcAft>
+            </a:pPr>
+            <a:r>
+              <a:rPr sz="1400" b="0">
+                <a:solidFill>
+                  <a:srgbClr val="44506B"/>
+                </a:solidFill>
+                <a:latin typeface="Calibri"/>
+              </a:rPr>
+              <a:t>Current feature values organised for fast lookup when an API makes one prediction. You do not need a separate one in this project.</a:t>
+            </a:r>
+          </a:p>
+        </p:txBody>
+      </p:sp>
+      <p:sp>
+        <p:nvSpPr>
+          <p:cNvPr id="16" name="TextBox 15"/>
+          <p:cNvSpPr txBox="1"/>
+          <p:nvPr/>
+        </p:nvSpPr>
+        <p:spPr>
+          <a:xfrm>
+            <a:off x="502920" y="6510528"/>
+            <a:ext cx="4572000" cy="274320"/>
+          </a:xfrm>
+          <a:prstGeom prst="rect">
+            <a:avLst/>
+          </a:prstGeom>
+          <a:noFill/>
+        </p:spPr>
+        <p:txBody>
+          <a:bodyPr wrap="square" lIns="0" tIns="0" rIns="0" bIns="0">
+            <a:spAutoFit/>
+          </a:bodyPr>
+          <a:lstStyle/>
+          <a:p>
+            <a:pPr algn="l">
+              <a:spcAft>
+                <a:spcPts val="0"/>
+              </a:spcAft>
+            </a:pPr>
+            <a:r>
               <a:rPr sz="900" b="0">
                 <a:solidFill>
                   <a:srgbClr val="9AA6C4"/>
@@ -9509,7 +11019,7 @@
       </p:sp>
       <p:sp>
         <p:nvSpPr>
-          <p:cNvPr id="15" name="TextBox 14"/>
+          <p:cNvPr id="17" name="TextBox 16"/>
           <p:cNvSpPr txBox="1"/>
           <p:nvPr/>
         </p:nvSpPr>
@@ -9541,7 +11051,7 @@
                 </a:solidFill>
                 <a:latin typeface="Calibri"/>
               </a:rPr>
-              <a:t>3</a:t>
+              <a:t>5</a:t>
             </a:r>
           </a:p>
         </p:txBody>
@@ -9554,8 +11064,931 @@
 </p:sld>
 </file>
 
-<file path=ppt/slides/slide4.xml><?xml version="1.0" encoding="utf-8"?>
-<p:sld xmlns:a="http://schemas.openxmlformats.org/drawingml/2006/main" xmlns:p="http://schemas.openxmlformats.org/presentationml/2006/main" xmlns:r="http://schemas.openxmlformats.org/officeDocument/2006/relationships">
+<file path=ppt/slides/slide6.xml><?xml version="1.0" encoding="utf-8"?>
+<p:sld xmlns:a="http://schemas.openxmlformats.org/drawingml/2006/main" xmlns:r="http://schemas.openxmlformats.org/officeDocument/2006/relationships" xmlns:p="http://schemas.openxmlformats.org/presentationml/2006/main">
+  <p:cSld>
+    <p:bg>
+      <p:bgPr>
+        <a:solidFill>
+          <a:srgbClr val="F1F5FC"/>
+        </a:solidFill>
+        <a:effectLst/>
+      </p:bgPr>
+    </p:bg>
+    <p:spTree>
+      <p:nvGrpSpPr>
+        <p:cNvPr id="1" name=""/>
+        <p:cNvGrpSpPr/>
+        <p:nvPr/>
+      </p:nvGrpSpPr>
+      <p:grpSpPr>
+        <a:xfrm>
+          <a:off x="0" y="0"/>
+          <a:ext cx="0" cy="0"/>
+          <a:chOff x="0" y="0"/>
+          <a:chExt cx="0" cy="0"/>
+        </a:xfrm>
+      </p:grpSpPr>
+      <p:sp>
+        <p:nvSpPr>
+          <p:cNvPr id="2" name="TextBox 1"/>
+          <p:cNvSpPr txBox="1"/>
+          <p:nvPr/>
+        </p:nvSpPr>
+        <p:spPr>
+          <a:xfrm>
+            <a:off x="502920" y="300000"/>
+            <a:ext cx="7500000" cy="300000"/>
+          </a:xfrm>
+          <a:prstGeom prst="rect">
+            <a:avLst/>
+          </a:prstGeom>
+          <a:noFill/>
+        </p:spPr>
+        <p:txBody>
+          <a:bodyPr wrap="square" lIns="0" tIns="0" rIns="0" bIns="0">
+            <a:spAutoFit/>
+          </a:bodyPr>
+          <a:lstStyle/>
+          <a:p>
+            <a:pPr algn="l">
+              <a:spcAft>
+                <a:spcPts val="0"/>
+              </a:spcAft>
+            </a:pPr>
+            <a:r>
+              <a:rPr sz="1200" b="1">
+                <a:solidFill>
+                  <a:srgbClr val="F2994A"/>
+                </a:solidFill>
+                <a:latin typeface="Calibri"/>
+              </a:rPr>
+              <a:t>OFFLINE AND ONLINE</a:t>
+            </a:r>
+          </a:p>
+        </p:txBody>
+      </p:sp>
+      <p:sp>
+        <p:nvSpPr>
+          <p:cNvPr id="3" name="TextBox 2"/>
+          <p:cNvSpPr txBox="1"/>
+          <p:nvPr/>
+        </p:nvSpPr>
+        <p:spPr>
+          <a:xfrm>
+            <a:off x="502920" y="560000"/>
+            <a:ext cx="10800000" cy="700000"/>
+          </a:xfrm>
+          <a:prstGeom prst="rect">
+            <a:avLst/>
+          </a:prstGeom>
+          <a:noFill/>
+        </p:spPr>
+        <p:txBody>
+          <a:bodyPr wrap="square" lIns="0" tIns="0" rIns="0" bIns="0">
+            <a:spAutoFit/>
+          </a:bodyPr>
+          <a:lstStyle/>
+          <a:p>
+            <a:pPr algn="l">
+              <a:spcAft>
+                <a:spcPts val="0"/>
+              </a:spcAft>
+            </a:pPr>
+            <a:r>
+              <a:rPr sz="2600" b="1">
+                <a:solidFill>
+                  <a:srgbClr val="1E2761"/>
+                </a:solidFill>
+                <a:latin typeface="Calibri"/>
+              </a:rPr>
+              <a:t>The same features can be used in two different ways</a:t>
+            </a:r>
+          </a:p>
+        </p:txBody>
+      </p:sp>
+      <p:sp>
+        <p:nvSpPr>
+          <p:cNvPr id="4" name="Rounded Rectangle 3"/>
+          <p:cNvSpPr/>
+          <p:nvPr/>
+        </p:nvSpPr>
+        <p:spPr>
+          <a:xfrm>
+            <a:off x="502920" y="1450000"/>
+            <a:ext cx="5150000" cy="4100000"/>
+          </a:xfrm>
+          <a:prstGeom prst="roundRect">
+            <a:avLst>
+              <a:gd name="adj" fmla="val 6000"/>
+            </a:avLst>
+          </a:prstGeom>
+          <a:solidFill>
+            <a:srgbClr val="FFFFFF"/>
+          </a:solidFill>
+          <a:ln>
+            <a:noFill/>
+          </a:ln>
+          <a:effectLst/>
+        </p:spPr>
+        <p:style>
+          <a:lnRef idx="1">
+            <a:schemeClr val="accent1"/>
+          </a:lnRef>
+          <a:fillRef idx="3">
+            <a:schemeClr val="accent1"/>
+          </a:fillRef>
+          <a:effectRef idx="2">
+            <a:schemeClr val="accent1"/>
+          </a:effectRef>
+          <a:fontRef idx="minor">
+            <a:schemeClr val="lt1"/>
+          </a:fontRef>
+        </p:style>
+        <p:txBody>
+          <a:bodyPr rtlCol="0" anchor="ctr"/>
+          <a:lstStyle/>
+          <a:p>
+            <a:endParaRPr/>
+          </a:p>
+        </p:txBody>
+      </p:sp>
+      <p:sp>
+        <p:nvSpPr>
+          <p:cNvPr id="5" name="TextBox 4"/>
+          <p:cNvSpPr txBox="1"/>
+          <p:nvPr/>
+        </p:nvSpPr>
+        <p:spPr>
+          <a:xfrm>
+            <a:off x="702920" y="1620000"/>
+            <a:ext cx="4750000" cy="400000"/>
+          </a:xfrm>
+          <a:prstGeom prst="rect">
+            <a:avLst/>
+          </a:prstGeom>
+          <a:noFill/>
+        </p:spPr>
+        <p:txBody>
+          <a:bodyPr wrap="square" lIns="0" tIns="0" rIns="0" bIns="0">
+            <a:spAutoFit/>
+          </a:bodyPr>
+          <a:lstStyle/>
+          <a:p>
+            <a:pPr algn="l">
+              <a:spcAft>
+                <a:spcPts val="0"/>
+              </a:spcAft>
+            </a:pPr>
+            <a:r>
+              <a:rPr sz="1600" b="1">
+                <a:solidFill>
+                  <a:srgbClr val="1E2761"/>
+                </a:solidFill>
+                <a:latin typeface="Calibri"/>
+              </a:rPr>
+              <a:t>Offline store</a:t>
+            </a:r>
+          </a:p>
+        </p:txBody>
+      </p:sp>
+      <p:sp>
+        <p:nvSpPr>
+          <p:cNvPr id="6" name="TextBox 5"/>
+          <p:cNvSpPr txBox="1"/>
+          <p:nvPr/>
+        </p:nvSpPr>
+        <p:spPr>
+          <a:xfrm>
+            <a:off x="702920" y="2100000"/>
+            <a:ext cx="4750000" cy="3300000"/>
+          </a:xfrm>
+          <a:prstGeom prst="rect">
+            <a:avLst/>
+          </a:prstGeom>
+          <a:noFill/>
+        </p:spPr>
+        <p:txBody>
+          <a:bodyPr wrap="square" lIns="0" tIns="0" rIns="0" bIns="0">
+            <a:spAutoFit/>
+          </a:bodyPr>
+          <a:lstStyle/>
+          <a:p>
+            <a:pPr algn="l">
+              <a:spcAft>
+                <a:spcPts val="200"/>
+              </a:spcAft>
+            </a:pPr>
+            <a:r>
+              <a:rPr sz="1400" b="0">
+                <a:solidFill>
+                  <a:srgbClr val="44506B"/>
+                </a:solidFill>
+                <a:latin typeface="Calibri"/>
+              </a:rPr>
+              <a:t>•  Historical data with many rows.</a:t>
+            </a:r>
+          </a:p>
+          <a:p>
+            <a:pPr algn="l">
+              <a:spcAft>
+                <a:spcPts val="200"/>
+              </a:spcAft>
+            </a:pPr>
+            <a:endParaRPr sz="1400" b="0">
+              <a:solidFill>
+                <a:srgbClr val="44506B"/>
+              </a:solidFill>
+              <a:latin typeface="Calibri"/>
+            </a:endParaRPr>
+          </a:p>
+          <a:p>
+            <a:pPr algn="l">
+              <a:spcAft>
+                <a:spcPts val="200"/>
+              </a:spcAft>
+            </a:pPr>
+            <a:r>
+              <a:rPr sz="1400" b="0">
+                <a:solidFill>
+                  <a:srgbClr val="44506B"/>
+                </a:solidFill>
+                <a:latin typeface="Calibri"/>
+              </a:rPr>
+              <a:t>•  Question: give me all rows for training from a period.</a:t>
+            </a:r>
+          </a:p>
+          <a:p>
+            <a:pPr algn="l">
+              <a:spcAft>
+                <a:spcPts val="200"/>
+              </a:spcAft>
+            </a:pPr>
+            <a:endParaRPr sz="1400" b="0">
+              <a:solidFill>
+                <a:srgbClr val="44506B"/>
+              </a:solidFill>
+              <a:latin typeface="Calibri"/>
+            </a:endParaRPr>
+          </a:p>
+          <a:p>
+            <a:pPr algn="l">
+              <a:spcAft>
+                <a:spcPts val="200"/>
+              </a:spcAft>
+            </a:pPr>
+            <a:r>
+              <a:rPr sz="1400" b="0">
+                <a:solidFill>
+                  <a:srgbClr val="44506B"/>
+                </a:solidFill>
+                <a:latin typeface="Calibri"/>
+              </a:rPr>
+              <a:t>•  Used for training and historical rebuilds.</a:t>
+            </a:r>
+          </a:p>
+          <a:p>
+            <a:pPr algn="l">
+              <a:spcAft>
+                <a:spcPts val="200"/>
+              </a:spcAft>
+            </a:pPr>
+            <a:endParaRPr sz="1400" b="0">
+              <a:solidFill>
+                <a:srgbClr val="44506B"/>
+              </a:solidFill>
+              <a:latin typeface="Calibri"/>
+            </a:endParaRPr>
+          </a:p>
+          <a:p>
+            <a:pPr algn="l">
+              <a:spcAft>
+                <a:spcPts val="200"/>
+              </a:spcAft>
+            </a:pPr>
+            <a:r>
+              <a:rPr sz="1400" b="0">
+                <a:solidFill>
+                  <a:srgbClr val="44506B"/>
+                </a:solidFill>
+                <a:latin typeface="Calibri"/>
+              </a:rPr>
+              <a:t>•  Your project: Postgres feat__daily.</a:t>
+            </a:r>
+          </a:p>
+          <a:p>
+            <a:pPr algn="l">
+              <a:spcAft>
+                <a:spcPts val="200"/>
+              </a:spcAft>
+            </a:pPr>
+            <a:endParaRPr sz="1400" b="0">
+              <a:solidFill>
+                <a:srgbClr val="44506B"/>
+              </a:solidFill>
+              <a:latin typeface="Calibri"/>
+            </a:endParaRPr>
+          </a:p>
+          <a:p>
+            <a:pPr algn="l">
+              <a:spcAft>
+                <a:spcPts val="200"/>
+              </a:spcAft>
+            </a:pPr>
+            <a:r>
+              <a:rPr sz="1400" b="0">
+                <a:solidFill>
+                  <a:srgbClr val="44506B"/>
+                </a:solidFill>
+                <a:latin typeface="Calibri"/>
+              </a:rPr>
+              <a:t>•  A query can take seconds.</a:t>
+            </a:r>
+          </a:p>
+          <a:p>
+            <a:pPr algn="l">
+              <a:spcAft>
+                <a:spcPts val="200"/>
+              </a:spcAft>
+            </a:pPr>
+            <a:endParaRPr sz="1400" b="0">
+              <a:solidFill>
+                <a:srgbClr val="44506B"/>
+              </a:solidFill>
+              <a:latin typeface="Calibri"/>
+            </a:endParaRPr>
+          </a:p>
+        </p:txBody>
+      </p:sp>
+      <p:sp>
+        <p:nvSpPr>
+          <p:cNvPr id="7" name="Rounded Rectangle 6"/>
+          <p:cNvSpPr/>
+          <p:nvPr/>
+        </p:nvSpPr>
+        <p:spPr>
+          <a:xfrm>
+            <a:off x="6152920" y="1450000"/>
+            <a:ext cx="5150000" cy="4100000"/>
+          </a:xfrm>
+          <a:prstGeom prst="roundRect">
+            <a:avLst>
+              <a:gd name="adj" fmla="val 6000"/>
+            </a:avLst>
+          </a:prstGeom>
+          <a:solidFill>
+            <a:srgbClr val="FFFFFF"/>
+          </a:solidFill>
+          <a:ln>
+            <a:noFill/>
+          </a:ln>
+          <a:effectLst/>
+        </p:spPr>
+        <p:style>
+          <a:lnRef idx="1">
+            <a:schemeClr val="accent1"/>
+          </a:lnRef>
+          <a:fillRef idx="3">
+            <a:schemeClr val="accent1"/>
+          </a:fillRef>
+          <a:effectRef idx="2">
+            <a:schemeClr val="accent1"/>
+          </a:effectRef>
+          <a:fontRef idx="minor">
+            <a:schemeClr val="lt1"/>
+          </a:fontRef>
+        </p:style>
+        <p:txBody>
+          <a:bodyPr rtlCol="0" anchor="ctr"/>
+          <a:lstStyle/>
+          <a:p>
+            <a:endParaRPr/>
+          </a:p>
+        </p:txBody>
+      </p:sp>
+      <p:sp>
+        <p:nvSpPr>
+          <p:cNvPr id="8" name="TextBox 7"/>
+          <p:cNvSpPr txBox="1"/>
+          <p:nvPr/>
+        </p:nvSpPr>
+        <p:spPr>
+          <a:xfrm>
+            <a:off x="6352920" y="1620000"/>
+            <a:ext cx="4750000" cy="400000"/>
+          </a:xfrm>
+          <a:prstGeom prst="rect">
+            <a:avLst/>
+          </a:prstGeom>
+          <a:noFill/>
+        </p:spPr>
+        <p:txBody>
+          <a:bodyPr wrap="square" lIns="0" tIns="0" rIns="0" bIns="0">
+            <a:spAutoFit/>
+          </a:bodyPr>
+          <a:lstStyle/>
+          <a:p>
+            <a:pPr algn="l">
+              <a:spcAft>
+                <a:spcPts val="0"/>
+              </a:spcAft>
+            </a:pPr>
+            <a:r>
+              <a:rPr sz="1600" b="1">
+                <a:solidFill>
+                  <a:srgbClr val="1E2761"/>
+                </a:solidFill>
+                <a:latin typeface="Calibri"/>
+              </a:rPr>
+              <a:t>Online store</a:t>
+            </a:r>
+          </a:p>
+        </p:txBody>
+      </p:sp>
+      <p:sp>
+        <p:nvSpPr>
+          <p:cNvPr id="9" name="TextBox 8"/>
+          <p:cNvSpPr txBox="1"/>
+          <p:nvPr/>
+        </p:nvSpPr>
+        <p:spPr>
+          <a:xfrm>
+            <a:off x="6352920" y="2100000"/>
+            <a:ext cx="4750000" cy="3300000"/>
+          </a:xfrm>
+          <a:prstGeom prst="rect">
+            <a:avLst/>
+          </a:prstGeom>
+          <a:noFill/>
+        </p:spPr>
+        <p:txBody>
+          <a:bodyPr wrap="square" lIns="0" tIns="0" rIns="0" bIns="0">
+            <a:spAutoFit/>
+          </a:bodyPr>
+          <a:lstStyle/>
+          <a:p>
+            <a:pPr algn="l">
+              <a:spcAft>
+                <a:spcPts val="200"/>
+              </a:spcAft>
+            </a:pPr>
+            <a:r>
+              <a:rPr sz="1400" b="0">
+                <a:solidFill>
+                  <a:srgbClr val="44506B"/>
+                </a:solidFill>
+                <a:latin typeface="Calibri"/>
+              </a:rPr>
+              <a:t>•  Current data for one entity at a time.</a:t>
+            </a:r>
+          </a:p>
+          <a:p>
+            <a:pPr algn="l">
+              <a:spcAft>
+                <a:spcPts val="200"/>
+              </a:spcAft>
+            </a:pPr>
+            <a:endParaRPr sz="1400" b="0">
+              <a:solidFill>
+                <a:srgbClr val="44506B"/>
+              </a:solidFill>
+              <a:latin typeface="Calibri"/>
+            </a:endParaRPr>
+          </a:p>
+          <a:p>
+            <a:pPr algn="l">
+              <a:spcAft>
+                <a:spcPts val="200"/>
+              </a:spcAft>
+            </a:pPr>
+            <a:r>
+              <a:rPr sz="1400" b="0">
+                <a:solidFill>
+                  <a:srgbClr val="44506B"/>
+                </a:solidFill>
+                <a:latin typeface="Calibri"/>
+              </a:rPr>
+              <a:t>•  Question: what are the latest features for SE3?</a:t>
+            </a:r>
+          </a:p>
+          <a:p>
+            <a:pPr algn="l">
+              <a:spcAft>
+                <a:spcPts val="200"/>
+              </a:spcAft>
+            </a:pPr>
+            <a:endParaRPr sz="1400" b="0">
+              <a:solidFill>
+                <a:srgbClr val="44506B"/>
+              </a:solidFill>
+              <a:latin typeface="Calibri"/>
+            </a:endParaRPr>
+          </a:p>
+          <a:p>
+            <a:pPr algn="l">
+              <a:spcAft>
+                <a:spcPts val="200"/>
+              </a:spcAft>
+            </a:pPr>
+            <a:r>
+              <a:rPr sz="1400" b="0">
+                <a:solidFill>
+                  <a:srgbClr val="44506B"/>
+                </a:solidFill>
+                <a:latin typeface="Calibri"/>
+              </a:rPr>
+              <a:t>•  Used when an API makes a prediction.</a:t>
+            </a:r>
+          </a:p>
+          <a:p>
+            <a:pPr algn="l">
+              <a:spcAft>
+                <a:spcPts val="200"/>
+              </a:spcAft>
+            </a:pPr>
+            <a:endParaRPr sz="1400" b="0">
+              <a:solidFill>
+                <a:srgbClr val="44506B"/>
+              </a:solidFill>
+              <a:latin typeface="Calibri"/>
+            </a:endParaRPr>
+          </a:p>
+          <a:p>
+            <a:pPr algn="l">
+              <a:spcAft>
+                <a:spcPts val="200"/>
+              </a:spcAft>
+            </a:pPr>
+            <a:r>
+              <a:rPr sz="1400" b="0">
+                <a:solidFill>
+                  <a:srgbClr val="44506B"/>
+                </a:solidFill>
+                <a:latin typeface="Calibri"/>
+              </a:rPr>
+              <a:t>•  Your project: a normal query against the same table.</a:t>
+            </a:r>
+          </a:p>
+          <a:p>
+            <a:pPr algn="l">
+              <a:spcAft>
+                <a:spcPts val="200"/>
+              </a:spcAft>
+            </a:pPr>
+            <a:endParaRPr sz="1400" b="0">
+              <a:solidFill>
+                <a:srgbClr val="44506B"/>
+              </a:solidFill>
+              <a:latin typeface="Calibri"/>
+            </a:endParaRPr>
+          </a:p>
+          <a:p>
+            <a:pPr algn="l">
+              <a:spcAft>
+                <a:spcPts val="200"/>
+              </a:spcAft>
+            </a:pPr>
+            <a:r>
+              <a:rPr sz="1400" b="0">
+                <a:solidFill>
+                  <a:srgbClr val="44506B"/>
+                </a:solidFill>
+                <a:latin typeface="Calibri"/>
+              </a:rPr>
+              <a:t>•  For a public service, users expect a quick answer.</a:t>
+            </a:r>
+          </a:p>
+          <a:p>
+            <a:pPr algn="l">
+              <a:spcAft>
+                <a:spcPts val="200"/>
+              </a:spcAft>
+            </a:pPr>
+            <a:endParaRPr sz="1400" b="0">
+              <a:solidFill>
+                <a:srgbClr val="44506B"/>
+              </a:solidFill>
+              <a:latin typeface="Calibri"/>
+            </a:endParaRPr>
+          </a:p>
+        </p:txBody>
+      </p:sp>
+      <p:sp>
+        <p:nvSpPr>
+          <p:cNvPr id="10" name="TextBox 9"/>
+          <p:cNvSpPr txBox="1"/>
+          <p:nvPr/>
+        </p:nvSpPr>
+        <p:spPr>
+          <a:xfrm>
+            <a:off x="502920" y="6510528"/>
+            <a:ext cx="4572000" cy="274320"/>
+          </a:xfrm>
+          <a:prstGeom prst="rect">
+            <a:avLst/>
+          </a:prstGeom>
+          <a:noFill/>
+        </p:spPr>
+        <p:txBody>
+          <a:bodyPr wrap="square" lIns="0" tIns="0" rIns="0" bIns="0">
+            <a:spAutoFit/>
+          </a:bodyPr>
+          <a:lstStyle/>
+          <a:p>
+            <a:pPr algn="l">
+              <a:spcAft>
+                <a:spcPts val="0"/>
+              </a:spcAft>
+            </a:pPr>
+            <a:r>
+              <a:rPr sz="900" b="0">
+                <a:solidFill>
+                  <a:srgbClr val="9AA6C4"/>
+                </a:solidFill>
+                <a:latin typeface="Calibri"/>
+              </a:rPr>
+              <a:t>Data engineering och agila metoder · AIM25</a:t>
+            </a:r>
+          </a:p>
+        </p:txBody>
+      </p:sp>
+      <p:sp>
+        <p:nvSpPr>
+          <p:cNvPr id="11" name="TextBox 10"/>
+          <p:cNvSpPr txBox="1"/>
+          <p:nvPr/>
+        </p:nvSpPr>
+        <p:spPr>
+          <a:xfrm>
+            <a:off x="11475720" y="6510528"/>
+            <a:ext cx="548640" cy="274320"/>
+          </a:xfrm>
+          <a:prstGeom prst="rect">
+            <a:avLst/>
+          </a:prstGeom>
+          <a:noFill/>
+        </p:spPr>
+        <p:txBody>
+          <a:bodyPr wrap="square" lIns="0" tIns="0" rIns="0" bIns="0">
+            <a:spAutoFit/>
+          </a:bodyPr>
+          <a:lstStyle/>
+          <a:p>
+            <a:pPr algn="r">
+              <a:spcAft>
+                <a:spcPts val="0"/>
+              </a:spcAft>
+            </a:pPr>
+            <a:r>
+              <a:rPr sz="900" b="0">
+                <a:solidFill>
+                  <a:srgbClr val="9AA6C4"/>
+                </a:solidFill>
+                <a:latin typeface="Calibri"/>
+              </a:rPr>
+              <a:t>6</a:t>
+            </a:r>
+          </a:p>
+        </p:txBody>
+      </p:sp>
+    </p:spTree>
+  </p:cSld>
+  <p:clrMapOvr>
+    <a:masterClrMapping/>
+  </p:clrMapOvr>
+</p:sld>
+</file>
+
+<file path=ppt/slides/slide7.xml><?xml version="1.0" encoding="utf-8"?>
+<p:sld xmlns:a="http://schemas.openxmlformats.org/drawingml/2006/main" xmlns:r="http://schemas.openxmlformats.org/officeDocument/2006/relationships" xmlns:p="http://schemas.openxmlformats.org/presentationml/2006/main">
+  <p:cSld>
+    <p:bg>
+      <p:bgPr>
+        <a:solidFill>
+          <a:srgbClr val="F1F5FC"/>
+        </a:solidFill>
+        <a:effectLst/>
+      </p:bgPr>
+    </p:bg>
+    <p:spTree>
+      <p:nvGrpSpPr>
+        <p:cNvPr id="1" name=""/>
+        <p:cNvGrpSpPr/>
+        <p:nvPr/>
+      </p:nvGrpSpPr>
+      <p:grpSpPr>
+        <a:xfrm>
+          <a:off x="0" y="0"/>
+          <a:ext cx="0" cy="0"/>
+          <a:chOff x="0" y="0"/>
+          <a:chExt cx="0" cy="0"/>
+        </a:xfrm>
+      </p:grpSpPr>
+      <p:sp>
+        <p:nvSpPr>
+          <p:cNvPr id="2" name="TextBox 1"/>
+          <p:cNvSpPr txBox="1"/>
+          <p:nvPr/>
+        </p:nvSpPr>
+        <p:spPr>
+          <a:xfrm>
+            <a:off x="502920" y="300000"/>
+            <a:ext cx="7500000" cy="300000"/>
+          </a:xfrm>
+          <a:prstGeom prst="rect">
+            <a:avLst/>
+          </a:prstGeom>
+          <a:noFill/>
+        </p:spPr>
+        <p:txBody>
+          <a:bodyPr wrap="square" lIns="0" tIns="0" rIns="0" bIns="0">
+            <a:spAutoFit/>
+          </a:bodyPr>
+          <a:lstStyle/>
+          <a:p>
+            <a:pPr algn="l">
+              <a:spcAft>
+                <a:spcPts val="0"/>
+              </a:spcAft>
+            </a:pPr>
+            <a:r>
+              <a:rPr sz="1200" b="1">
+                <a:solidFill>
+                  <a:srgbClr val="F2994A"/>
+                </a:solidFill>
+                <a:latin typeface="Calibri"/>
+              </a:rPr>
+              <a:t>WHY TWO STORES AT ALL</a:t>
+            </a:r>
+          </a:p>
+        </p:txBody>
+      </p:sp>
+      <p:sp>
+        <p:nvSpPr>
+          <p:cNvPr id="3" name="TextBox 2"/>
+          <p:cNvSpPr txBox="1"/>
+          <p:nvPr/>
+        </p:nvSpPr>
+        <p:spPr>
+          <a:xfrm>
+            <a:off x="502920" y="2300000"/>
+            <a:ext cx="11000000" cy="2000000"/>
+          </a:xfrm>
+          <a:prstGeom prst="rect">
+            <a:avLst/>
+          </a:prstGeom>
+          <a:noFill/>
+        </p:spPr>
+        <p:txBody>
+          <a:bodyPr wrap="square" lIns="0" tIns="0" rIns="0" bIns="0">
+            <a:spAutoFit/>
+          </a:bodyPr>
+          <a:lstStyle/>
+          <a:p>
+            <a:pPr algn="l">
+              <a:spcAft>
+                <a:spcPts val="0"/>
+              </a:spcAft>
+            </a:pPr>
+            <a:r>
+              <a:rPr sz="2400" b="1">
+                <a:solidFill>
+                  <a:srgbClr val="1E2761"/>
+                </a:solidFill>
+                <a:latin typeface="Calibri"/>
+              </a:rPr>
+              <a:t>Training needs many historical rows. An API normally needs the current row for one entity.</a:t>
+            </a:r>
+          </a:p>
+        </p:txBody>
+      </p:sp>
+      <p:sp>
+        <p:nvSpPr>
+          <p:cNvPr id="4" name="TextBox 3"/>
+          <p:cNvSpPr txBox="1"/>
+          <p:nvPr/>
+        </p:nvSpPr>
+        <p:spPr>
+          <a:xfrm>
+            <a:off x="502920" y="4400000"/>
+            <a:ext cx="10800000" cy="1200000"/>
+          </a:xfrm>
+          <a:prstGeom prst="rect">
+            <a:avLst/>
+          </a:prstGeom>
+          <a:noFill/>
+        </p:spPr>
+        <p:txBody>
+          <a:bodyPr wrap="square" lIns="0" tIns="0" rIns="0" bIns="0">
+            <a:spAutoFit/>
+          </a:bodyPr>
+          <a:lstStyle/>
+          <a:p>
+            <a:pPr algn="l">
+              <a:spcAft>
+                <a:spcPts val="0"/>
+              </a:spcAft>
+            </a:pPr>
+            <a:r>
+              <a:rPr sz="1500" b="0">
+                <a:solidFill>
+                  <a:srgbClr val="44506B"/>
+                </a:solidFill>
+                <a:latin typeface="Calibri"/>
+              </a:rPr>
+              <a:t>A dedicated feature store keeps the feature definition the same in both cases, even when the data is stored and read in different ways. If feature logic is written separately for training and for the API, the two versions can gradually become different.</a:t>
+            </a:r>
+          </a:p>
+        </p:txBody>
+      </p:sp>
+      <p:sp>
+        <p:nvSpPr>
+          <p:cNvPr id="5" name="TextBox 4"/>
+          <p:cNvSpPr txBox="1"/>
+          <p:nvPr/>
+        </p:nvSpPr>
+        <p:spPr>
+          <a:xfrm>
+            <a:off x="502920" y="6510528"/>
+            <a:ext cx="4572000" cy="274320"/>
+          </a:xfrm>
+          <a:prstGeom prst="rect">
+            <a:avLst/>
+          </a:prstGeom>
+          <a:noFill/>
+        </p:spPr>
+        <p:txBody>
+          <a:bodyPr wrap="square" lIns="0" tIns="0" rIns="0" bIns="0">
+            <a:spAutoFit/>
+          </a:bodyPr>
+          <a:lstStyle/>
+          <a:p>
+            <a:pPr algn="l">
+              <a:spcAft>
+                <a:spcPts val="0"/>
+              </a:spcAft>
+            </a:pPr>
+            <a:r>
+              <a:rPr sz="900" b="0">
+                <a:solidFill>
+                  <a:srgbClr val="9AA6C4"/>
+                </a:solidFill>
+                <a:latin typeface="Calibri"/>
+              </a:rPr>
+              <a:t>Data engineering och agila metoder · AIM25</a:t>
+            </a:r>
+          </a:p>
+        </p:txBody>
+      </p:sp>
+      <p:sp>
+        <p:nvSpPr>
+          <p:cNvPr id="6" name="TextBox 5"/>
+          <p:cNvSpPr txBox="1"/>
+          <p:nvPr/>
+        </p:nvSpPr>
+        <p:spPr>
+          <a:xfrm>
+            <a:off x="11475720" y="6510528"/>
+            <a:ext cx="548640" cy="274320"/>
+          </a:xfrm>
+          <a:prstGeom prst="rect">
+            <a:avLst/>
+          </a:prstGeom>
+          <a:noFill/>
+        </p:spPr>
+        <p:txBody>
+          <a:bodyPr wrap="square" lIns="0" tIns="0" rIns="0" bIns="0">
+            <a:spAutoFit/>
+          </a:bodyPr>
+          <a:lstStyle/>
+          <a:p>
+            <a:pPr algn="r">
+              <a:spcAft>
+                <a:spcPts val="0"/>
+              </a:spcAft>
+            </a:pPr>
+            <a:r>
+              <a:rPr sz="900" b="0">
+                <a:solidFill>
+                  <a:srgbClr val="9AA6C4"/>
+                </a:solidFill>
+                <a:latin typeface="Calibri"/>
+              </a:rPr>
+              <a:t>7</a:t>
+            </a:r>
+          </a:p>
+        </p:txBody>
+      </p:sp>
+    </p:spTree>
+  </p:cSld>
+  <p:clrMapOvr>
+    <a:masterClrMapping/>
+  </p:clrMapOvr>
+</p:sld>
+</file>
+
+<file path=ppt/slides/slide8.xml><?xml version="1.0" encoding="utf-8"?>
+<p:sld xmlns:a="http://schemas.openxmlformats.org/drawingml/2006/main" xmlns:r="http://schemas.openxmlformats.org/officeDocument/2006/relationships" xmlns:p="http://schemas.openxmlformats.org/presentationml/2006/main">
   <p:cSld>
     <p:bg>
       <p:bgPr>
@@ -9571,7 +12004,14 @@
         <p:cNvGrpSpPr/>
         <p:nvPr/>
       </p:nvGrpSpPr>
-      <p:grpSpPr/>
+      <p:grpSpPr>
+        <a:xfrm>
+          <a:off x="0" y="0"/>
+          <a:ext cx="0" cy="0"/>
+          <a:chOff x="0" y="0"/>
+          <a:chExt cx="0" cy="0"/>
+        </a:xfrm>
+      </p:grpSpPr>
       <p:sp>
         <p:nvSpPr>
           <p:cNvPr id="2" name="Oval 1"/>
@@ -9580,8 +12020,8 @@
         </p:nvSpPr>
         <p:spPr>
           <a:xfrm>
-            <a:off x="8808604" y="1341057"/>
-            <a:ext cx="114633" cy="114633"/>
+            <a:off x="9042882" y="1892293"/>
+            <a:ext cx="96112" cy="96112"/>
           </a:xfrm>
           <a:prstGeom prst="ellipse">
             <a:avLst/>
@@ -9613,6 +12053,7 @@
           <a:lstStyle/>
           <a:p>
             <a:pPr algn="ctr"/>
+            <a:endParaRPr/>
           </a:p>
         </p:txBody>
       </p:sp>
@@ -9624,8 +12065,8 @@
         </p:nvSpPr>
         <p:spPr>
           <a:xfrm>
-            <a:off x="9422344" y="536579"/>
-            <a:ext cx="171745" cy="171745"/>
+            <a:off x="9663756" y="1315978"/>
+            <a:ext cx="132323" cy="132323"/>
           </a:xfrm>
           <a:prstGeom prst="ellipse">
             <a:avLst/>
@@ -9657,6 +12098,7 @@
           <a:lstStyle/>
           <a:p>
             <a:pPr algn="ctr"/>
+            <a:endParaRPr/>
           </a:p>
         </p:txBody>
       </p:sp>
@@ -9668,8 +12110,8 @@
         </p:nvSpPr>
         <p:spPr>
           <a:xfrm>
-            <a:off x="9516013" y="690057"/>
-            <a:ext cx="135532" cy="135532"/>
+            <a:off x="9918222" y="1861641"/>
+            <a:ext cx="87150" cy="87150"/>
           </a:xfrm>
           <a:prstGeom prst="ellipse">
             <a:avLst/>
@@ -9701,6 +12143,7 @@
           <a:lstStyle/>
           <a:p>
             <a:pPr algn="ctr"/>
+            <a:endParaRPr/>
           </a:p>
         </p:txBody>
       </p:sp>
@@ -9712,8 +12155,8 @@
         </p:nvSpPr>
         <p:spPr>
           <a:xfrm>
-            <a:off x="10153531" y="1723602"/>
-            <a:ext cx="155689" cy="155689"/>
+            <a:off x="10634863" y="667958"/>
+            <a:ext cx="80860" cy="80860"/>
           </a:xfrm>
           <a:prstGeom prst="ellipse">
             <a:avLst/>
@@ -9745,6 +12188,7 @@
           <a:lstStyle/>
           <a:p>
             <a:pPr algn="ctr"/>
+            <a:endParaRPr/>
           </a:p>
         </p:txBody>
       </p:sp>
@@ -9756,8 +12200,8 @@
         </p:nvSpPr>
         <p:spPr>
           <a:xfrm>
-            <a:off x="9708672" y="1291119"/>
-            <a:ext cx="128181" cy="128181"/>
+            <a:off x="11277591" y="715376"/>
+            <a:ext cx="168544" cy="168544"/>
           </a:xfrm>
           <a:prstGeom prst="ellipse">
             <a:avLst/>
@@ -9789,6 +12233,7 @@
           <a:lstStyle/>
           <a:p>
             <a:pPr algn="ctr"/>
+            <a:endParaRPr/>
           </a:p>
         </p:txBody>
       </p:sp>
@@ -9800,8 +12245,8 @@
         </p:nvSpPr>
         <p:spPr>
           <a:xfrm>
-            <a:off x="11305821" y="1844207"/>
-            <a:ext cx="87847" cy="87847"/>
+            <a:off x="10883466" y="713391"/>
+            <a:ext cx="94587" cy="94587"/>
           </a:xfrm>
           <a:prstGeom prst="ellipse">
             <a:avLst/>
@@ -9833,6 +12278,7 @@
           <a:lstStyle/>
           <a:p>
             <a:pPr algn="ctr"/>
+            <a:endParaRPr/>
           </a:p>
         </p:txBody>
       </p:sp>
@@ -9844,8 +12290,8 @@
         </p:nvSpPr>
         <p:spPr>
           <a:xfrm>
-            <a:off x="11025017" y="1982291"/>
-            <a:ext cx="146110" cy="146110"/>
+            <a:off x="9532936" y="1290058"/>
+            <a:ext cx="87098" cy="87098"/>
           </a:xfrm>
           <a:prstGeom prst="ellipse">
             <a:avLst/>
@@ -9877,6 +12323,7 @@
           <a:lstStyle/>
           <a:p>
             <a:pPr algn="ctr"/>
+            <a:endParaRPr/>
           </a:p>
         </p:txBody>
       </p:sp>
@@ -9888,8 +12335,8 @@
         </p:nvSpPr>
         <p:spPr>
           <a:xfrm>
-            <a:off x="9903211" y="704183"/>
-            <a:ext cx="163812" cy="163812"/>
+            <a:off x="8835770" y="1119520"/>
+            <a:ext cx="112783" cy="112783"/>
           </a:xfrm>
           <a:prstGeom prst="ellipse">
             <a:avLst/>
@@ -9921,6 +12368,7 @@
           <a:lstStyle/>
           <a:p>
             <a:pPr algn="ctr"/>
+            <a:endParaRPr/>
           </a:p>
         </p:txBody>
       </p:sp>
@@ -9932,8 +12380,8 @@
         </p:nvSpPr>
         <p:spPr>
           <a:xfrm>
-            <a:off x="10507516" y="1518591"/>
-            <a:ext cx="172463" cy="172463"/>
+            <a:off x="11121493" y="1827959"/>
+            <a:ext cx="108844" cy="108844"/>
           </a:xfrm>
           <a:prstGeom prst="ellipse">
             <a:avLst/>
@@ -9965,6 +12413,7 @@
           <a:lstStyle/>
           <a:p>
             <a:pPr algn="ctr"/>
+            <a:endParaRPr/>
           </a:p>
         </p:txBody>
       </p:sp>
@@ -9976,8 +12425,8 @@
         </p:nvSpPr>
         <p:spPr>
           <a:xfrm>
-            <a:off x="9512884" y="519628"/>
-            <a:ext cx="89400" cy="89400"/>
+            <a:off x="8863705" y="506151"/>
+            <a:ext cx="150779" cy="150779"/>
           </a:xfrm>
           <a:prstGeom prst="ellipse">
             <a:avLst/>
@@ -10009,6 +12458,7 @@
           <a:lstStyle/>
           <a:p>
             <a:pPr algn="ctr"/>
+            <a:endParaRPr/>
           </a:p>
         </p:txBody>
       </p:sp>
@@ -10020,8 +12470,8 @@
         </p:nvSpPr>
         <p:spPr>
           <a:xfrm>
-            <a:off x="8747085" y="1071458"/>
-            <a:ext cx="88639" cy="88639"/>
+            <a:off x="8723026" y="1800457"/>
+            <a:ext cx="151635" cy="151635"/>
           </a:xfrm>
           <a:prstGeom prst="ellipse">
             <a:avLst/>
@@ -10053,6 +12503,7 @@
           <a:lstStyle/>
           <a:p>
             <a:pPr algn="ctr"/>
+            <a:endParaRPr/>
           </a:p>
         </p:txBody>
       </p:sp>
@@ -10064,8 +12515,8 @@
         </p:nvSpPr>
         <p:spPr>
           <a:xfrm>
-            <a:off x="10880888" y="1022708"/>
-            <a:ext cx="128173" cy="128173"/>
+            <a:off x="10002589" y="1127331"/>
+            <a:ext cx="123340" cy="123340"/>
           </a:xfrm>
           <a:prstGeom prst="ellipse">
             <a:avLst/>
@@ -10097,6 +12548,7 @@
           <a:lstStyle/>
           <a:p>
             <a:pPr algn="ctr"/>
+            <a:endParaRPr/>
           </a:p>
         </p:txBody>
       </p:sp>
@@ -10108,8 +12560,8 @@
         </p:nvSpPr>
         <p:spPr>
           <a:xfrm>
-            <a:off x="11027890" y="2016540"/>
-            <a:ext cx="84950" cy="84950"/>
+            <a:off x="9857158" y="1143868"/>
+            <a:ext cx="74468" cy="74468"/>
           </a:xfrm>
           <a:prstGeom prst="ellipse">
             <a:avLst/>
@@ -10141,6 +12593,7 @@
           <a:lstStyle/>
           <a:p>
             <a:pPr algn="ctr"/>
+            <a:endParaRPr/>
           </a:p>
         </p:txBody>
       </p:sp>
@@ -10152,8 +12605,8 @@
         </p:nvSpPr>
         <p:spPr>
           <a:xfrm>
-            <a:off x="11110742" y="1805183"/>
-            <a:ext cx="151624" cy="151624"/>
+            <a:off x="9049183" y="1310756"/>
+            <a:ext cx="77840" cy="77840"/>
           </a:xfrm>
           <a:prstGeom prst="ellipse">
             <a:avLst/>
@@ -10185,6 +12638,7 @@
           <a:lstStyle/>
           <a:p>
             <a:pPr algn="ctr"/>
+            <a:endParaRPr/>
           </a:p>
         </p:txBody>
       </p:sp>
@@ -10196,8 +12650,8 @@
         </p:nvSpPr>
         <p:spPr>
           <a:xfrm>
-            <a:off x="10978228" y="879065"/>
-            <a:ext cx="75219" cy="75219"/>
+            <a:off x="10932422" y="585714"/>
+            <a:ext cx="90801" cy="90801"/>
           </a:xfrm>
           <a:prstGeom prst="ellipse">
             <a:avLst/>
@@ -10229,6 +12683,7 @@
           <a:lstStyle/>
           <a:p>
             <a:pPr algn="ctr"/>
+            <a:endParaRPr/>
           </a:p>
         </p:txBody>
       </p:sp>
@@ -10240,8 +12695,8 @@
         </p:nvSpPr>
         <p:spPr>
           <a:xfrm>
-            <a:off x="9100179" y="1586134"/>
-            <a:ext cx="121054" cy="121054"/>
+            <a:off x="11340471" y="1521531"/>
+            <a:ext cx="152824" cy="152824"/>
           </a:xfrm>
           <a:prstGeom prst="ellipse">
             <a:avLst/>
@@ -10273,6 +12728,7 @@
           <a:lstStyle/>
           <a:p>
             <a:pPr algn="ctr"/>
+            <a:endParaRPr/>
           </a:p>
         </p:txBody>
       </p:sp>
@@ -10284,8 +12740,8 @@
         </p:nvSpPr>
         <p:spPr>
           <a:xfrm>
-            <a:off x="8892466" y="726537"/>
-            <a:ext cx="72171" cy="72171"/>
+            <a:off x="9353248" y="979424"/>
+            <a:ext cx="120219" cy="120219"/>
           </a:xfrm>
           <a:prstGeom prst="ellipse">
             <a:avLst/>
@@ -10317,6 +12773,7 @@
           <a:lstStyle/>
           <a:p>
             <a:pPr algn="ctr"/>
+            <a:endParaRPr/>
           </a:p>
         </p:txBody>
       </p:sp>
@@ -10328,8 +12785,8 @@
         </p:nvSpPr>
         <p:spPr>
           <a:xfrm>
-            <a:off x="11078381" y="1223792"/>
-            <a:ext cx="130310" cy="130310"/>
+            <a:off x="11141951" y="1563093"/>
+            <a:ext cx="79128" cy="79128"/>
           </a:xfrm>
           <a:prstGeom prst="ellipse">
             <a:avLst/>
@@ -10361,6 +12818,7 @@
           <a:lstStyle/>
           <a:p>
             <a:pPr algn="ctr"/>
+            <a:endParaRPr/>
           </a:p>
         </p:txBody>
       </p:sp>
@@ -10372,8 +12830,8 @@
         </p:nvSpPr>
         <p:spPr>
           <a:xfrm>
-            <a:off x="11494847" y="1372703"/>
-            <a:ext cx="127064" cy="127064"/>
+            <a:off x="10571819" y="1270223"/>
+            <a:ext cx="172681" cy="172681"/>
           </a:xfrm>
           <a:prstGeom prst="ellipse">
             <a:avLst/>
@@ -10405,6 +12863,7 @@
           <a:lstStyle/>
           <a:p>
             <a:pPr algn="ctr"/>
+            <a:endParaRPr/>
           </a:p>
         </p:txBody>
       </p:sp>
@@ -10416,8 +12875,8 @@
         </p:nvSpPr>
         <p:spPr>
           <a:xfrm>
-            <a:off x="10237015" y="1345564"/>
-            <a:ext cx="158962" cy="158962"/>
+            <a:off x="9631301" y="764032"/>
+            <a:ext cx="94932" cy="94932"/>
           </a:xfrm>
           <a:prstGeom prst="ellipse">
             <a:avLst/>
@@ -10449,6 +12908,7 @@
           <a:lstStyle/>
           <a:p>
             <a:pPr algn="ctr"/>
+            <a:endParaRPr/>
           </a:p>
         </p:txBody>
       </p:sp>
@@ -10460,8 +12920,8 @@
         </p:nvSpPr>
         <p:spPr>
           <a:xfrm>
-            <a:off x="8804006" y="1179807"/>
-            <a:ext cx="96363" cy="96363"/>
+            <a:off x="9364313" y="1812855"/>
+            <a:ext cx="146426" cy="146426"/>
           </a:xfrm>
           <a:prstGeom prst="ellipse">
             <a:avLst/>
@@ -10493,6 +12953,7 @@
           <a:lstStyle/>
           <a:p>
             <a:pPr algn="ctr"/>
+            <a:endParaRPr/>
           </a:p>
         </p:txBody>
       </p:sp>
@@ -10504,8 +12965,8 @@
         </p:nvSpPr>
         <p:spPr>
           <a:xfrm>
-            <a:off x="8849720" y="893700"/>
-            <a:ext cx="103149" cy="103149"/>
+            <a:off x="8839276" y="598269"/>
+            <a:ext cx="164024" cy="164024"/>
           </a:xfrm>
           <a:prstGeom prst="ellipse">
             <a:avLst/>
@@ -10537,6 +12998,7 @@
           <a:lstStyle/>
           <a:p>
             <a:pPr algn="ctr"/>
+            <a:endParaRPr/>
           </a:p>
         </p:txBody>
       </p:sp>
@@ -10548,8 +13010,8 @@
         </p:nvSpPr>
         <p:spPr>
           <a:xfrm>
-            <a:off x="10099364" y="1674942"/>
-            <a:ext cx="146518" cy="146518"/>
+            <a:off x="9749071" y="1780791"/>
+            <a:ext cx="153264" cy="153264"/>
           </a:xfrm>
           <a:prstGeom prst="ellipse">
             <a:avLst/>
@@ -10581,6 +13043,7 @@
           <a:lstStyle/>
           <a:p>
             <a:pPr algn="ctr"/>
+            <a:endParaRPr/>
           </a:p>
         </p:txBody>
       </p:sp>
@@ -10592,8 +13055,8 @@
         </p:nvSpPr>
         <p:spPr>
           <a:xfrm>
-            <a:off x="9042547" y="1263509"/>
-            <a:ext cx="89841" cy="89841"/>
+            <a:off x="8807338" y="1186278"/>
+            <a:ext cx="88068" cy="88068"/>
           </a:xfrm>
           <a:prstGeom prst="ellipse">
             <a:avLst/>
@@ -10625,6 +13088,7 @@
           <a:lstStyle/>
           <a:p>
             <a:pPr algn="ctr"/>
+            <a:endParaRPr/>
           </a:p>
         </p:txBody>
       </p:sp>
@@ -10636,8 +13100,8 @@
         </p:nvSpPr>
         <p:spPr>
           <a:xfrm>
-            <a:off x="10689213" y="818860"/>
-            <a:ext cx="98103" cy="98103"/>
+            <a:off x="9556258" y="1240957"/>
+            <a:ext cx="155865" cy="155865"/>
           </a:xfrm>
           <a:prstGeom prst="ellipse">
             <a:avLst/>
@@ -10669,6 +13133,7 @@
           <a:lstStyle/>
           <a:p>
             <a:pPr algn="ctr"/>
+            <a:endParaRPr/>
           </a:p>
         </p:txBody>
       </p:sp>
@@ -10680,8 +13145,8 @@
         </p:nvSpPr>
         <p:spPr>
           <a:xfrm>
-            <a:off x="11008894" y="1131645"/>
-            <a:ext cx="146072" cy="146072"/>
+            <a:off x="9424404" y="1602892"/>
+            <a:ext cx="105644" cy="105644"/>
           </a:xfrm>
           <a:prstGeom prst="ellipse">
             <a:avLst/>
@@ -10713,6 +13178,7 @@
           <a:lstStyle/>
           <a:p>
             <a:pPr algn="ctr"/>
+            <a:endParaRPr/>
           </a:p>
         </p:txBody>
       </p:sp>
@@ -10724,8 +13190,8 @@
         </p:nvSpPr>
         <p:spPr>
           <a:xfrm>
-            <a:off x="9507176" y="1020854"/>
-            <a:ext cx="119383" cy="119383"/>
+            <a:off x="8945270" y="806202"/>
+            <a:ext cx="75186" cy="75186"/>
           </a:xfrm>
           <a:prstGeom prst="ellipse">
             <a:avLst/>
@@ -10757,6 +13223,7 @@
           <a:lstStyle/>
           <a:p>
             <a:pPr algn="ctr"/>
+            <a:endParaRPr/>
           </a:p>
         </p:txBody>
       </p:sp>
@@ -10794,7 +13261,7 @@
                 </a:solidFill>
                 <a:latin typeface="Calibri"/>
               </a:rPr>
-              <a:t>The four pieces</a:t>
+              <a:t>Point-in-time correctness</a:t>
             </a:r>
           </a:p>
         </p:txBody>
@@ -10833,7 +13300,7 @@
                 </a:solidFill>
                 <a:latin typeface="Calibri"/>
               </a:rPr>
-              <a:t>Different tools use different names. The underlying ideas are the same.</a:t>
+              <a:t>The most important idea in this lesson.</a:t>
             </a:r>
           </a:p>
         </p:txBody>
@@ -10911,7 +13378,7 @@
                 </a:solidFill>
                 <a:latin typeface="Calibri"/>
               </a:rPr>
-              <a:t>4</a:t>
+              <a:t>8</a:t>
             </a:r>
           </a:p>
         </p:txBody>
@@ -10924,8 +13391,8 @@
 </p:sld>
 </file>
 
-<file path=ppt/slides/slide5.xml><?xml version="1.0" encoding="utf-8"?>
-<p:sld xmlns:a="http://schemas.openxmlformats.org/drawingml/2006/main" xmlns:p="http://schemas.openxmlformats.org/presentationml/2006/main" xmlns:r="http://schemas.openxmlformats.org/officeDocument/2006/relationships">
+<file path=ppt/slides/slide9.xml><?xml version="1.0" encoding="utf-8"?>
+<p:sld xmlns:a="http://schemas.openxmlformats.org/drawingml/2006/main" xmlns:r="http://schemas.openxmlformats.org/officeDocument/2006/relationships" xmlns:p="http://schemas.openxmlformats.org/presentationml/2006/main">
   <p:cSld>
     <p:bg>
       <p:bgPr>
@@ -10941,2982 +13408,14 @@
         <p:cNvGrpSpPr/>
         <p:nvPr/>
       </p:nvGrpSpPr>
-      <p:grpSpPr/>
-      <p:sp>
-        <p:nvSpPr>
-          <p:cNvPr id="2" name="TextBox 1"/>
-          <p:cNvSpPr txBox="1"/>
-          <p:nvPr/>
-        </p:nvSpPr>
-        <p:spPr>
-          <a:xfrm>
-            <a:off x="502920" y="300000"/>
-            <a:ext cx="7500000" cy="300000"/>
-          </a:xfrm>
-          <a:prstGeom prst="rect">
-            <a:avLst/>
-          </a:prstGeom>
-          <a:noFill/>
-        </p:spPr>
-        <p:txBody>
-          <a:bodyPr wrap="square" lIns="0" tIns="0" rIns="0" bIns="0">
-            <a:spAutoFit/>
-          </a:bodyPr>
-          <a:lstStyle/>
-          <a:p>
-            <a:pPr algn="l">
-              <a:spcAft>
-                <a:spcPts val="0"/>
-              </a:spcAft>
-            </a:pPr>
-            <a:r>
-              <a:rPr sz="1200" b="1">
-                <a:solidFill>
-                  <a:srgbClr val="F2994A"/>
-                </a:solidFill>
-                <a:latin typeface="Calibri"/>
-              </a:rPr>
-              <a:t>VOCABULARY</a:t>
-            </a:r>
-          </a:p>
-        </p:txBody>
-      </p:sp>
-      <p:sp>
-        <p:nvSpPr>
-          <p:cNvPr id="3" name="TextBox 2"/>
-          <p:cNvSpPr txBox="1"/>
-          <p:nvPr/>
-        </p:nvSpPr>
-        <p:spPr>
-          <a:xfrm>
-            <a:off x="502920" y="560000"/>
-            <a:ext cx="10800000" cy="700000"/>
-          </a:xfrm>
-          <a:prstGeom prst="rect">
-            <a:avLst/>
-          </a:prstGeom>
-          <a:noFill/>
-        </p:spPr>
-        <p:txBody>
-          <a:bodyPr wrap="square" lIns="0" tIns="0" rIns="0" bIns="0">
-            <a:spAutoFit/>
-          </a:bodyPr>
-          <a:lstStyle/>
-          <a:p>
-            <a:pPr algn="l">
-              <a:spcAft>
-                <a:spcPts val="0"/>
-              </a:spcAft>
-            </a:pPr>
-            <a:r>
-              <a:rPr sz="2600" b="1">
-                <a:solidFill>
-                  <a:srgbClr val="1E2761"/>
-                </a:solidFill>
-                <a:latin typeface="Calibri"/>
-              </a:rPr>
-              <a:t>Four common terms</a:t>
-            </a:r>
-          </a:p>
-        </p:txBody>
-      </p:sp>
-      <p:sp>
-        <p:nvSpPr>
-          <p:cNvPr id="4" name="Rounded Rectangle 3"/>
-          <p:cNvSpPr/>
-          <p:nvPr/>
-        </p:nvSpPr>
-        <p:spPr>
-          <a:xfrm>
-            <a:off x="502920" y="1300000"/>
-            <a:ext cx="10800000" cy="1180000"/>
-          </a:xfrm>
-          <a:prstGeom prst="roundRect">
-            <a:avLst>
-              <a:gd name="adj" fmla="val 6000"/>
-            </a:avLst>
-          </a:prstGeom>
-          <a:solidFill>
-            <a:srgbClr val="FFFFFF"/>
-          </a:solidFill>
-          <a:ln>
-            <a:noFill/>
-          </a:ln>
-          <a:effectLst/>
-        </p:spPr>
-        <p:style>
-          <a:lnRef idx="1">
-            <a:schemeClr val="accent1"/>
-          </a:lnRef>
-          <a:fillRef idx="3">
-            <a:schemeClr val="accent1"/>
-          </a:fillRef>
-          <a:effectRef idx="2">
-            <a:schemeClr val="accent1"/>
-          </a:effectRef>
-          <a:fontRef idx="minor">
-            <a:schemeClr val="lt1"/>
-          </a:fontRef>
-        </p:style>
-        <p:txBody>
-          <a:bodyPr rtlCol="0" anchor="ctr"/>
-          <a:lstStyle/>
-          <a:p/>
-        </p:txBody>
-      </p:sp>
-      <p:sp>
-        <p:nvSpPr>
-          <p:cNvPr id="5" name="TextBox 4"/>
-          <p:cNvSpPr txBox="1"/>
-          <p:nvPr/>
-        </p:nvSpPr>
-        <p:spPr>
-          <a:xfrm>
-            <a:off x="700000" y="1450000"/>
-            <a:ext cx="10400000" cy="350000"/>
-          </a:xfrm>
-          <a:prstGeom prst="rect">
-            <a:avLst/>
-          </a:prstGeom>
-          <a:noFill/>
-        </p:spPr>
-        <p:txBody>
-          <a:bodyPr wrap="square" lIns="0" tIns="0" rIns="0" bIns="0">
-            <a:spAutoFit/>
-          </a:bodyPr>
-          <a:lstStyle/>
-          <a:p>
-            <a:pPr algn="l">
-              <a:spcAft>
-                <a:spcPts val="0"/>
-              </a:spcAft>
-            </a:pPr>
-            <a:r>
-              <a:rPr sz="1600" b="1">
-                <a:solidFill>
-                  <a:srgbClr val="1E2761"/>
-                </a:solidFill>
-                <a:latin typeface="Calibri"/>
-              </a:rPr>
-              <a:t>Feature group</a:t>
-            </a:r>
-          </a:p>
-        </p:txBody>
-      </p:sp>
-      <p:sp>
-        <p:nvSpPr>
-          <p:cNvPr id="6" name="TextBox 5"/>
-          <p:cNvSpPr txBox="1"/>
-          <p:nvPr/>
-        </p:nvSpPr>
-        <p:spPr>
-          <a:xfrm>
-            <a:off x="700000" y="1820000"/>
-            <a:ext cx="10400000" cy="420000"/>
-          </a:xfrm>
-          <a:prstGeom prst="rect">
-            <a:avLst/>
-          </a:prstGeom>
-          <a:noFill/>
-        </p:spPr>
-        <p:txBody>
-          <a:bodyPr wrap="square" lIns="0" tIns="0" rIns="0" bIns="0">
-            <a:spAutoFit/>
-          </a:bodyPr>
-          <a:lstStyle/>
-          <a:p>
-            <a:pPr algn="l">
-              <a:spcAft>
-                <a:spcPts val="0"/>
-              </a:spcAft>
-            </a:pPr>
-            <a:r>
-              <a:rPr sz="1400" b="0">
-                <a:solidFill>
-                  <a:srgbClr val="44506B"/>
-                </a:solidFill>
-                <a:latin typeface="Calibri"/>
-              </a:rPr>
-              <a:t>Related features from one source. It has a schema, a primary key and an event-time column. In your project: feat__daily.</a:t>
-            </a:r>
-          </a:p>
-        </p:txBody>
-      </p:sp>
-      <p:sp>
-        <p:nvSpPr>
-          <p:cNvPr id="7" name="Rounded Rectangle 6"/>
-          <p:cNvSpPr/>
-          <p:nvPr/>
-        </p:nvSpPr>
-        <p:spPr>
-          <a:xfrm>
-            <a:off x="502920" y="2560000"/>
-            <a:ext cx="10800000" cy="1180000"/>
-          </a:xfrm>
-          <a:prstGeom prst="roundRect">
-            <a:avLst>
-              <a:gd name="adj" fmla="val 6000"/>
-            </a:avLst>
-          </a:prstGeom>
-          <a:solidFill>
-            <a:srgbClr val="FFFFFF"/>
-          </a:solidFill>
-          <a:ln>
-            <a:noFill/>
-          </a:ln>
-          <a:effectLst/>
-        </p:spPr>
-        <p:style>
-          <a:lnRef idx="1">
-            <a:schemeClr val="accent1"/>
-          </a:lnRef>
-          <a:fillRef idx="3">
-            <a:schemeClr val="accent1"/>
-          </a:fillRef>
-          <a:effectRef idx="2">
-            <a:schemeClr val="accent1"/>
-          </a:effectRef>
-          <a:fontRef idx="minor">
-            <a:schemeClr val="lt1"/>
-          </a:fontRef>
-        </p:style>
-        <p:txBody>
-          <a:bodyPr rtlCol="0" anchor="ctr"/>
-          <a:lstStyle/>
-          <a:p/>
-        </p:txBody>
-      </p:sp>
-      <p:sp>
-        <p:nvSpPr>
-          <p:cNvPr id="8" name="TextBox 7"/>
-          <p:cNvSpPr txBox="1"/>
-          <p:nvPr/>
-        </p:nvSpPr>
-        <p:spPr>
-          <a:xfrm>
-            <a:off x="700000" y="2710000"/>
-            <a:ext cx="10400000" cy="350000"/>
-          </a:xfrm>
-          <a:prstGeom prst="rect">
-            <a:avLst/>
-          </a:prstGeom>
-          <a:noFill/>
-        </p:spPr>
-        <p:txBody>
-          <a:bodyPr wrap="square" lIns="0" tIns="0" rIns="0" bIns="0">
-            <a:spAutoFit/>
-          </a:bodyPr>
-          <a:lstStyle/>
-          <a:p>
-            <a:pPr algn="l">
-              <a:spcAft>
-                <a:spcPts val="0"/>
-              </a:spcAft>
-            </a:pPr>
-            <a:r>
-              <a:rPr sz="1600" b="1">
-                <a:solidFill>
-                  <a:srgbClr val="1E2761"/>
-                </a:solidFill>
-                <a:latin typeface="Calibri"/>
-              </a:rPr>
-              <a:t>Feature view</a:t>
-            </a:r>
-          </a:p>
-        </p:txBody>
-      </p:sp>
-      <p:sp>
-        <p:nvSpPr>
-          <p:cNvPr id="9" name="TextBox 8"/>
-          <p:cNvSpPr txBox="1"/>
-          <p:nvPr/>
-        </p:nvSpPr>
-        <p:spPr>
-          <a:xfrm>
-            <a:off x="700000" y="3080000"/>
-            <a:ext cx="10400000" cy="420000"/>
-          </a:xfrm>
-          <a:prstGeom prst="rect">
-            <a:avLst/>
-          </a:prstGeom>
-          <a:noFill/>
-        </p:spPr>
-        <p:txBody>
-          <a:bodyPr wrap="square" lIns="0" tIns="0" rIns="0" bIns="0">
-            <a:spAutoFit/>
-          </a:bodyPr>
-          <a:lstStyle/>
-          <a:p>
-            <a:pPr algn="l">
-              <a:spcAft>
-                <a:spcPts val="0"/>
-              </a:spcAft>
-            </a:pPr>
-            <a:r>
-              <a:rPr sz="1400" b="0">
-                <a:solidFill>
-                  <a:srgbClr val="44506B"/>
-                </a:solidFill>
-                <a:latin typeface="Calibri"/>
-              </a:rPr>
-              <a:t>A named selection of features for one model. In your project: the query that selects the columns used for training.</a:t>
-            </a:r>
-          </a:p>
-        </p:txBody>
-      </p:sp>
-      <p:sp>
-        <p:nvSpPr>
-          <p:cNvPr id="10" name="Rounded Rectangle 9"/>
-          <p:cNvSpPr/>
-          <p:nvPr/>
-        </p:nvSpPr>
-        <p:spPr>
-          <a:xfrm>
-            <a:off x="502920" y="3820000"/>
-            <a:ext cx="10800000" cy="1180000"/>
-          </a:xfrm>
-          <a:prstGeom prst="roundRect">
-            <a:avLst>
-              <a:gd name="adj" fmla="val 6000"/>
-            </a:avLst>
-          </a:prstGeom>
-          <a:solidFill>
-            <a:srgbClr val="FFFFFF"/>
-          </a:solidFill>
-          <a:ln>
-            <a:noFill/>
-          </a:ln>
-          <a:effectLst/>
-        </p:spPr>
-        <p:style>
-          <a:lnRef idx="1">
-            <a:schemeClr val="accent1"/>
-          </a:lnRef>
-          <a:fillRef idx="3">
-            <a:schemeClr val="accent1"/>
-          </a:fillRef>
-          <a:effectRef idx="2">
-            <a:schemeClr val="accent1"/>
-          </a:effectRef>
-          <a:fontRef idx="minor">
-            <a:schemeClr val="lt1"/>
-          </a:fontRef>
-        </p:style>
-        <p:txBody>
-          <a:bodyPr rtlCol="0" anchor="ctr"/>
-          <a:lstStyle/>
-          <a:p/>
-        </p:txBody>
-      </p:sp>
-      <p:sp>
-        <p:nvSpPr>
-          <p:cNvPr id="11" name="TextBox 10"/>
-          <p:cNvSpPr txBox="1"/>
-          <p:nvPr/>
-        </p:nvSpPr>
-        <p:spPr>
-          <a:xfrm>
-            <a:off x="700000" y="3970000"/>
-            <a:ext cx="10400000" cy="350000"/>
-          </a:xfrm>
-          <a:prstGeom prst="rect">
-            <a:avLst/>
-          </a:prstGeom>
-          <a:noFill/>
-        </p:spPr>
-        <p:txBody>
-          <a:bodyPr wrap="square" lIns="0" tIns="0" rIns="0" bIns="0">
-            <a:spAutoFit/>
-          </a:bodyPr>
-          <a:lstStyle/>
-          <a:p>
-            <a:pPr algn="l">
-              <a:spcAft>
-                <a:spcPts val="0"/>
-              </a:spcAft>
-            </a:pPr>
-            <a:r>
-              <a:rPr sz="1600" b="1">
-                <a:solidFill>
-                  <a:srgbClr val="1E2761"/>
-                </a:solidFill>
-                <a:latin typeface="Calibri"/>
-              </a:rPr>
-              <a:t>Training dataset</a:t>
-            </a:r>
-          </a:p>
-        </p:txBody>
-      </p:sp>
-      <p:sp>
-        <p:nvSpPr>
-          <p:cNvPr id="12" name="TextBox 11"/>
-          <p:cNvSpPr txBox="1"/>
-          <p:nvPr/>
-        </p:nvSpPr>
-        <p:spPr>
-          <a:xfrm>
-            <a:off x="700000" y="4340000"/>
-            <a:ext cx="10400000" cy="420000"/>
-          </a:xfrm>
-          <a:prstGeom prst="rect">
-            <a:avLst/>
-          </a:prstGeom>
-          <a:noFill/>
-        </p:spPr>
-        <p:txBody>
-          <a:bodyPr wrap="square" lIns="0" tIns="0" rIns="0" bIns="0">
-            <a:spAutoFit/>
-          </a:bodyPr>
-          <a:lstStyle/>
-          <a:p>
-            <a:pPr algn="l">
-              <a:spcAft>
-                <a:spcPts val="0"/>
-              </a:spcAft>
-            </a:pPr>
-            <a:r>
-              <a:rPr sz="1400" b="0">
-                <a:solidFill>
-                  <a:srgbClr val="44506B"/>
-                </a:solidFill>
-                <a:latin typeface="Calibri"/>
-              </a:rPr>
-              <a:t>A saved version of the selected data, so a training run can be repeated. In your project: the DataFrame used in one run.</a:t>
-            </a:r>
-          </a:p>
-        </p:txBody>
-      </p:sp>
-      <p:sp>
-        <p:nvSpPr>
-          <p:cNvPr id="13" name="Rounded Rectangle 12"/>
-          <p:cNvSpPr/>
-          <p:nvPr/>
-        </p:nvSpPr>
-        <p:spPr>
-          <a:xfrm>
-            <a:off x="502920" y="5080000"/>
-            <a:ext cx="10800000" cy="1180000"/>
-          </a:xfrm>
-          <a:prstGeom prst="roundRect">
-            <a:avLst>
-              <a:gd name="adj" fmla="val 6000"/>
-            </a:avLst>
-          </a:prstGeom>
-          <a:solidFill>
-            <a:srgbClr val="FFFFFF"/>
-          </a:solidFill>
-          <a:ln>
-            <a:noFill/>
-          </a:ln>
-          <a:effectLst/>
-        </p:spPr>
-        <p:style>
-          <a:lnRef idx="1">
-            <a:schemeClr val="accent1"/>
-          </a:lnRef>
-          <a:fillRef idx="3">
-            <a:schemeClr val="accent1"/>
-          </a:fillRef>
-          <a:effectRef idx="2">
-            <a:schemeClr val="accent1"/>
-          </a:effectRef>
-          <a:fontRef idx="minor">
-            <a:schemeClr val="lt1"/>
-          </a:fontRef>
-        </p:style>
-        <p:txBody>
-          <a:bodyPr rtlCol="0" anchor="ctr"/>
-          <a:lstStyle/>
-          <a:p/>
-        </p:txBody>
-      </p:sp>
-      <p:sp>
-        <p:nvSpPr>
-          <p:cNvPr id="14" name="TextBox 13"/>
-          <p:cNvSpPr txBox="1"/>
-          <p:nvPr/>
-        </p:nvSpPr>
-        <p:spPr>
-          <a:xfrm>
-            <a:off x="700000" y="5230000"/>
-            <a:ext cx="10400000" cy="350000"/>
-          </a:xfrm>
-          <a:prstGeom prst="rect">
-            <a:avLst/>
-          </a:prstGeom>
-          <a:noFill/>
-        </p:spPr>
-        <p:txBody>
-          <a:bodyPr wrap="square" lIns="0" tIns="0" rIns="0" bIns="0">
-            <a:spAutoFit/>
-          </a:bodyPr>
-          <a:lstStyle/>
-          <a:p>
-            <a:pPr algn="l">
-              <a:spcAft>
-                <a:spcPts val="0"/>
-              </a:spcAft>
-            </a:pPr>
-            <a:r>
-              <a:rPr sz="1600" b="1">
-                <a:solidFill>
-                  <a:srgbClr val="1E2761"/>
-                </a:solidFill>
-                <a:latin typeface="Calibri"/>
-              </a:rPr>
-              <a:t>Online store</a:t>
-            </a:r>
-          </a:p>
-        </p:txBody>
-      </p:sp>
-      <p:sp>
-        <p:nvSpPr>
-          <p:cNvPr id="15" name="TextBox 14"/>
-          <p:cNvSpPr txBox="1"/>
-          <p:nvPr/>
-        </p:nvSpPr>
-        <p:spPr>
-          <a:xfrm>
-            <a:off x="700000" y="5600000"/>
-            <a:ext cx="10400000" cy="420000"/>
-          </a:xfrm>
-          <a:prstGeom prst="rect">
-            <a:avLst/>
-          </a:prstGeom>
-          <a:noFill/>
-        </p:spPr>
-        <p:txBody>
-          <a:bodyPr wrap="square" lIns="0" tIns="0" rIns="0" bIns="0">
-            <a:spAutoFit/>
-          </a:bodyPr>
-          <a:lstStyle/>
-          <a:p>
-            <a:pPr algn="l">
-              <a:spcAft>
-                <a:spcPts val="0"/>
-              </a:spcAft>
-            </a:pPr>
-            <a:r>
-              <a:rPr sz="1400" b="0">
-                <a:solidFill>
-                  <a:srgbClr val="44506B"/>
-                </a:solidFill>
-                <a:latin typeface="Calibri"/>
-              </a:rPr>
-              <a:t>Current feature values organised for fast lookup when an API makes one prediction. You do not need a separate one in this project.</a:t>
-            </a:r>
-          </a:p>
-        </p:txBody>
-      </p:sp>
-      <p:sp>
-        <p:nvSpPr>
-          <p:cNvPr id="16" name="TextBox 15"/>
-          <p:cNvSpPr txBox="1"/>
-          <p:nvPr/>
-        </p:nvSpPr>
-        <p:spPr>
-          <a:xfrm>
-            <a:off x="502920" y="6510528"/>
-            <a:ext cx="4572000" cy="274320"/>
-          </a:xfrm>
-          <a:prstGeom prst="rect">
-            <a:avLst/>
-          </a:prstGeom>
-          <a:noFill/>
-        </p:spPr>
-        <p:txBody>
-          <a:bodyPr wrap="square" lIns="0" tIns="0" rIns="0" bIns="0">
-            <a:spAutoFit/>
-          </a:bodyPr>
-          <a:lstStyle/>
-          <a:p>
-            <a:pPr algn="l">
-              <a:spcAft>
-                <a:spcPts val="0"/>
-              </a:spcAft>
-            </a:pPr>
-            <a:r>
-              <a:rPr sz="900" b="0">
-                <a:solidFill>
-                  <a:srgbClr val="9AA6C4"/>
-                </a:solidFill>
-                <a:latin typeface="Calibri"/>
-              </a:rPr>
-              <a:t>Data engineering och agila metoder · AIM25</a:t>
-            </a:r>
-          </a:p>
-        </p:txBody>
-      </p:sp>
-      <p:sp>
-        <p:nvSpPr>
-          <p:cNvPr id="17" name="TextBox 16"/>
-          <p:cNvSpPr txBox="1"/>
-          <p:nvPr/>
-        </p:nvSpPr>
-        <p:spPr>
-          <a:xfrm>
-            <a:off x="11475720" y="6510528"/>
-            <a:ext cx="548640" cy="274320"/>
-          </a:xfrm>
-          <a:prstGeom prst="rect">
-            <a:avLst/>
-          </a:prstGeom>
-          <a:noFill/>
-        </p:spPr>
-        <p:txBody>
-          <a:bodyPr wrap="square" lIns="0" tIns="0" rIns="0" bIns="0">
-            <a:spAutoFit/>
-          </a:bodyPr>
-          <a:lstStyle/>
-          <a:p>
-            <a:pPr algn="r">
-              <a:spcAft>
-                <a:spcPts val="0"/>
-              </a:spcAft>
-            </a:pPr>
-            <a:r>
-              <a:rPr sz="900" b="0">
-                <a:solidFill>
-                  <a:srgbClr val="9AA6C4"/>
-                </a:solidFill>
-                <a:latin typeface="Calibri"/>
-              </a:rPr>
-              <a:t>5</a:t>
-            </a:r>
-          </a:p>
-        </p:txBody>
-      </p:sp>
-    </p:spTree>
-  </p:cSld>
-  <p:clrMapOvr>
-    <a:masterClrMapping/>
-  </p:clrMapOvr>
-</p:sld>
-</file>
-
-<file path=ppt/slides/slide6.xml><?xml version="1.0" encoding="utf-8"?>
-<p:sld xmlns:a="http://schemas.openxmlformats.org/drawingml/2006/main" xmlns:p="http://schemas.openxmlformats.org/presentationml/2006/main" xmlns:r="http://schemas.openxmlformats.org/officeDocument/2006/relationships">
-  <p:cSld>
-    <p:bg>
-      <p:bgPr>
-        <a:solidFill>
-          <a:srgbClr val="F1F5FC"/>
-        </a:solidFill>
-        <a:effectLst/>
-      </p:bgPr>
-    </p:bg>
-    <p:spTree>
-      <p:nvGrpSpPr>
-        <p:cNvPr id="1" name=""/>
-        <p:cNvGrpSpPr/>
-        <p:nvPr/>
-      </p:nvGrpSpPr>
-      <p:grpSpPr/>
-      <p:sp>
-        <p:nvSpPr>
-          <p:cNvPr id="2" name="TextBox 1"/>
-          <p:cNvSpPr txBox="1"/>
-          <p:nvPr/>
-        </p:nvSpPr>
-        <p:spPr>
-          <a:xfrm>
-            <a:off x="502920" y="300000"/>
-            <a:ext cx="7500000" cy="300000"/>
-          </a:xfrm>
-          <a:prstGeom prst="rect">
-            <a:avLst/>
-          </a:prstGeom>
-          <a:noFill/>
-        </p:spPr>
-        <p:txBody>
-          <a:bodyPr wrap="square" lIns="0" tIns="0" rIns="0" bIns="0">
-            <a:spAutoFit/>
-          </a:bodyPr>
-          <a:lstStyle/>
-          <a:p>
-            <a:pPr algn="l">
-              <a:spcAft>
-                <a:spcPts val="0"/>
-              </a:spcAft>
-            </a:pPr>
-            <a:r>
-              <a:rPr sz="1200" b="1">
-                <a:solidFill>
-                  <a:srgbClr val="F2994A"/>
-                </a:solidFill>
-                <a:latin typeface="Calibri"/>
-              </a:rPr>
-              <a:t>OFFLINE AND ONLINE</a:t>
-            </a:r>
-          </a:p>
-        </p:txBody>
-      </p:sp>
-      <p:sp>
-        <p:nvSpPr>
-          <p:cNvPr id="3" name="TextBox 2"/>
-          <p:cNvSpPr txBox="1"/>
-          <p:nvPr/>
-        </p:nvSpPr>
-        <p:spPr>
-          <a:xfrm>
-            <a:off x="502920" y="560000"/>
-            <a:ext cx="10800000" cy="700000"/>
-          </a:xfrm>
-          <a:prstGeom prst="rect">
-            <a:avLst/>
-          </a:prstGeom>
-          <a:noFill/>
-        </p:spPr>
-        <p:txBody>
-          <a:bodyPr wrap="square" lIns="0" tIns="0" rIns="0" bIns="0">
-            <a:spAutoFit/>
-          </a:bodyPr>
-          <a:lstStyle/>
-          <a:p>
-            <a:pPr algn="l">
-              <a:spcAft>
-                <a:spcPts val="0"/>
-              </a:spcAft>
-            </a:pPr>
-            <a:r>
-              <a:rPr sz="2600" b="1">
-                <a:solidFill>
-                  <a:srgbClr val="1E2761"/>
-                </a:solidFill>
-                <a:latin typeface="Calibri"/>
-              </a:rPr>
-              <a:t>The same features can be used in two different ways</a:t>
-            </a:r>
-          </a:p>
-        </p:txBody>
-      </p:sp>
-      <p:sp>
-        <p:nvSpPr>
-          <p:cNvPr id="4" name="Rounded Rectangle 3"/>
-          <p:cNvSpPr/>
-          <p:nvPr/>
-        </p:nvSpPr>
-        <p:spPr>
-          <a:xfrm>
-            <a:off x="502920" y="1450000"/>
-            <a:ext cx="5150000" cy="4100000"/>
-          </a:xfrm>
-          <a:prstGeom prst="roundRect">
-            <a:avLst>
-              <a:gd name="adj" fmla="val 6000"/>
-            </a:avLst>
-          </a:prstGeom>
-          <a:solidFill>
-            <a:srgbClr val="FFFFFF"/>
-          </a:solidFill>
-          <a:ln>
-            <a:noFill/>
-          </a:ln>
-          <a:effectLst/>
-        </p:spPr>
-        <p:style>
-          <a:lnRef idx="1">
-            <a:schemeClr val="accent1"/>
-          </a:lnRef>
-          <a:fillRef idx="3">
-            <a:schemeClr val="accent1"/>
-          </a:fillRef>
-          <a:effectRef idx="2">
-            <a:schemeClr val="accent1"/>
-          </a:effectRef>
-          <a:fontRef idx="minor">
-            <a:schemeClr val="lt1"/>
-          </a:fontRef>
-        </p:style>
-        <p:txBody>
-          <a:bodyPr rtlCol="0" anchor="ctr"/>
-          <a:lstStyle/>
-          <a:p/>
-        </p:txBody>
-      </p:sp>
-      <p:sp>
-        <p:nvSpPr>
-          <p:cNvPr id="5" name="TextBox 4"/>
-          <p:cNvSpPr txBox="1"/>
-          <p:nvPr/>
-        </p:nvSpPr>
-        <p:spPr>
-          <a:xfrm>
-            <a:off x="702920" y="1620000"/>
-            <a:ext cx="4750000" cy="400000"/>
-          </a:xfrm>
-          <a:prstGeom prst="rect">
-            <a:avLst/>
-          </a:prstGeom>
-          <a:noFill/>
-        </p:spPr>
-        <p:txBody>
-          <a:bodyPr wrap="square" lIns="0" tIns="0" rIns="0" bIns="0">
-            <a:spAutoFit/>
-          </a:bodyPr>
-          <a:lstStyle/>
-          <a:p>
-            <a:pPr algn="l">
-              <a:spcAft>
-                <a:spcPts val="0"/>
-              </a:spcAft>
-            </a:pPr>
-            <a:r>
-              <a:rPr sz="1600" b="1">
-                <a:solidFill>
-                  <a:srgbClr val="1E2761"/>
-                </a:solidFill>
-                <a:latin typeface="Calibri"/>
-              </a:rPr>
-              <a:t>Offline store</a:t>
-            </a:r>
-          </a:p>
-        </p:txBody>
-      </p:sp>
-      <p:sp>
-        <p:nvSpPr>
-          <p:cNvPr id="6" name="TextBox 5"/>
-          <p:cNvSpPr txBox="1"/>
-          <p:nvPr/>
-        </p:nvSpPr>
-        <p:spPr>
-          <a:xfrm>
-            <a:off x="702920" y="2100000"/>
-            <a:ext cx="4750000" cy="3300000"/>
-          </a:xfrm>
-          <a:prstGeom prst="rect">
-            <a:avLst/>
-          </a:prstGeom>
-          <a:noFill/>
-        </p:spPr>
-        <p:txBody>
-          <a:bodyPr wrap="square" lIns="0" tIns="0" rIns="0" bIns="0">
-            <a:spAutoFit/>
-          </a:bodyPr>
-          <a:lstStyle/>
-          <a:p>
-            <a:pPr algn="l">
-              <a:spcAft>
-                <a:spcPts val="200"/>
-              </a:spcAft>
-            </a:pPr>
-            <a:r>
-              <a:rPr sz="1400" b="0">
-                <a:solidFill>
-                  <a:srgbClr val="44506B"/>
-                </a:solidFill>
-                <a:latin typeface="Calibri"/>
-              </a:rPr>
-              <a:t>•  Historical data with many rows.</a:t>
-            </a:r>
-          </a:p>
-          <a:p>
-            <a:pPr algn="l">
-              <a:spcAft>
-                <a:spcPts val="200"/>
-              </a:spcAft>
-            </a:pPr>
-            <a:r>
-              <a:rPr sz="1400" b="0">
-                <a:solidFill>
-                  <a:srgbClr val="44506B"/>
-                </a:solidFill>
-                <a:latin typeface="Calibri"/>
-              </a:rPr>
-              <a:t/>
-            </a:r>
-          </a:p>
-          <a:p>
-            <a:pPr algn="l">
-              <a:spcAft>
-                <a:spcPts val="200"/>
-              </a:spcAft>
-            </a:pPr>
-            <a:r>
-              <a:rPr sz="1400" b="0">
-                <a:solidFill>
-                  <a:srgbClr val="44506B"/>
-                </a:solidFill>
-                <a:latin typeface="Calibri"/>
-              </a:rPr>
-              <a:t>•  Question: give me all rows for training from a period.</a:t>
-            </a:r>
-          </a:p>
-          <a:p>
-            <a:pPr algn="l">
-              <a:spcAft>
-                <a:spcPts val="200"/>
-              </a:spcAft>
-            </a:pPr>
-            <a:r>
-              <a:rPr sz="1400" b="0">
-                <a:solidFill>
-                  <a:srgbClr val="44506B"/>
-                </a:solidFill>
-                <a:latin typeface="Calibri"/>
-              </a:rPr>
-              <a:t/>
-            </a:r>
-          </a:p>
-          <a:p>
-            <a:pPr algn="l">
-              <a:spcAft>
-                <a:spcPts val="200"/>
-              </a:spcAft>
-            </a:pPr>
-            <a:r>
-              <a:rPr sz="1400" b="0">
-                <a:solidFill>
-                  <a:srgbClr val="44506B"/>
-                </a:solidFill>
-                <a:latin typeface="Calibri"/>
-              </a:rPr>
-              <a:t>•  Used for training and historical rebuilds.</a:t>
-            </a:r>
-          </a:p>
-          <a:p>
-            <a:pPr algn="l">
-              <a:spcAft>
-                <a:spcPts val="200"/>
-              </a:spcAft>
-            </a:pPr>
-            <a:r>
-              <a:rPr sz="1400" b="0">
-                <a:solidFill>
-                  <a:srgbClr val="44506B"/>
-                </a:solidFill>
-                <a:latin typeface="Calibri"/>
-              </a:rPr>
-              <a:t/>
-            </a:r>
-          </a:p>
-          <a:p>
-            <a:pPr algn="l">
-              <a:spcAft>
-                <a:spcPts val="200"/>
-              </a:spcAft>
-            </a:pPr>
-            <a:r>
-              <a:rPr sz="1400" b="0">
-                <a:solidFill>
-                  <a:srgbClr val="44506B"/>
-                </a:solidFill>
-                <a:latin typeface="Calibri"/>
-              </a:rPr>
-              <a:t>•  Your project: Postgres feat__daily.</a:t>
-            </a:r>
-          </a:p>
-          <a:p>
-            <a:pPr algn="l">
-              <a:spcAft>
-                <a:spcPts val="200"/>
-              </a:spcAft>
-            </a:pPr>
-            <a:r>
-              <a:rPr sz="1400" b="0">
-                <a:solidFill>
-                  <a:srgbClr val="44506B"/>
-                </a:solidFill>
-                <a:latin typeface="Calibri"/>
-              </a:rPr>
-              <a:t/>
-            </a:r>
-          </a:p>
-          <a:p>
-            <a:pPr algn="l">
-              <a:spcAft>
-                <a:spcPts val="200"/>
-              </a:spcAft>
-            </a:pPr>
-            <a:r>
-              <a:rPr sz="1400" b="0">
-                <a:solidFill>
-                  <a:srgbClr val="44506B"/>
-                </a:solidFill>
-                <a:latin typeface="Calibri"/>
-              </a:rPr>
-              <a:t>•  A query can take seconds.</a:t>
-            </a:r>
-          </a:p>
-          <a:p>
-            <a:pPr algn="l">
-              <a:spcAft>
-                <a:spcPts val="200"/>
-              </a:spcAft>
-            </a:pPr>
-            <a:r>
-              <a:rPr sz="1400" b="0">
-                <a:solidFill>
-                  <a:srgbClr val="44506B"/>
-                </a:solidFill>
-                <a:latin typeface="Calibri"/>
-              </a:rPr>
-              <a:t/>
-            </a:r>
-          </a:p>
-        </p:txBody>
-      </p:sp>
-      <p:sp>
-        <p:nvSpPr>
-          <p:cNvPr id="7" name="Rounded Rectangle 6"/>
-          <p:cNvSpPr/>
-          <p:nvPr/>
-        </p:nvSpPr>
-        <p:spPr>
-          <a:xfrm>
-            <a:off x="6152920" y="1450000"/>
-            <a:ext cx="5150000" cy="4100000"/>
-          </a:xfrm>
-          <a:prstGeom prst="roundRect">
-            <a:avLst>
-              <a:gd name="adj" fmla="val 6000"/>
-            </a:avLst>
-          </a:prstGeom>
-          <a:solidFill>
-            <a:srgbClr val="FFFFFF"/>
-          </a:solidFill>
-          <a:ln>
-            <a:noFill/>
-          </a:ln>
-          <a:effectLst/>
-        </p:spPr>
-        <p:style>
-          <a:lnRef idx="1">
-            <a:schemeClr val="accent1"/>
-          </a:lnRef>
-          <a:fillRef idx="3">
-            <a:schemeClr val="accent1"/>
-          </a:fillRef>
-          <a:effectRef idx="2">
-            <a:schemeClr val="accent1"/>
-          </a:effectRef>
-          <a:fontRef idx="minor">
-            <a:schemeClr val="lt1"/>
-          </a:fontRef>
-        </p:style>
-        <p:txBody>
-          <a:bodyPr rtlCol="0" anchor="ctr"/>
-          <a:lstStyle/>
-          <a:p/>
-        </p:txBody>
-      </p:sp>
-      <p:sp>
-        <p:nvSpPr>
-          <p:cNvPr id="8" name="TextBox 7"/>
-          <p:cNvSpPr txBox="1"/>
-          <p:nvPr/>
-        </p:nvSpPr>
-        <p:spPr>
-          <a:xfrm>
-            <a:off x="6352920" y="1620000"/>
-            <a:ext cx="4750000" cy="400000"/>
-          </a:xfrm>
-          <a:prstGeom prst="rect">
-            <a:avLst/>
-          </a:prstGeom>
-          <a:noFill/>
-        </p:spPr>
-        <p:txBody>
-          <a:bodyPr wrap="square" lIns="0" tIns="0" rIns="0" bIns="0">
-            <a:spAutoFit/>
-          </a:bodyPr>
-          <a:lstStyle/>
-          <a:p>
-            <a:pPr algn="l">
-              <a:spcAft>
-                <a:spcPts val="0"/>
-              </a:spcAft>
-            </a:pPr>
-            <a:r>
-              <a:rPr sz="1600" b="1">
-                <a:solidFill>
-                  <a:srgbClr val="1E2761"/>
-                </a:solidFill>
-                <a:latin typeface="Calibri"/>
-              </a:rPr>
-              <a:t>Online store</a:t>
-            </a:r>
-          </a:p>
-        </p:txBody>
-      </p:sp>
-      <p:sp>
-        <p:nvSpPr>
-          <p:cNvPr id="9" name="TextBox 8"/>
-          <p:cNvSpPr txBox="1"/>
-          <p:nvPr/>
-        </p:nvSpPr>
-        <p:spPr>
-          <a:xfrm>
-            <a:off x="6352920" y="2100000"/>
-            <a:ext cx="4750000" cy="3300000"/>
-          </a:xfrm>
-          <a:prstGeom prst="rect">
-            <a:avLst/>
-          </a:prstGeom>
-          <a:noFill/>
-        </p:spPr>
-        <p:txBody>
-          <a:bodyPr wrap="square" lIns="0" tIns="0" rIns="0" bIns="0">
-            <a:spAutoFit/>
-          </a:bodyPr>
-          <a:lstStyle/>
-          <a:p>
-            <a:pPr algn="l">
-              <a:spcAft>
-                <a:spcPts val="200"/>
-              </a:spcAft>
-            </a:pPr>
-            <a:r>
-              <a:rPr sz="1400" b="0">
-                <a:solidFill>
-                  <a:srgbClr val="44506B"/>
-                </a:solidFill>
-                <a:latin typeface="Calibri"/>
-              </a:rPr>
-              <a:t>•  Current data for one entity at a time.</a:t>
-            </a:r>
-          </a:p>
-          <a:p>
-            <a:pPr algn="l">
-              <a:spcAft>
-                <a:spcPts val="200"/>
-              </a:spcAft>
-            </a:pPr>
-            <a:r>
-              <a:rPr sz="1400" b="0">
-                <a:solidFill>
-                  <a:srgbClr val="44506B"/>
-                </a:solidFill>
-                <a:latin typeface="Calibri"/>
-              </a:rPr>
-              <a:t/>
-            </a:r>
-          </a:p>
-          <a:p>
-            <a:pPr algn="l">
-              <a:spcAft>
-                <a:spcPts val="200"/>
-              </a:spcAft>
-            </a:pPr>
-            <a:r>
-              <a:rPr sz="1400" b="0">
-                <a:solidFill>
-                  <a:srgbClr val="44506B"/>
-                </a:solidFill>
-                <a:latin typeface="Calibri"/>
-              </a:rPr>
-              <a:t>•  Question: what are the latest features for SE3?</a:t>
-            </a:r>
-          </a:p>
-          <a:p>
-            <a:pPr algn="l">
-              <a:spcAft>
-                <a:spcPts val="200"/>
-              </a:spcAft>
-            </a:pPr>
-            <a:r>
-              <a:rPr sz="1400" b="0">
-                <a:solidFill>
-                  <a:srgbClr val="44506B"/>
-                </a:solidFill>
-                <a:latin typeface="Calibri"/>
-              </a:rPr>
-              <a:t/>
-            </a:r>
-          </a:p>
-          <a:p>
-            <a:pPr algn="l">
-              <a:spcAft>
-                <a:spcPts val="200"/>
-              </a:spcAft>
-            </a:pPr>
-            <a:r>
-              <a:rPr sz="1400" b="0">
-                <a:solidFill>
-                  <a:srgbClr val="44506B"/>
-                </a:solidFill>
-                <a:latin typeface="Calibri"/>
-              </a:rPr>
-              <a:t>•  Used when an API makes a prediction.</a:t>
-            </a:r>
-          </a:p>
-          <a:p>
-            <a:pPr algn="l">
-              <a:spcAft>
-                <a:spcPts val="200"/>
-              </a:spcAft>
-            </a:pPr>
-            <a:r>
-              <a:rPr sz="1400" b="0">
-                <a:solidFill>
-                  <a:srgbClr val="44506B"/>
-                </a:solidFill>
-                <a:latin typeface="Calibri"/>
-              </a:rPr>
-              <a:t/>
-            </a:r>
-          </a:p>
-          <a:p>
-            <a:pPr algn="l">
-              <a:spcAft>
-                <a:spcPts val="200"/>
-              </a:spcAft>
-            </a:pPr>
-            <a:r>
-              <a:rPr sz="1400" b="0">
-                <a:solidFill>
-                  <a:srgbClr val="44506B"/>
-                </a:solidFill>
-                <a:latin typeface="Calibri"/>
-              </a:rPr>
-              <a:t>•  Your project: a normal query against the same table.</a:t>
-            </a:r>
-          </a:p>
-          <a:p>
-            <a:pPr algn="l">
-              <a:spcAft>
-                <a:spcPts val="200"/>
-              </a:spcAft>
-            </a:pPr>
-            <a:r>
-              <a:rPr sz="1400" b="0">
-                <a:solidFill>
-                  <a:srgbClr val="44506B"/>
-                </a:solidFill>
-                <a:latin typeface="Calibri"/>
-              </a:rPr>
-              <a:t/>
-            </a:r>
-          </a:p>
-          <a:p>
-            <a:pPr algn="l">
-              <a:spcAft>
-                <a:spcPts val="200"/>
-              </a:spcAft>
-            </a:pPr>
-            <a:r>
-              <a:rPr sz="1400" b="0">
-                <a:solidFill>
-                  <a:srgbClr val="44506B"/>
-                </a:solidFill>
-                <a:latin typeface="Calibri"/>
-              </a:rPr>
-              <a:t>•  For a public service, users expect a quick answer.</a:t>
-            </a:r>
-          </a:p>
-          <a:p>
-            <a:pPr algn="l">
-              <a:spcAft>
-                <a:spcPts val="200"/>
-              </a:spcAft>
-            </a:pPr>
-            <a:r>
-              <a:rPr sz="1400" b="0">
-                <a:solidFill>
-                  <a:srgbClr val="44506B"/>
-                </a:solidFill>
-                <a:latin typeface="Calibri"/>
-              </a:rPr>
-              <a:t/>
-            </a:r>
-          </a:p>
-        </p:txBody>
-      </p:sp>
-      <p:sp>
-        <p:nvSpPr>
-          <p:cNvPr id="10" name="TextBox 9"/>
-          <p:cNvSpPr txBox="1"/>
-          <p:nvPr/>
-        </p:nvSpPr>
-        <p:spPr>
-          <a:xfrm>
-            <a:off x="502920" y="6510528"/>
-            <a:ext cx="4572000" cy="274320"/>
-          </a:xfrm>
-          <a:prstGeom prst="rect">
-            <a:avLst/>
-          </a:prstGeom>
-          <a:noFill/>
-        </p:spPr>
-        <p:txBody>
-          <a:bodyPr wrap="square" lIns="0" tIns="0" rIns="0" bIns="0">
-            <a:spAutoFit/>
-          </a:bodyPr>
-          <a:lstStyle/>
-          <a:p>
-            <a:pPr algn="l">
-              <a:spcAft>
-                <a:spcPts val="0"/>
-              </a:spcAft>
-            </a:pPr>
-            <a:r>
-              <a:rPr sz="900" b="0">
-                <a:solidFill>
-                  <a:srgbClr val="9AA6C4"/>
-                </a:solidFill>
-                <a:latin typeface="Calibri"/>
-              </a:rPr>
-              <a:t>Data engineering och agila metoder · AIM25</a:t>
-            </a:r>
-          </a:p>
-        </p:txBody>
-      </p:sp>
-      <p:sp>
-        <p:nvSpPr>
-          <p:cNvPr id="11" name="TextBox 10"/>
-          <p:cNvSpPr txBox="1"/>
-          <p:nvPr/>
-        </p:nvSpPr>
-        <p:spPr>
-          <a:xfrm>
-            <a:off x="11475720" y="6510528"/>
-            <a:ext cx="548640" cy="274320"/>
-          </a:xfrm>
-          <a:prstGeom prst="rect">
-            <a:avLst/>
-          </a:prstGeom>
-          <a:noFill/>
-        </p:spPr>
-        <p:txBody>
-          <a:bodyPr wrap="square" lIns="0" tIns="0" rIns="0" bIns="0">
-            <a:spAutoFit/>
-          </a:bodyPr>
-          <a:lstStyle/>
-          <a:p>
-            <a:pPr algn="r">
-              <a:spcAft>
-                <a:spcPts val="0"/>
-              </a:spcAft>
-            </a:pPr>
-            <a:r>
-              <a:rPr sz="900" b="0">
-                <a:solidFill>
-                  <a:srgbClr val="9AA6C4"/>
-                </a:solidFill>
-                <a:latin typeface="Calibri"/>
-              </a:rPr>
-              <a:t>6</a:t>
-            </a:r>
-          </a:p>
-        </p:txBody>
-      </p:sp>
-    </p:spTree>
-  </p:cSld>
-  <p:clrMapOvr>
-    <a:masterClrMapping/>
-  </p:clrMapOvr>
-</p:sld>
-</file>
-
-<file path=ppt/slides/slide7.xml><?xml version="1.0" encoding="utf-8"?>
-<p:sld xmlns:a="http://schemas.openxmlformats.org/drawingml/2006/main" xmlns:p="http://schemas.openxmlformats.org/presentationml/2006/main" xmlns:r="http://schemas.openxmlformats.org/officeDocument/2006/relationships">
-  <p:cSld>
-    <p:bg>
-      <p:bgPr>
-        <a:solidFill>
-          <a:srgbClr val="F1F5FC"/>
-        </a:solidFill>
-        <a:effectLst/>
-      </p:bgPr>
-    </p:bg>
-    <p:spTree>
-      <p:nvGrpSpPr>
-        <p:cNvPr id="1" name=""/>
-        <p:cNvGrpSpPr/>
-        <p:nvPr/>
-      </p:nvGrpSpPr>
-      <p:grpSpPr/>
-      <p:sp>
-        <p:nvSpPr>
-          <p:cNvPr id="2" name="TextBox 1"/>
-          <p:cNvSpPr txBox="1"/>
-          <p:nvPr/>
-        </p:nvSpPr>
-        <p:spPr>
-          <a:xfrm>
-            <a:off x="502920" y="300000"/>
-            <a:ext cx="7500000" cy="300000"/>
-          </a:xfrm>
-          <a:prstGeom prst="rect">
-            <a:avLst/>
-          </a:prstGeom>
-          <a:noFill/>
-        </p:spPr>
-        <p:txBody>
-          <a:bodyPr wrap="square" lIns="0" tIns="0" rIns="0" bIns="0">
-            <a:spAutoFit/>
-          </a:bodyPr>
-          <a:lstStyle/>
-          <a:p>
-            <a:pPr algn="l">
-              <a:spcAft>
-                <a:spcPts val="0"/>
-              </a:spcAft>
-            </a:pPr>
-            <a:r>
-              <a:rPr sz="1200" b="1">
-                <a:solidFill>
-                  <a:srgbClr val="F2994A"/>
-                </a:solidFill>
-                <a:latin typeface="Calibri"/>
-              </a:rPr>
-              <a:t>WHY TWO STORES AT ALL</a:t>
-            </a:r>
-          </a:p>
-        </p:txBody>
-      </p:sp>
-      <p:sp>
-        <p:nvSpPr>
-          <p:cNvPr id="3" name="TextBox 2"/>
-          <p:cNvSpPr txBox="1"/>
-          <p:nvPr/>
-        </p:nvSpPr>
-        <p:spPr>
-          <a:xfrm>
-            <a:off x="502920" y="2300000"/>
-            <a:ext cx="11000000" cy="2000000"/>
-          </a:xfrm>
-          <a:prstGeom prst="rect">
-            <a:avLst/>
-          </a:prstGeom>
-          <a:noFill/>
-        </p:spPr>
-        <p:txBody>
-          <a:bodyPr wrap="square" lIns="0" tIns="0" rIns="0" bIns="0">
-            <a:spAutoFit/>
-          </a:bodyPr>
-          <a:lstStyle/>
-          <a:p>
-            <a:pPr algn="l">
-              <a:spcAft>
-                <a:spcPts val="0"/>
-              </a:spcAft>
-            </a:pPr>
-            <a:r>
-              <a:rPr sz="2400" b="1">
-                <a:solidFill>
-                  <a:srgbClr val="1E2761"/>
-                </a:solidFill>
-                <a:latin typeface="Calibri"/>
-              </a:rPr>
-              <a:t>Training needs many historical rows. An API normally needs the current row for one entity.</a:t>
-            </a:r>
-          </a:p>
-        </p:txBody>
-      </p:sp>
-      <p:sp>
-        <p:nvSpPr>
-          <p:cNvPr id="4" name="TextBox 3"/>
-          <p:cNvSpPr txBox="1"/>
-          <p:nvPr/>
-        </p:nvSpPr>
-        <p:spPr>
-          <a:xfrm>
-            <a:off x="502920" y="4400000"/>
-            <a:ext cx="10800000" cy="1200000"/>
-          </a:xfrm>
-          <a:prstGeom prst="rect">
-            <a:avLst/>
-          </a:prstGeom>
-          <a:noFill/>
-        </p:spPr>
-        <p:txBody>
-          <a:bodyPr wrap="square" lIns="0" tIns="0" rIns="0" bIns="0">
-            <a:spAutoFit/>
-          </a:bodyPr>
-          <a:lstStyle/>
-          <a:p>
-            <a:pPr algn="l">
-              <a:spcAft>
-                <a:spcPts val="0"/>
-              </a:spcAft>
-            </a:pPr>
-            <a:r>
-              <a:rPr sz="1500" b="0">
-                <a:solidFill>
-                  <a:srgbClr val="44506B"/>
-                </a:solidFill>
-                <a:latin typeface="Calibri"/>
-              </a:rPr>
-              <a:t>A dedicated feature store keeps the feature definition the same in both cases, even when the data is stored and read in different ways. If feature logic is written separately for training and for the API, the two versions can gradually become different.</a:t>
-            </a:r>
-          </a:p>
-        </p:txBody>
-      </p:sp>
-      <p:sp>
-        <p:nvSpPr>
-          <p:cNvPr id="5" name="TextBox 4"/>
-          <p:cNvSpPr txBox="1"/>
-          <p:nvPr/>
-        </p:nvSpPr>
-        <p:spPr>
-          <a:xfrm>
-            <a:off x="502920" y="6510528"/>
-            <a:ext cx="4572000" cy="274320"/>
-          </a:xfrm>
-          <a:prstGeom prst="rect">
-            <a:avLst/>
-          </a:prstGeom>
-          <a:noFill/>
-        </p:spPr>
-        <p:txBody>
-          <a:bodyPr wrap="square" lIns="0" tIns="0" rIns="0" bIns="0">
-            <a:spAutoFit/>
-          </a:bodyPr>
-          <a:lstStyle/>
-          <a:p>
-            <a:pPr algn="l">
-              <a:spcAft>
-                <a:spcPts val="0"/>
-              </a:spcAft>
-            </a:pPr>
-            <a:r>
-              <a:rPr sz="900" b="0">
-                <a:solidFill>
-                  <a:srgbClr val="9AA6C4"/>
-                </a:solidFill>
-                <a:latin typeface="Calibri"/>
-              </a:rPr>
-              <a:t>Data engineering och agila metoder · AIM25</a:t>
-            </a:r>
-          </a:p>
-        </p:txBody>
-      </p:sp>
-      <p:sp>
-        <p:nvSpPr>
-          <p:cNvPr id="6" name="TextBox 5"/>
-          <p:cNvSpPr txBox="1"/>
-          <p:nvPr/>
-        </p:nvSpPr>
-        <p:spPr>
-          <a:xfrm>
-            <a:off x="11475720" y="6510528"/>
-            <a:ext cx="548640" cy="274320"/>
-          </a:xfrm>
-          <a:prstGeom prst="rect">
-            <a:avLst/>
-          </a:prstGeom>
-          <a:noFill/>
-        </p:spPr>
-        <p:txBody>
-          <a:bodyPr wrap="square" lIns="0" tIns="0" rIns="0" bIns="0">
-            <a:spAutoFit/>
-          </a:bodyPr>
-          <a:lstStyle/>
-          <a:p>
-            <a:pPr algn="r">
-              <a:spcAft>
-                <a:spcPts val="0"/>
-              </a:spcAft>
-            </a:pPr>
-            <a:r>
-              <a:rPr sz="900" b="0">
-                <a:solidFill>
-                  <a:srgbClr val="9AA6C4"/>
-                </a:solidFill>
-                <a:latin typeface="Calibri"/>
-              </a:rPr>
-              <a:t>7</a:t>
-            </a:r>
-          </a:p>
-        </p:txBody>
-      </p:sp>
-    </p:spTree>
-  </p:cSld>
-  <p:clrMapOvr>
-    <a:masterClrMapping/>
-  </p:clrMapOvr>
-</p:sld>
-</file>
-
-<file path=ppt/slides/slide8.xml><?xml version="1.0" encoding="utf-8"?>
-<p:sld xmlns:a="http://schemas.openxmlformats.org/drawingml/2006/main" xmlns:p="http://schemas.openxmlformats.org/presentationml/2006/main" xmlns:r="http://schemas.openxmlformats.org/officeDocument/2006/relationships">
-  <p:cSld>
-    <p:bg>
-      <p:bgPr>
-        <a:solidFill>
-          <a:srgbClr val="1E2761"/>
-        </a:solidFill>
-        <a:effectLst/>
-      </p:bgPr>
-    </p:bg>
-    <p:spTree>
-      <p:nvGrpSpPr>
-        <p:cNvPr id="1" name=""/>
-        <p:cNvGrpSpPr/>
-        <p:nvPr/>
-      </p:nvGrpSpPr>
-      <p:grpSpPr/>
-      <p:sp>
-        <p:nvSpPr>
-          <p:cNvPr id="2" name="Oval 1"/>
-          <p:cNvSpPr/>
-          <p:nvPr/>
-        </p:nvSpPr>
-        <p:spPr>
-          <a:xfrm>
-            <a:off x="9042882" y="1892293"/>
-            <a:ext cx="96112" cy="96112"/>
-          </a:xfrm>
-          <a:prstGeom prst="ellipse">
-            <a:avLst/>
-          </a:prstGeom>
-          <a:solidFill>
-            <a:srgbClr val="CADCFC"/>
-          </a:solidFill>
-          <a:ln>
-            <a:noFill/>
-          </a:ln>
-          <a:effectLst/>
-        </p:spPr>
-        <p:style>
-          <a:lnRef idx="1">
-            <a:schemeClr val="accent1"/>
-          </a:lnRef>
-          <a:fillRef idx="3">
-            <a:schemeClr val="accent1"/>
-          </a:fillRef>
-          <a:effectRef idx="2">
-            <a:schemeClr val="accent1"/>
-          </a:effectRef>
-          <a:fontRef idx="minor">
-            <a:schemeClr val="lt1"/>
-          </a:fontRef>
-        </p:style>
-        <p:txBody>
-          <a:bodyPr rtlCol="0" anchor="ctr"/>
-          <a:lstStyle/>
-          <a:p>
-            <a:pPr algn="ctr"/>
-          </a:p>
-        </p:txBody>
-      </p:sp>
-      <p:sp>
-        <p:nvSpPr>
-          <p:cNvPr id="3" name="Oval 2"/>
-          <p:cNvSpPr/>
-          <p:nvPr/>
-        </p:nvSpPr>
-        <p:spPr>
-          <a:xfrm>
-            <a:off x="9663756" y="1315978"/>
-            <a:ext cx="132323" cy="132323"/>
-          </a:xfrm>
-          <a:prstGeom prst="ellipse">
-            <a:avLst/>
-          </a:prstGeom>
-          <a:solidFill>
-            <a:srgbClr val="CADCFC"/>
-          </a:solidFill>
-          <a:ln>
-            <a:noFill/>
-          </a:ln>
-          <a:effectLst/>
-        </p:spPr>
-        <p:style>
-          <a:lnRef idx="1">
-            <a:schemeClr val="accent1"/>
-          </a:lnRef>
-          <a:fillRef idx="3">
-            <a:schemeClr val="accent1"/>
-          </a:fillRef>
-          <a:effectRef idx="2">
-            <a:schemeClr val="accent1"/>
-          </a:effectRef>
-          <a:fontRef idx="minor">
-            <a:schemeClr val="lt1"/>
-          </a:fontRef>
-        </p:style>
-        <p:txBody>
-          <a:bodyPr rtlCol="0" anchor="ctr"/>
-          <a:lstStyle/>
-          <a:p>
-            <a:pPr algn="ctr"/>
-          </a:p>
-        </p:txBody>
-      </p:sp>
-      <p:sp>
-        <p:nvSpPr>
-          <p:cNvPr id="4" name="Oval 3"/>
-          <p:cNvSpPr/>
-          <p:nvPr/>
-        </p:nvSpPr>
-        <p:spPr>
-          <a:xfrm>
-            <a:off x="9918222" y="1861641"/>
-            <a:ext cx="87150" cy="87150"/>
-          </a:xfrm>
-          <a:prstGeom prst="ellipse">
-            <a:avLst/>
-          </a:prstGeom>
-          <a:solidFill>
-            <a:srgbClr val="CADCFC"/>
-          </a:solidFill>
-          <a:ln>
-            <a:noFill/>
-          </a:ln>
-          <a:effectLst/>
-        </p:spPr>
-        <p:style>
-          <a:lnRef idx="1">
-            <a:schemeClr val="accent1"/>
-          </a:lnRef>
-          <a:fillRef idx="3">
-            <a:schemeClr val="accent1"/>
-          </a:fillRef>
-          <a:effectRef idx="2">
-            <a:schemeClr val="accent1"/>
-          </a:effectRef>
-          <a:fontRef idx="minor">
-            <a:schemeClr val="lt1"/>
-          </a:fontRef>
-        </p:style>
-        <p:txBody>
-          <a:bodyPr rtlCol="0" anchor="ctr"/>
-          <a:lstStyle/>
-          <a:p>
-            <a:pPr algn="ctr"/>
-          </a:p>
-        </p:txBody>
-      </p:sp>
-      <p:sp>
-        <p:nvSpPr>
-          <p:cNvPr id="5" name="Oval 4"/>
-          <p:cNvSpPr/>
-          <p:nvPr/>
-        </p:nvSpPr>
-        <p:spPr>
-          <a:xfrm>
-            <a:off x="10634863" y="667958"/>
-            <a:ext cx="80860" cy="80860"/>
-          </a:xfrm>
-          <a:prstGeom prst="ellipse">
-            <a:avLst/>
-          </a:prstGeom>
-          <a:solidFill>
-            <a:srgbClr val="CADCFC"/>
-          </a:solidFill>
-          <a:ln>
-            <a:noFill/>
-          </a:ln>
-          <a:effectLst/>
-        </p:spPr>
-        <p:style>
-          <a:lnRef idx="1">
-            <a:schemeClr val="accent1"/>
-          </a:lnRef>
-          <a:fillRef idx="3">
-            <a:schemeClr val="accent1"/>
-          </a:fillRef>
-          <a:effectRef idx="2">
-            <a:schemeClr val="accent1"/>
-          </a:effectRef>
-          <a:fontRef idx="minor">
-            <a:schemeClr val="lt1"/>
-          </a:fontRef>
-        </p:style>
-        <p:txBody>
-          <a:bodyPr rtlCol="0" anchor="ctr"/>
-          <a:lstStyle/>
-          <a:p>
-            <a:pPr algn="ctr"/>
-          </a:p>
-        </p:txBody>
-      </p:sp>
-      <p:sp>
-        <p:nvSpPr>
-          <p:cNvPr id="6" name="Oval 5"/>
-          <p:cNvSpPr/>
-          <p:nvPr/>
-        </p:nvSpPr>
-        <p:spPr>
-          <a:xfrm>
-            <a:off x="11277591" y="715376"/>
-            <a:ext cx="168544" cy="168544"/>
-          </a:xfrm>
-          <a:prstGeom prst="ellipse">
-            <a:avLst/>
-          </a:prstGeom>
-          <a:solidFill>
-            <a:srgbClr val="CADCFC"/>
-          </a:solidFill>
-          <a:ln>
-            <a:noFill/>
-          </a:ln>
-          <a:effectLst/>
-        </p:spPr>
-        <p:style>
-          <a:lnRef idx="1">
-            <a:schemeClr val="accent1"/>
-          </a:lnRef>
-          <a:fillRef idx="3">
-            <a:schemeClr val="accent1"/>
-          </a:fillRef>
-          <a:effectRef idx="2">
-            <a:schemeClr val="accent1"/>
-          </a:effectRef>
-          <a:fontRef idx="minor">
-            <a:schemeClr val="lt1"/>
-          </a:fontRef>
-        </p:style>
-        <p:txBody>
-          <a:bodyPr rtlCol="0" anchor="ctr"/>
-          <a:lstStyle/>
-          <a:p>
-            <a:pPr algn="ctr"/>
-          </a:p>
-        </p:txBody>
-      </p:sp>
-      <p:sp>
-        <p:nvSpPr>
-          <p:cNvPr id="7" name="Oval 6"/>
-          <p:cNvSpPr/>
-          <p:nvPr/>
-        </p:nvSpPr>
-        <p:spPr>
-          <a:xfrm>
-            <a:off x="10883466" y="713391"/>
-            <a:ext cx="94587" cy="94587"/>
-          </a:xfrm>
-          <a:prstGeom prst="ellipse">
-            <a:avLst/>
-          </a:prstGeom>
-          <a:solidFill>
-            <a:srgbClr val="CADCFC"/>
-          </a:solidFill>
-          <a:ln>
-            <a:noFill/>
-          </a:ln>
-          <a:effectLst/>
-        </p:spPr>
-        <p:style>
-          <a:lnRef idx="1">
-            <a:schemeClr val="accent1"/>
-          </a:lnRef>
-          <a:fillRef idx="3">
-            <a:schemeClr val="accent1"/>
-          </a:fillRef>
-          <a:effectRef idx="2">
-            <a:schemeClr val="accent1"/>
-          </a:effectRef>
-          <a:fontRef idx="minor">
-            <a:schemeClr val="lt1"/>
-          </a:fontRef>
-        </p:style>
-        <p:txBody>
-          <a:bodyPr rtlCol="0" anchor="ctr"/>
-          <a:lstStyle/>
-          <a:p>
-            <a:pPr algn="ctr"/>
-          </a:p>
-        </p:txBody>
-      </p:sp>
-      <p:sp>
-        <p:nvSpPr>
-          <p:cNvPr id="8" name="Oval 7"/>
-          <p:cNvSpPr/>
-          <p:nvPr/>
-        </p:nvSpPr>
-        <p:spPr>
-          <a:xfrm>
-            <a:off x="9532936" y="1290058"/>
-            <a:ext cx="87098" cy="87098"/>
-          </a:xfrm>
-          <a:prstGeom prst="ellipse">
-            <a:avLst/>
-          </a:prstGeom>
-          <a:solidFill>
-            <a:srgbClr val="CADCFC"/>
-          </a:solidFill>
-          <a:ln>
-            <a:noFill/>
-          </a:ln>
-          <a:effectLst/>
-        </p:spPr>
-        <p:style>
-          <a:lnRef idx="1">
-            <a:schemeClr val="accent1"/>
-          </a:lnRef>
-          <a:fillRef idx="3">
-            <a:schemeClr val="accent1"/>
-          </a:fillRef>
-          <a:effectRef idx="2">
-            <a:schemeClr val="accent1"/>
-          </a:effectRef>
-          <a:fontRef idx="minor">
-            <a:schemeClr val="lt1"/>
-          </a:fontRef>
-        </p:style>
-        <p:txBody>
-          <a:bodyPr rtlCol="0" anchor="ctr"/>
-          <a:lstStyle/>
-          <a:p>
-            <a:pPr algn="ctr"/>
-          </a:p>
-        </p:txBody>
-      </p:sp>
-      <p:sp>
-        <p:nvSpPr>
-          <p:cNvPr id="9" name="Oval 8"/>
-          <p:cNvSpPr/>
-          <p:nvPr/>
-        </p:nvSpPr>
-        <p:spPr>
-          <a:xfrm>
-            <a:off x="8835770" y="1119520"/>
-            <a:ext cx="112783" cy="112783"/>
-          </a:xfrm>
-          <a:prstGeom prst="ellipse">
-            <a:avLst/>
-          </a:prstGeom>
-          <a:solidFill>
-            <a:srgbClr val="CADCFC"/>
-          </a:solidFill>
-          <a:ln>
-            <a:noFill/>
-          </a:ln>
-          <a:effectLst/>
-        </p:spPr>
-        <p:style>
-          <a:lnRef idx="1">
-            <a:schemeClr val="accent1"/>
-          </a:lnRef>
-          <a:fillRef idx="3">
-            <a:schemeClr val="accent1"/>
-          </a:fillRef>
-          <a:effectRef idx="2">
-            <a:schemeClr val="accent1"/>
-          </a:effectRef>
-          <a:fontRef idx="minor">
-            <a:schemeClr val="lt1"/>
-          </a:fontRef>
-        </p:style>
-        <p:txBody>
-          <a:bodyPr rtlCol="0" anchor="ctr"/>
-          <a:lstStyle/>
-          <a:p>
-            <a:pPr algn="ctr"/>
-          </a:p>
-        </p:txBody>
-      </p:sp>
-      <p:sp>
-        <p:nvSpPr>
-          <p:cNvPr id="10" name="Oval 9"/>
-          <p:cNvSpPr/>
-          <p:nvPr/>
-        </p:nvSpPr>
-        <p:spPr>
-          <a:xfrm>
-            <a:off x="11121493" y="1827959"/>
-            <a:ext cx="108844" cy="108844"/>
-          </a:xfrm>
-          <a:prstGeom prst="ellipse">
-            <a:avLst/>
-          </a:prstGeom>
-          <a:solidFill>
-            <a:srgbClr val="CADCFC"/>
-          </a:solidFill>
-          <a:ln>
-            <a:noFill/>
-          </a:ln>
-          <a:effectLst/>
-        </p:spPr>
-        <p:style>
-          <a:lnRef idx="1">
-            <a:schemeClr val="accent1"/>
-          </a:lnRef>
-          <a:fillRef idx="3">
-            <a:schemeClr val="accent1"/>
-          </a:fillRef>
-          <a:effectRef idx="2">
-            <a:schemeClr val="accent1"/>
-          </a:effectRef>
-          <a:fontRef idx="minor">
-            <a:schemeClr val="lt1"/>
-          </a:fontRef>
-        </p:style>
-        <p:txBody>
-          <a:bodyPr rtlCol="0" anchor="ctr"/>
-          <a:lstStyle/>
-          <a:p>
-            <a:pPr algn="ctr"/>
-          </a:p>
-        </p:txBody>
-      </p:sp>
-      <p:sp>
-        <p:nvSpPr>
-          <p:cNvPr id="11" name="Oval 10"/>
-          <p:cNvSpPr/>
-          <p:nvPr/>
-        </p:nvSpPr>
-        <p:spPr>
-          <a:xfrm>
-            <a:off x="8863705" y="506151"/>
-            <a:ext cx="150779" cy="150779"/>
-          </a:xfrm>
-          <a:prstGeom prst="ellipse">
-            <a:avLst/>
-          </a:prstGeom>
-          <a:solidFill>
-            <a:srgbClr val="CADCFC"/>
-          </a:solidFill>
-          <a:ln>
-            <a:noFill/>
-          </a:ln>
-          <a:effectLst/>
-        </p:spPr>
-        <p:style>
-          <a:lnRef idx="1">
-            <a:schemeClr val="accent1"/>
-          </a:lnRef>
-          <a:fillRef idx="3">
-            <a:schemeClr val="accent1"/>
-          </a:fillRef>
-          <a:effectRef idx="2">
-            <a:schemeClr val="accent1"/>
-          </a:effectRef>
-          <a:fontRef idx="minor">
-            <a:schemeClr val="lt1"/>
-          </a:fontRef>
-        </p:style>
-        <p:txBody>
-          <a:bodyPr rtlCol="0" anchor="ctr"/>
-          <a:lstStyle/>
-          <a:p>
-            <a:pPr algn="ctr"/>
-          </a:p>
-        </p:txBody>
-      </p:sp>
-      <p:sp>
-        <p:nvSpPr>
-          <p:cNvPr id="12" name="Oval 11"/>
-          <p:cNvSpPr/>
-          <p:nvPr/>
-        </p:nvSpPr>
-        <p:spPr>
-          <a:xfrm>
-            <a:off x="8723026" y="1800457"/>
-            <a:ext cx="151635" cy="151635"/>
-          </a:xfrm>
-          <a:prstGeom prst="ellipse">
-            <a:avLst/>
-          </a:prstGeom>
-          <a:solidFill>
-            <a:srgbClr val="CADCFC"/>
-          </a:solidFill>
-          <a:ln>
-            <a:noFill/>
-          </a:ln>
-          <a:effectLst/>
-        </p:spPr>
-        <p:style>
-          <a:lnRef idx="1">
-            <a:schemeClr val="accent1"/>
-          </a:lnRef>
-          <a:fillRef idx="3">
-            <a:schemeClr val="accent1"/>
-          </a:fillRef>
-          <a:effectRef idx="2">
-            <a:schemeClr val="accent1"/>
-          </a:effectRef>
-          <a:fontRef idx="minor">
-            <a:schemeClr val="lt1"/>
-          </a:fontRef>
-        </p:style>
-        <p:txBody>
-          <a:bodyPr rtlCol="0" anchor="ctr"/>
-          <a:lstStyle/>
-          <a:p>
-            <a:pPr algn="ctr"/>
-          </a:p>
-        </p:txBody>
-      </p:sp>
-      <p:sp>
-        <p:nvSpPr>
-          <p:cNvPr id="13" name="Oval 12"/>
-          <p:cNvSpPr/>
-          <p:nvPr/>
-        </p:nvSpPr>
-        <p:spPr>
-          <a:xfrm>
-            <a:off x="10002589" y="1127331"/>
-            <a:ext cx="123340" cy="123340"/>
-          </a:xfrm>
-          <a:prstGeom prst="ellipse">
-            <a:avLst/>
-          </a:prstGeom>
-          <a:solidFill>
-            <a:srgbClr val="CADCFC"/>
-          </a:solidFill>
-          <a:ln>
-            <a:noFill/>
-          </a:ln>
-          <a:effectLst/>
-        </p:spPr>
-        <p:style>
-          <a:lnRef idx="1">
-            <a:schemeClr val="accent1"/>
-          </a:lnRef>
-          <a:fillRef idx="3">
-            <a:schemeClr val="accent1"/>
-          </a:fillRef>
-          <a:effectRef idx="2">
-            <a:schemeClr val="accent1"/>
-          </a:effectRef>
-          <a:fontRef idx="minor">
-            <a:schemeClr val="lt1"/>
-          </a:fontRef>
-        </p:style>
-        <p:txBody>
-          <a:bodyPr rtlCol="0" anchor="ctr"/>
-          <a:lstStyle/>
-          <a:p>
-            <a:pPr algn="ctr"/>
-          </a:p>
-        </p:txBody>
-      </p:sp>
-      <p:sp>
-        <p:nvSpPr>
-          <p:cNvPr id="14" name="Oval 13"/>
-          <p:cNvSpPr/>
-          <p:nvPr/>
-        </p:nvSpPr>
-        <p:spPr>
-          <a:xfrm>
-            <a:off x="9857158" y="1143868"/>
-            <a:ext cx="74468" cy="74468"/>
-          </a:xfrm>
-          <a:prstGeom prst="ellipse">
-            <a:avLst/>
-          </a:prstGeom>
-          <a:solidFill>
-            <a:srgbClr val="CADCFC"/>
-          </a:solidFill>
-          <a:ln>
-            <a:noFill/>
-          </a:ln>
-          <a:effectLst/>
-        </p:spPr>
-        <p:style>
-          <a:lnRef idx="1">
-            <a:schemeClr val="accent1"/>
-          </a:lnRef>
-          <a:fillRef idx="3">
-            <a:schemeClr val="accent1"/>
-          </a:fillRef>
-          <a:effectRef idx="2">
-            <a:schemeClr val="accent1"/>
-          </a:effectRef>
-          <a:fontRef idx="minor">
-            <a:schemeClr val="lt1"/>
-          </a:fontRef>
-        </p:style>
-        <p:txBody>
-          <a:bodyPr rtlCol="0" anchor="ctr"/>
-          <a:lstStyle/>
-          <a:p>
-            <a:pPr algn="ctr"/>
-          </a:p>
-        </p:txBody>
-      </p:sp>
-      <p:sp>
-        <p:nvSpPr>
-          <p:cNvPr id="15" name="Oval 14"/>
-          <p:cNvSpPr/>
-          <p:nvPr/>
-        </p:nvSpPr>
-        <p:spPr>
-          <a:xfrm>
-            <a:off x="9049183" y="1310756"/>
-            <a:ext cx="77840" cy="77840"/>
-          </a:xfrm>
-          <a:prstGeom prst="ellipse">
-            <a:avLst/>
-          </a:prstGeom>
-          <a:solidFill>
-            <a:srgbClr val="CADCFC"/>
-          </a:solidFill>
-          <a:ln>
-            <a:noFill/>
-          </a:ln>
-          <a:effectLst/>
-        </p:spPr>
-        <p:style>
-          <a:lnRef idx="1">
-            <a:schemeClr val="accent1"/>
-          </a:lnRef>
-          <a:fillRef idx="3">
-            <a:schemeClr val="accent1"/>
-          </a:fillRef>
-          <a:effectRef idx="2">
-            <a:schemeClr val="accent1"/>
-          </a:effectRef>
-          <a:fontRef idx="minor">
-            <a:schemeClr val="lt1"/>
-          </a:fontRef>
-        </p:style>
-        <p:txBody>
-          <a:bodyPr rtlCol="0" anchor="ctr"/>
-          <a:lstStyle/>
-          <a:p>
-            <a:pPr algn="ctr"/>
-          </a:p>
-        </p:txBody>
-      </p:sp>
-      <p:sp>
-        <p:nvSpPr>
-          <p:cNvPr id="16" name="Oval 15"/>
-          <p:cNvSpPr/>
-          <p:nvPr/>
-        </p:nvSpPr>
-        <p:spPr>
-          <a:xfrm>
-            <a:off x="10932422" y="585714"/>
-            <a:ext cx="90801" cy="90801"/>
-          </a:xfrm>
-          <a:prstGeom prst="ellipse">
-            <a:avLst/>
-          </a:prstGeom>
-          <a:solidFill>
-            <a:srgbClr val="CADCFC"/>
-          </a:solidFill>
-          <a:ln>
-            <a:noFill/>
-          </a:ln>
-          <a:effectLst/>
-        </p:spPr>
-        <p:style>
-          <a:lnRef idx="1">
-            <a:schemeClr val="accent1"/>
-          </a:lnRef>
-          <a:fillRef idx="3">
-            <a:schemeClr val="accent1"/>
-          </a:fillRef>
-          <a:effectRef idx="2">
-            <a:schemeClr val="accent1"/>
-          </a:effectRef>
-          <a:fontRef idx="minor">
-            <a:schemeClr val="lt1"/>
-          </a:fontRef>
-        </p:style>
-        <p:txBody>
-          <a:bodyPr rtlCol="0" anchor="ctr"/>
-          <a:lstStyle/>
-          <a:p>
-            <a:pPr algn="ctr"/>
-          </a:p>
-        </p:txBody>
-      </p:sp>
-      <p:sp>
-        <p:nvSpPr>
-          <p:cNvPr id="17" name="Oval 16"/>
-          <p:cNvSpPr/>
-          <p:nvPr/>
-        </p:nvSpPr>
-        <p:spPr>
-          <a:xfrm>
-            <a:off x="11340471" y="1521531"/>
-            <a:ext cx="152824" cy="152824"/>
-          </a:xfrm>
-          <a:prstGeom prst="ellipse">
-            <a:avLst/>
-          </a:prstGeom>
-          <a:solidFill>
-            <a:srgbClr val="CADCFC"/>
-          </a:solidFill>
-          <a:ln>
-            <a:noFill/>
-          </a:ln>
-          <a:effectLst/>
-        </p:spPr>
-        <p:style>
-          <a:lnRef idx="1">
-            <a:schemeClr val="accent1"/>
-          </a:lnRef>
-          <a:fillRef idx="3">
-            <a:schemeClr val="accent1"/>
-          </a:fillRef>
-          <a:effectRef idx="2">
-            <a:schemeClr val="accent1"/>
-          </a:effectRef>
-          <a:fontRef idx="minor">
-            <a:schemeClr val="lt1"/>
-          </a:fontRef>
-        </p:style>
-        <p:txBody>
-          <a:bodyPr rtlCol="0" anchor="ctr"/>
-          <a:lstStyle/>
-          <a:p>
-            <a:pPr algn="ctr"/>
-          </a:p>
-        </p:txBody>
-      </p:sp>
-      <p:sp>
-        <p:nvSpPr>
-          <p:cNvPr id="18" name="Oval 17"/>
-          <p:cNvSpPr/>
-          <p:nvPr/>
-        </p:nvSpPr>
-        <p:spPr>
-          <a:xfrm>
-            <a:off x="9353248" y="979424"/>
-            <a:ext cx="120219" cy="120219"/>
-          </a:xfrm>
-          <a:prstGeom prst="ellipse">
-            <a:avLst/>
-          </a:prstGeom>
-          <a:solidFill>
-            <a:srgbClr val="CADCFC"/>
-          </a:solidFill>
-          <a:ln>
-            <a:noFill/>
-          </a:ln>
-          <a:effectLst/>
-        </p:spPr>
-        <p:style>
-          <a:lnRef idx="1">
-            <a:schemeClr val="accent1"/>
-          </a:lnRef>
-          <a:fillRef idx="3">
-            <a:schemeClr val="accent1"/>
-          </a:fillRef>
-          <a:effectRef idx="2">
-            <a:schemeClr val="accent1"/>
-          </a:effectRef>
-          <a:fontRef idx="minor">
-            <a:schemeClr val="lt1"/>
-          </a:fontRef>
-        </p:style>
-        <p:txBody>
-          <a:bodyPr rtlCol="0" anchor="ctr"/>
-          <a:lstStyle/>
-          <a:p>
-            <a:pPr algn="ctr"/>
-          </a:p>
-        </p:txBody>
-      </p:sp>
-      <p:sp>
-        <p:nvSpPr>
-          <p:cNvPr id="19" name="Oval 18"/>
-          <p:cNvSpPr/>
-          <p:nvPr/>
-        </p:nvSpPr>
-        <p:spPr>
-          <a:xfrm>
-            <a:off x="11141951" y="1563093"/>
-            <a:ext cx="79128" cy="79128"/>
-          </a:xfrm>
-          <a:prstGeom prst="ellipse">
-            <a:avLst/>
-          </a:prstGeom>
-          <a:solidFill>
-            <a:srgbClr val="CADCFC"/>
-          </a:solidFill>
-          <a:ln>
-            <a:noFill/>
-          </a:ln>
-          <a:effectLst/>
-        </p:spPr>
-        <p:style>
-          <a:lnRef idx="1">
-            <a:schemeClr val="accent1"/>
-          </a:lnRef>
-          <a:fillRef idx="3">
-            <a:schemeClr val="accent1"/>
-          </a:fillRef>
-          <a:effectRef idx="2">
-            <a:schemeClr val="accent1"/>
-          </a:effectRef>
-          <a:fontRef idx="minor">
-            <a:schemeClr val="lt1"/>
-          </a:fontRef>
-        </p:style>
-        <p:txBody>
-          <a:bodyPr rtlCol="0" anchor="ctr"/>
-          <a:lstStyle/>
-          <a:p>
-            <a:pPr algn="ctr"/>
-          </a:p>
-        </p:txBody>
-      </p:sp>
-      <p:sp>
-        <p:nvSpPr>
-          <p:cNvPr id="20" name="Oval 19"/>
-          <p:cNvSpPr/>
-          <p:nvPr/>
-        </p:nvSpPr>
-        <p:spPr>
-          <a:xfrm>
-            <a:off x="10571819" y="1270223"/>
-            <a:ext cx="172681" cy="172681"/>
-          </a:xfrm>
-          <a:prstGeom prst="ellipse">
-            <a:avLst/>
-          </a:prstGeom>
-          <a:solidFill>
-            <a:srgbClr val="CADCFC"/>
-          </a:solidFill>
-          <a:ln>
-            <a:noFill/>
-          </a:ln>
-          <a:effectLst/>
-        </p:spPr>
-        <p:style>
-          <a:lnRef idx="1">
-            <a:schemeClr val="accent1"/>
-          </a:lnRef>
-          <a:fillRef idx="3">
-            <a:schemeClr val="accent1"/>
-          </a:fillRef>
-          <a:effectRef idx="2">
-            <a:schemeClr val="accent1"/>
-          </a:effectRef>
-          <a:fontRef idx="minor">
-            <a:schemeClr val="lt1"/>
-          </a:fontRef>
-        </p:style>
-        <p:txBody>
-          <a:bodyPr rtlCol="0" anchor="ctr"/>
-          <a:lstStyle/>
-          <a:p>
-            <a:pPr algn="ctr"/>
-          </a:p>
-        </p:txBody>
-      </p:sp>
-      <p:sp>
-        <p:nvSpPr>
-          <p:cNvPr id="21" name="Oval 20"/>
-          <p:cNvSpPr/>
-          <p:nvPr/>
-        </p:nvSpPr>
-        <p:spPr>
-          <a:xfrm>
-            <a:off x="9631301" y="764032"/>
-            <a:ext cx="94932" cy="94932"/>
-          </a:xfrm>
-          <a:prstGeom prst="ellipse">
-            <a:avLst/>
-          </a:prstGeom>
-          <a:solidFill>
-            <a:srgbClr val="CADCFC"/>
-          </a:solidFill>
-          <a:ln>
-            <a:noFill/>
-          </a:ln>
-          <a:effectLst/>
-        </p:spPr>
-        <p:style>
-          <a:lnRef idx="1">
-            <a:schemeClr val="accent1"/>
-          </a:lnRef>
-          <a:fillRef idx="3">
-            <a:schemeClr val="accent1"/>
-          </a:fillRef>
-          <a:effectRef idx="2">
-            <a:schemeClr val="accent1"/>
-          </a:effectRef>
-          <a:fontRef idx="minor">
-            <a:schemeClr val="lt1"/>
-          </a:fontRef>
-        </p:style>
-        <p:txBody>
-          <a:bodyPr rtlCol="0" anchor="ctr"/>
-          <a:lstStyle/>
-          <a:p>
-            <a:pPr algn="ctr"/>
-          </a:p>
-        </p:txBody>
-      </p:sp>
-      <p:sp>
-        <p:nvSpPr>
-          <p:cNvPr id="22" name="Oval 21"/>
-          <p:cNvSpPr/>
-          <p:nvPr/>
-        </p:nvSpPr>
-        <p:spPr>
-          <a:xfrm>
-            <a:off x="9364313" y="1812855"/>
-            <a:ext cx="146426" cy="146426"/>
-          </a:xfrm>
-          <a:prstGeom prst="ellipse">
-            <a:avLst/>
-          </a:prstGeom>
-          <a:solidFill>
-            <a:srgbClr val="CADCFC"/>
-          </a:solidFill>
-          <a:ln>
-            <a:noFill/>
-          </a:ln>
-          <a:effectLst/>
-        </p:spPr>
-        <p:style>
-          <a:lnRef idx="1">
-            <a:schemeClr val="accent1"/>
-          </a:lnRef>
-          <a:fillRef idx="3">
-            <a:schemeClr val="accent1"/>
-          </a:fillRef>
-          <a:effectRef idx="2">
-            <a:schemeClr val="accent1"/>
-          </a:effectRef>
-          <a:fontRef idx="minor">
-            <a:schemeClr val="lt1"/>
-          </a:fontRef>
-        </p:style>
-        <p:txBody>
-          <a:bodyPr rtlCol="0" anchor="ctr"/>
-          <a:lstStyle/>
-          <a:p>
-            <a:pPr algn="ctr"/>
-          </a:p>
-        </p:txBody>
-      </p:sp>
-      <p:sp>
-        <p:nvSpPr>
-          <p:cNvPr id="23" name="Oval 22"/>
-          <p:cNvSpPr/>
-          <p:nvPr/>
-        </p:nvSpPr>
-        <p:spPr>
-          <a:xfrm>
-            <a:off x="8839276" y="598269"/>
-            <a:ext cx="164024" cy="164024"/>
-          </a:xfrm>
-          <a:prstGeom prst="ellipse">
-            <a:avLst/>
-          </a:prstGeom>
-          <a:solidFill>
-            <a:srgbClr val="CADCFC"/>
-          </a:solidFill>
-          <a:ln>
-            <a:noFill/>
-          </a:ln>
-          <a:effectLst/>
-        </p:spPr>
-        <p:style>
-          <a:lnRef idx="1">
-            <a:schemeClr val="accent1"/>
-          </a:lnRef>
-          <a:fillRef idx="3">
-            <a:schemeClr val="accent1"/>
-          </a:fillRef>
-          <a:effectRef idx="2">
-            <a:schemeClr val="accent1"/>
-          </a:effectRef>
-          <a:fontRef idx="minor">
-            <a:schemeClr val="lt1"/>
-          </a:fontRef>
-        </p:style>
-        <p:txBody>
-          <a:bodyPr rtlCol="0" anchor="ctr"/>
-          <a:lstStyle/>
-          <a:p>
-            <a:pPr algn="ctr"/>
-          </a:p>
-        </p:txBody>
-      </p:sp>
-      <p:sp>
-        <p:nvSpPr>
-          <p:cNvPr id="24" name="Oval 23"/>
-          <p:cNvSpPr/>
-          <p:nvPr/>
-        </p:nvSpPr>
-        <p:spPr>
-          <a:xfrm>
-            <a:off x="9749071" y="1780791"/>
-            <a:ext cx="153264" cy="153264"/>
-          </a:xfrm>
-          <a:prstGeom prst="ellipse">
-            <a:avLst/>
-          </a:prstGeom>
-          <a:solidFill>
-            <a:srgbClr val="CADCFC"/>
-          </a:solidFill>
-          <a:ln>
-            <a:noFill/>
-          </a:ln>
-          <a:effectLst/>
-        </p:spPr>
-        <p:style>
-          <a:lnRef idx="1">
-            <a:schemeClr val="accent1"/>
-          </a:lnRef>
-          <a:fillRef idx="3">
-            <a:schemeClr val="accent1"/>
-          </a:fillRef>
-          <a:effectRef idx="2">
-            <a:schemeClr val="accent1"/>
-          </a:effectRef>
-          <a:fontRef idx="minor">
-            <a:schemeClr val="lt1"/>
-          </a:fontRef>
-        </p:style>
-        <p:txBody>
-          <a:bodyPr rtlCol="0" anchor="ctr"/>
-          <a:lstStyle/>
-          <a:p>
-            <a:pPr algn="ctr"/>
-          </a:p>
-        </p:txBody>
-      </p:sp>
-      <p:sp>
-        <p:nvSpPr>
-          <p:cNvPr id="25" name="Oval 24"/>
-          <p:cNvSpPr/>
-          <p:nvPr/>
-        </p:nvSpPr>
-        <p:spPr>
-          <a:xfrm>
-            <a:off x="8807338" y="1186278"/>
-            <a:ext cx="88068" cy="88068"/>
-          </a:xfrm>
-          <a:prstGeom prst="ellipse">
-            <a:avLst/>
-          </a:prstGeom>
-          <a:solidFill>
-            <a:srgbClr val="CADCFC"/>
-          </a:solidFill>
-          <a:ln>
-            <a:noFill/>
-          </a:ln>
-          <a:effectLst/>
-        </p:spPr>
-        <p:style>
-          <a:lnRef idx="1">
-            <a:schemeClr val="accent1"/>
-          </a:lnRef>
-          <a:fillRef idx="3">
-            <a:schemeClr val="accent1"/>
-          </a:fillRef>
-          <a:effectRef idx="2">
-            <a:schemeClr val="accent1"/>
-          </a:effectRef>
-          <a:fontRef idx="minor">
-            <a:schemeClr val="lt1"/>
-          </a:fontRef>
-        </p:style>
-        <p:txBody>
-          <a:bodyPr rtlCol="0" anchor="ctr"/>
-          <a:lstStyle/>
-          <a:p>
-            <a:pPr algn="ctr"/>
-          </a:p>
-        </p:txBody>
-      </p:sp>
-      <p:sp>
-        <p:nvSpPr>
-          <p:cNvPr id="26" name="Oval 25"/>
-          <p:cNvSpPr/>
-          <p:nvPr/>
-        </p:nvSpPr>
-        <p:spPr>
-          <a:xfrm>
-            <a:off x="9556258" y="1240957"/>
-            <a:ext cx="155865" cy="155865"/>
-          </a:xfrm>
-          <a:prstGeom prst="ellipse">
-            <a:avLst/>
-          </a:prstGeom>
-          <a:solidFill>
-            <a:srgbClr val="CADCFC"/>
-          </a:solidFill>
-          <a:ln>
-            <a:noFill/>
-          </a:ln>
-          <a:effectLst/>
-        </p:spPr>
-        <p:style>
-          <a:lnRef idx="1">
-            <a:schemeClr val="accent1"/>
-          </a:lnRef>
-          <a:fillRef idx="3">
-            <a:schemeClr val="accent1"/>
-          </a:fillRef>
-          <a:effectRef idx="2">
-            <a:schemeClr val="accent1"/>
-          </a:effectRef>
-          <a:fontRef idx="minor">
-            <a:schemeClr val="lt1"/>
-          </a:fontRef>
-        </p:style>
-        <p:txBody>
-          <a:bodyPr rtlCol="0" anchor="ctr"/>
-          <a:lstStyle/>
-          <a:p>
-            <a:pPr algn="ctr"/>
-          </a:p>
-        </p:txBody>
-      </p:sp>
-      <p:sp>
-        <p:nvSpPr>
-          <p:cNvPr id="27" name="Oval 26"/>
-          <p:cNvSpPr/>
-          <p:nvPr/>
-        </p:nvSpPr>
-        <p:spPr>
-          <a:xfrm>
-            <a:off x="9424404" y="1602892"/>
-            <a:ext cx="105644" cy="105644"/>
-          </a:xfrm>
-          <a:prstGeom prst="ellipse">
-            <a:avLst/>
-          </a:prstGeom>
-          <a:solidFill>
-            <a:srgbClr val="CADCFC"/>
-          </a:solidFill>
-          <a:ln>
-            <a:noFill/>
-          </a:ln>
-          <a:effectLst/>
-        </p:spPr>
-        <p:style>
-          <a:lnRef idx="1">
-            <a:schemeClr val="accent1"/>
-          </a:lnRef>
-          <a:fillRef idx="3">
-            <a:schemeClr val="accent1"/>
-          </a:fillRef>
-          <a:effectRef idx="2">
-            <a:schemeClr val="accent1"/>
-          </a:effectRef>
-          <a:fontRef idx="minor">
-            <a:schemeClr val="lt1"/>
-          </a:fontRef>
-        </p:style>
-        <p:txBody>
-          <a:bodyPr rtlCol="0" anchor="ctr"/>
-          <a:lstStyle/>
-          <a:p>
-            <a:pPr algn="ctr"/>
-          </a:p>
-        </p:txBody>
-      </p:sp>
-      <p:sp>
-        <p:nvSpPr>
-          <p:cNvPr id="28" name="Oval 27"/>
-          <p:cNvSpPr/>
-          <p:nvPr/>
-        </p:nvSpPr>
-        <p:spPr>
-          <a:xfrm>
-            <a:off x="8945270" y="806202"/>
-            <a:ext cx="75186" cy="75186"/>
-          </a:xfrm>
-          <a:prstGeom prst="ellipse">
-            <a:avLst/>
-          </a:prstGeom>
-          <a:solidFill>
-            <a:srgbClr val="CADCFC"/>
-          </a:solidFill>
-          <a:ln>
-            <a:noFill/>
-          </a:ln>
-          <a:effectLst/>
-        </p:spPr>
-        <p:style>
-          <a:lnRef idx="1">
-            <a:schemeClr val="accent1"/>
-          </a:lnRef>
-          <a:fillRef idx="3">
-            <a:schemeClr val="accent1"/>
-          </a:fillRef>
-          <a:effectRef idx="2">
-            <a:schemeClr val="accent1"/>
-          </a:effectRef>
-          <a:fontRef idx="minor">
-            <a:schemeClr val="lt1"/>
-          </a:fontRef>
-        </p:style>
-        <p:txBody>
-          <a:bodyPr rtlCol="0" anchor="ctr"/>
-          <a:lstStyle/>
-          <a:p>
-            <a:pPr algn="ctr"/>
-          </a:p>
-        </p:txBody>
-      </p:sp>
-      <p:sp>
-        <p:nvSpPr>
-          <p:cNvPr id="29" name="TextBox 28"/>
-          <p:cNvSpPr txBox="1"/>
-          <p:nvPr/>
-        </p:nvSpPr>
-        <p:spPr>
-          <a:xfrm>
-            <a:off x="640080" y="3200000"/>
-            <a:ext cx="10000000" cy="1000000"/>
-          </a:xfrm>
-          <a:prstGeom prst="rect">
-            <a:avLst/>
-          </a:prstGeom>
-          <a:noFill/>
-        </p:spPr>
-        <p:txBody>
-          <a:bodyPr wrap="square" lIns="0" tIns="0" rIns="0" bIns="0">
-            <a:spAutoFit/>
-          </a:bodyPr>
-          <a:lstStyle/>
-          <a:p>
-            <a:pPr algn="l">
-              <a:spcAft>
-                <a:spcPts val="0"/>
-              </a:spcAft>
-            </a:pPr>
-            <a:r>
-              <a:rPr sz="3400" b="1">
-                <a:solidFill>
-                  <a:srgbClr val="FFFFFF"/>
-                </a:solidFill>
-                <a:latin typeface="Calibri"/>
-              </a:rPr>
-              <a:t>Point-in-time correctness</a:t>
-            </a:r>
-          </a:p>
-        </p:txBody>
-      </p:sp>
-      <p:sp>
-        <p:nvSpPr>
-          <p:cNvPr id="30" name="TextBox 29"/>
-          <p:cNvSpPr txBox="1"/>
-          <p:nvPr/>
-        </p:nvSpPr>
-        <p:spPr>
-          <a:xfrm>
-            <a:off x="640080" y="4250000"/>
-            <a:ext cx="9500000" cy="900000"/>
-          </a:xfrm>
-          <a:prstGeom prst="rect">
-            <a:avLst/>
-          </a:prstGeom>
-          <a:noFill/>
-        </p:spPr>
-        <p:txBody>
-          <a:bodyPr wrap="square" lIns="0" tIns="0" rIns="0" bIns="0">
-            <a:spAutoFit/>
-          </a:bodyPr>
-          <a:lstStyle/>
-          <a:p>
-            <a:pPr algn="l">
-              <a:spcAft>
-                <a:spcPts val="0"/>
-              </a:spcAft>
-            </a:pPr>
-            <a:r>
-              <a:rPr sz="1500" b="0">
-                <a:solidFill>
-                  <a:srgbClr val="CADCFC"/>
-                </a:solidFill>
-                <a:latin typeface="Calibri"/>
-              </a:rPr>
-              <a:t>The most important idea in this lesson.</a:t>
-            </a:r>
-          </a:p>
-        </p:txBody>
-      </p:sp>
-      <p:sp>
-        <p:nvSpPr>
-          <p:cNvPr id="31" name="TextBox 30"/>
-          <p:cNvSpPr txBox="1"/>
-          <p:nvPr/>
-        </p:nvSpPr>
-        <p:spPr>
-          <a:xfrm>
-            <a:off x="502920" y="6510528"/>
-            <a:ext cx="4572000" cy="274320"/>
-          </a:xfrm>
-          <a:prstGeom prst="rect">
-            <a:avLst/>
-          </a:prstGeom>
-          <a:noFill/>
-        </p:spPr>
-        <p:txBody>
-          <a:bodyPr wrap="square" lIns="0" tIns="0" rIns="0" bIns="0">
-            <a:spAutoFit/>
-          </a:bodyPr>
-          <a:lstStyle/>
-          <a:p>
-            <a:pPr algn="l">
-              <a:spcAft>
-                <a:spcPts val="0"/>
-              </a:spcAft>
-            </a:pPr>
-            <a:r>
-              <a:rPr sz="900" b="0">
-                <a:solidFill>
-                  <a:srgbClr val="CADCFC"/>
-                </a:solidFill>
-                <a:latin typeface="Calibri"/>
-              </a:rPr>
-              <a:t>Data engineering och agila metoder · AIM25</a:t>
-            </a:r>
-          </a:p>
-        </p:txBody>
-      </p:sp>
-      <p:sp>
-        <p:nvSpPr>
-          <p:cNvPr id="32" name="TextBox 31"/>
-          <p:cNvSpPr txBox="1"/>
-          <p:nvPr/>
-        </p:nvSpPr>
-        <p:spPr>
-          <a:xfrm>
-            <a:off x="11475720" y="6510528"/>
-            <a:ext cx="548640" cy="274320"/>
-          </a:xfrm>
-          <a:prstGeom prst="rect">
-            <a:avLst/>
-          </a:prstGeom>
-          <a:noFill/>
-        </p:spPr>
-        <p:txBody>
-          <a:bodyPr wrap="square" lIns="0" tIns="0" rIns="0" bIns="0">
-            <a:spAutoFit/>
-          </a:bodyPr>
-          <a:lstStyle/>
-          <a:p>
-            <a:pPr algn="r">
-              <a:spcAft>
-                <a:spcPts val="0"/>
-              </a:spcAft>
-            </a:pPr>
-            <a:r>
-              <a:rPr sz="900" b="0">
-                <a:solidFill>
-                  <a:srgbClr val="CADCFC"/>
-                </a:solidFill>
-                <a:latin typeface="Calibri"/>
-              </a:rPr>
-              <a:t>8</a:t>
-            </a:r>
-          </a:p>
-        </p:txBody>
-      </p:sp>
-    </p:spTree>
-  </p:cSld>
-  <p:clrMapOvr>
-    <a:masterClrMapping/>
-  </p:clrMapOvr>
-</p:sld>
-</file>
-
-<file path=ppt/slides/slide9.xml><?xml version="1.0" encoding="utf-8"?>
-<p:sld xmlns:a="http://schemas.openxmlformats.org/drawingml/2006/main" xmlns:p="http://schemas.openxmlformats.org/presentationml/2006/main" xmlns:r="http://schemas.openxmlformats.org/officeDocument/2006/relationships">
-  <p:cSld>
-    <p:bg>
-      <p:bgPr>
-        <a:solidFill>
-          <a:srgbClr val="F1F5FC"/>
-        </a:solidFill>
-        <a:effectLst/>
-      </p:bgPr>
-    </p:bg>
-    <p:spTree>
-      <p:nvGrpSpPr>
-        <p:cNvPr id="1" name=""/>
-        <p:cNvGrpSpPr/>
-        <p:nvPr/>
-      </p:nvGrpSpPr>
-      <p:grpSpPr/>
+      <p:grpSpPr>
+        <a:xfrm>
+          <a:off x="0" y="0"/>
+          <a:ext cx="0" cy="0"/>
+          <a:chOff x="0" y="0"/>
+          <a:chExt cx="0" cy="0"/>
+        </a:xfrm>
+      </p:grpSpPr>
       <p:sp>
         <p:nvSpPr>
           <p:cNvPr id="2" name="TextBox 1"/>
